--- a/docs/ABB_Workflow_Support_Slides.pptx
+++ b/docs/ABB_Workflow_Support_Slides.pptx
@@ -8,6 +8,10 @@
     <p:notesMasterId xmlns:r="http://schemas.openxmlformats.org/officeDocument/2006/relationships" r:id="R3889d8210f40424b"/>
   </p:notesMasterIdLst>
   <p:sldIdLst>
+    <p:sldId xmlns:ns0="http://schemas.openxmlformats.org/officeDocument/2006/relationships" id="258" ns0:id="rId8"/>
+    <p:sldId xmlns:ns0="http://schemas.openxmlformats.org/officeDocument/2006/relationships" id="259" ns0:id="rId9"/>
+    <p:sldId xmlns:ns0="http://schemas.openxmlformats.org/officeDocument/2006/relationships" id="260" ns0:id="rId10"/>
+    <p:sldId xmlns:ns0="http://schemas.openxmlformats.org/officeDocument/2006/relationships" id="261" ns0:id="rId11"/>
     <p:sldId xmlns:r="http://schemas.openxmlformats.org/officeDocument/2006/relationships" id="256" r:id="R84e1a28f62564b27"/>
     <p:sldId xmlns:r="http://schemas.openxmlformats.org/officeDocument/2006/relationships" id="257" r:id="Ra70c995a2fd4481a"/>
   </p:sldIdLst>
@@ -443,12 +447,7 @@
           <a:lstStyle xmlns:a="http://schemas.openxmlformats.org/drawingml/2006/main"/>
           <a:p xmlns:a="http://schemas.openxmlformats.org/drawingml/2006/main">
             <a:r>
-              <a:t>Source: https://github.com/StefanTyllo/ABB-Training/blob/training/workflow-labs/docs/ABB_Workflow_Training.pdf</a:t>
-            </a:r>
-          </a:p>
-          <a:p xmlns:a="http://schemas.openxmlformats.org/drawingml/2006/main">
-            <a:r>
-              <a:t>Pages 6–7, sections 5–6, define the four stages. Page 8 covers fresh-case replay. Use one conversation for the guided demonstration and extraction, then a new conversation for transfer. Keep workflow-md-only.md unchanged. Stage 3 keeps model judgment and human decisions explicit. Stage 4 moves fully specified repeatable operations into deterministic code, not another LLM call.</a:t>
+              <a:t>Polska wersja istniejącego slajdu z PR #2. Zachowano układ, kolory i edytowalne elementy. Nazwy plików są nazwami artefaktów, dlatego pozostają w oryginale.</a:t>
             </a:r>
           </a:p>
         </p:txBody>
@@ -518,17 +517,7 @@
           <a:lstStyle xmlns:a="http://schemas.openxmlformats.org/drawingml/2006/main"/>
           <a:p xmlns:a="http://schemas.openxmlformats.org/drawingml/2006/main">
             <a:r>
-              <a:t>Source for training context and four-stage method: https://github.com/StefanTyllo/ABB-Training/blob/training/workflow-labs/docs/ABB_Workflow_Training.pdf</a:t>
-            </a:r>
-          </a:p>
-          <a:p xmlns:a="http://schemas.openxmlformats.org/drawingml/2006/main">
-            <a:r>
-              <a:t>The Jira/browser chain and the comparison of one CLI execution against separate executions are the user-provided teaching example, not an executed experiment or a result reported by the PDF. Distraction labels illustrate possible failure modes. No success-rate claim is made.</a:t>
-            </a:r>
-          </a:p>
-          <a:p xmlns:a="http://schemas.openxmlformats.org/drawingml/2006/main">
-            <a:r>
-              <a:t>For path B, each box means a separate fresh Copilot CLI execution. The output filename under each box is illustrative, not a verified CLI contract. The next execution must receive the previous output plus the original goal, relevant acceptance criteria and any still-required earlier artifacts. requirements.md remains authoritative through test creation. Validate each handoff and stop on missing evidence. session.json refers to a session handle or browser-state reference, never credentials. Separate processes need an explicit supported means to retain or restore the authenticated browser session. dom-evidence.json should preserve observations and requirement references. differences.md is stored in the new Jira issue, whose ID/URL is recorded in issue.json for the final test-generation step. A fresh execution cannot recover facts omitted from its inputs. This execution split is separate from stage 3/4 deterministic code extraction.</a:t>
+              <a:t>Polska wersja istniejącego slajdu z PR #2. Zachowano układ, kolory i edytowalne elementy. Nazwy plików są nazwami artefaktów, dlatego pozostają w oryginale.</a:t>
             </a:r>
           </a:p>
         </p:txBody>
@@ -554,6 +543,286 @@
   </p:cSld>
   <p:clrMapOvr>
     <a:masterClrMapping xmlns:a="http://schemas.openxmlformats.org/drawingml/2006/main"/>
+  </p:clrMapOvr>
+</p:notes>
+</file>
+
+<file path=ppt/notesSlides/notesSlide3.xml><?xml version="1.0" encoding="utf-8"?>
+<p:notes xmlns:a="http://schemas.openxmlformats.org/drawingml/2006/main" xmlns:p="http://schemas.openxmlformats.org/presentationml/2006/main" xmlns:r="http://schemas.openxmlformats.org/officeDocument/2006/relationships">
+  <p:cSld>
+    <p:spTree>
+      <p:nvGrpSpPr>
+        <p:cNvPr id="1" name=""/>
+        <p:cNvGrpSpPr/>
+        <p:nvPr/>
+      </p:nvGrpSpPr>
+      <p:grpSpPr>
+        <a:xfrm>
+          <a:off x="0" y="0"/>
+          <a:ext cx="0" cy="0"/>
+          <a:chOff x="0" y="0"/>
+          <a:chExt cx="0" cy="0"/>
+        </a:xfrm>
+      </p:grpSpPr>
+      <p:sp>
+        <p:nvSpPr>
+          <p:cNvPr id="2" name="Slide Image Placeholder 1"/>
+          <p:cNvSpPr>
+            <a:spLocks noGrp="1"/>
+          </p:cNvSpPr>
+          <p:nvPr>
+            <p:ph type="sldImg" idx="2"/>
+          </p:nvPr>
+        </p:nvSpPr>
+        <p:spPr/>
+      </p:sp>
+      <p:sp>
+        <p:nvSpPr>
+          <p:cNvPr id="3" name="Notes Placeholder 2"/>
+          <p:cNvSpPr>
+            <a:spLocks noGrp="1"/>
+          </p:cNvSpPr>
+          <p:nvPr>
+            <p:ph type="body" idx="3" sz="quarter"/>
+          </p:nvPr>
+        </p:nvSpPr>
+        <p:spPr/>
+        <p:txBody>
+          <a:bodyPr/>
+          <a:lstStyle/>
+          <a:p>
+            <a:r>
+              <a:t>Plansza otwierająca. Duży czerwony napis na białym tle nawiązuje do wizualnego charakteru ABB. Kostki są edytowalnymi kształtami, nie bitmapą.</a:t>
+            </a:r>
+          </a:p>
+        </p:txBody>
+      </p:sp>
+      <p:sp>
+        <p:nvSpPr>
+          <p:cNvPr id="4" name="Slide Number Placeholder 3"/>
+          <p:cNvSpPr>
+            <a:spLocks noGrp="1"/>
+          </p:cNvSpPr>
+          <p:nvPr>
+            <p:ph type="sldNum" idx="5" sz="quarter"/>
+          </p:nvPr>
+        </p:nvSpPr>
+        <p:spPr/>
+      </p:sp>
+    </p:spTree>
+  </p:cSld>
+  <p:clrMapOvr>
+    <a:masterClrMapping/>
+  </p:clrMapOvr>
+</p:notes>
+</file>
+
+<file path=ppt/notesSlides/notesSlide4.xml><?xml version="1.0" encoding="utf-8"?>
+<p:notes xmlns:a="http://schemas.openxmlformats.org/drawingml/2006/main" xmlns:p="http://schemas.openxmlformats.org/presentationml/2006/main" xmlns:r="http://schemas.openxmlformats.org/officeDocument/2006/relationships">
+  <p:cSld>
+    <p:spTree>
+      <p:nvGrpSpPr>
+        <p:cNvPr id="1" name=""/>
+        <p:cNvGrpSpPr/>
+        <p:nvPr/>
+      </p:nvGrpSpPr>
+      <p:grpSpPr>
+        <a:xfrm>
+          <a:off x="0" y="0"/>
+          <a:ext cx="0" cy="0"/>
+          <a:chOff x="0" y="0"/>
+          <a:chExt cx="0" cy="0"/>
+        </a:xfrm>
+      </p:grpSpPr>
+      <p:sp>
+        <p:nvSpPr>
+          <p:cNvPr id="2" name="Slide Image Placeholder 1"/>
+          <p:cNvSpPr>
+            <a:spLocks noGrp="1"/>
+          </p:cNvSpPr>
+          <p:nvPr>
+            <p:ph type="sldImg" idx="2"/>
+          </p:nvPr>
+        </p:nvSpPr>
+        <p:spPr/>
+      </p:sp>
+      <p:sp>
+        <p:nvSpPr>
+          <p:cNvPr id="3" name="Notes Placeholder 2"/>
+          <p:cNvSpPr>
+            <a:spLocks noGrp="1"/>
+          </p:cNvSpPr>
+          <p:nvPr>
+            <p:ph type="body" idx="3" sz="quarter"/>
+          </p:nvPr>
+        </p:nvSpPr>
+        <p:spPr/>
+        <p:txBody>
+          <a:bodyPr/>
+          <a:lstStyle/>
+          <a:p>
+            <a:r>
+              <a:t>Źródło: dostarczony chatgpt-astra-training.html, moduł „Stochasticity: One Prompt, Several Valid Answers”, slajdy „One Prompt, Several Valid Answers” i „Reduce Unwanted Variability”. Przykłady są ilustracjami, a nie zapisami pomiaru. Jasne instrukcje redukują niejednoznaczność, ale nie gwarantują identycznych ani poprawnych wyników. Powtarzana zgodność nie zastępuje weryfikacji.</a:t>
+            </a:r>
+          </a:p>
+        </p:txBody>
+      </p:sp>
+      <p:sp>
+        <p:nvSpPr>
+          <p:cNvPr id="4" name="Slide Number Placeholder 3"/>
+          <p:cNvSpPr>
+            <a:spLocks noGrp="1"/>
+          </p:cNvSpPr>
+          <p:nvPr>
+            <p:ph type="sldNum" idx="5" sz="quarter"/>
+          </p:nvPr>
+        </p:nvSpPr>
+        <p:spPr/>
+      </p:sp>
+    </p:spTree>
+  </p:cSld>
+  <p:clrMapOvr>
+    <a:masterClrMapping/>
+  </p:clrMapOvr>
+</p:notes>
+</file>
+
+<file path=ppt/notesSlides/notesSlide5.xml><?xml version="1.0" encoding="utf-8"?>
+<p:notes xmlns:a="http://schemas.openxmlformats.org/drawingml/2006/main" xmlns:p="http://schemas.openxmlformats.org/presentationml/2006/main" xmlns:r="http://schemas.openxmlformats.org/officeDocument/2006/relationships">
+  <p:cSld>
+    <p:spTree>
+      <p:nvGrpSpPr>
+        <p:cNvPr id="1" name=""/>
+        <p:cNvGrpSpPr/>
+        <p:nvPr/>
+      </p:nvGrpSpPr>
+      <p:grpSpPr>
+        <a:xfrm>
+          <a:off x="0" y="0"/>
+          <a:ext cx="0" cy="0"/>
+          <a:chOff x="0" y="0"/>
+          <a:chExt cx="0" cy="0"/>
+        </a:xfrm>
+      </p:grpSpPr>
+      <p:sp>
+        <p:nvSpPr>
+          <p:cNvPr id="2" name="Slide Image Placeholder 1"/>
+          <p:cNvSpPr>
+            <a:spLocks noGrp="1"/>
+          </p:cNvSpPr>
+          <p:nvPr>
+            <p:ph type="sldImg" idx="2"/>
+          </p:nvPr>
+        </p:nvSpPr>
+        <p:spPr/>
+      </p:sp>
+      <p:sp>
+        <p:nvSpPr>
+          <p:cNvPr id="3" name="Notes Placeholder 2"/>
+          <p:cNvSpPr>
+            <a:spLocks noGrp="1"/>
+          </p:cNvSpPr>
+          <p:nvPr>
+            <p:ph type="body" idx="3" sz="quarter"/>
+          </p:nvPr>
+        </p:nvSpPr>
+        <p:spPr/>
+        <p:txBody>
+          <a:bodyPr/>
+          <a:lstStyle/>
+          <a:p>
+            <a:r>
+              <a:t>„Amnezja” to metafora braku trwałego stanu rozmowy w samym wywołaniu modelu. Aplikacja może przechowywać historię i dostarczać ją modelowi; wyjaśnia to kolejny slajd.</a:t>
+            </a:r>
+          </a:p>
+        </p:txBody>
+      </p:sp>
+      <p:sp>
+        <p:nvSpPr>
+          <p:cNvPr id="4" name="Slide Number Placeholder 3"/>
+          <p:cNvSpPr>
+            <a:spLocks noGrp="1"/>
+          </p:cNvSpPr>
+          <p:nvPr>
+            <p:ph type="sldNum" idx="5" sz="quarter"/>
+          </p:nvPr>
+        </p:nvSpPr>
+        <p:spPr/>
+      </p:sp>
+    </p:spTree>
+  </p:cSld>
+  <p:clrMapOvr>
+    <a:masterClrMapping/>
+  </p:clrMapOvr>
+</p:notes>
+</file>
+
+<file path=ppt/notesSlides/notesSlide6.xml><?xml version="1.0" encoding="utf-8"?>
+<p:notes xmlns:a="http://schemas.openxmlformats.org/drawingml/2006/main" xmlns:p="http://schemas.openxmlformats.org/presentationml/2006/main" xmlns:r="http://schemas.openxmlformats.org/officeDocument/2006/relationships">
+  <p:cSld>
+    <p:spTree>
+      <p:nvGrpSpPr>
+        <p:cNvPr id="1" name=""/>
+        <p:cNvGrpSpPr/>
+        <p:nvPr/>
+      </p:nvGrpSpPr>
+      <p:grpSpPr>
+        <a:xfrm>
+          <a:off x="0" y="0"/>
+          <a:ext cx="0" cy="0"/>
+          <a:chOff x="0" y="0"/>
+          <a:chExt cx="0" cy="0"/>
+        </a:xfrm>
+      </p:grpSpPr>
+      <p:sp>
+        <p:nvSpPr>
+          <p:cNvPr id="2" name="Slide Image Placeholder 1"/>
+          <p:cNvSpPr>
+            <a:spLocks noGrp="1"/>
+          </p:cNvSpPr>
+          <p:nvPr>
+            <p:ph type="sldImg" idx="2"/>
+          </p:nvPr>
+        </p:nvSpPr>
+        <p:spPr/>
+      </p:sp>
+      <p:sp>
+        <p:nvSpPr>
+          <p:cNvPr id="3" name="Notes Placeholder 2"/>
+          <p:cNvSpPr>
+            <a:spLocks noGrp="1"/>
+          </p:cNvSpPr>
+          <p:nvPr>
+            <p:ph type="body" idx="3" sz="quarter"/>
+          </p:nvPr>
+        </p:nvSpPr>
+        <p:spPr/>
+        <p:txBody>
+          <a:bodyPr/>
+          <a:lstStyle/>
+          <a:p>
+            <a:r>
+              <a:t>Adaptacja wskazanego lokalnego slajdu: MS_Copilot/previews/index.html#slide=slide-010&amp;locale=pl. Schemat przedstawia dostarczanie historii przez aplikację w kolejnych wywołaniach. W praktyce może to być wybrana historia, streszczenie lub kontekst pobrany z zewnątrz. Cache powtarzanego prefiksu jest optymalizacją przetwarzania i nie stanowi uczenia ani samodzielnej trwałej pamięci modelu. Nie zakładamy, że każde wywołanie używa cache. Wszystkie elementy diagramu pozostają edytowalne.</a:t>
+            </a:r>
+          </a:p>
+        </p:txBody>
+      </p:sp>
+      <p:sp>
+        <p:nvSpPr>
+          <p:cNvPr id="4" name="Slide Number Placeholder 3"/>
+          <p:cNvSpPr>
+            <a:spLocks noGrp="1"/>
+          </p:cNvSpPr>
+          <p:nvPr>
+            <p:ph type="sldNum" idx="5" sz="quarter"/>
+          </p:nvPr>
+        </p:nvSpPr>
+        <p:spPr/>
+      </p:sp>
+    </p:spTree>
+  </p:cSld>
+  <p:clrMapOvr>
+    <a:masterClrMapping/>
   </p:clrMapOvr>
 </p:notes>
 </file>
@@ -2954,7 +3223,7 @@
               </a:defRPr>
             </a:pPr>
             <a:r>
-              <a:rPr sz="1350" b="0">
+              <a:rPr sz="1350" b="0" lang="pl-PL">
                 <a:solidFill>
                   <a:srgbClr val="536873"/>
                 </a:solidFill>
@@ -2962,7 +3231,7 @@
                 <a:ea typeface="DejaVu Sans"/>
                 <a:cs typeface="DejaVu Sans"/>
               </a:rPr>
-              <a:t>ABB engineering training / Demonstrate - abstract - automate</a:t>
+              <a:t>Szkolenie inżynierskie ABB / Pokaż — uogólnij — zautomatyzuj</a:t>
             </a:r>
           </a:p>
         </p:txBody>
@@ -3023,7 +3292,7 @@
               </a:defRPr>
             </a:pPr>
             <a:r>
-              <a:rPr sz="3450" b="1">
+              <a:rPr sz="3450" b="1" lang="pl-PL">
                 <a:solidFill>
                   <a:srgbClr val="192F3C"/>
                 </a:solidFill>
@@ -3031,7 +3300,7 @@
                 <a:ea typeface="DejaVu Sans"/>
                 <a:cs typeface="DejaVu Sans"/>
               </a:rPr>
-              <a:t>The four-stage method</a:t>
+              <a:t>Metoda czterech etapów</a:t>
             </a:r>
           </a:p>
         </p:txBody>
@@ -3066,6 +3335,10 @@
             <a:prstDash val="solid"/>
           </a:ln>
         </p:spPr>
+        <p:txBody xmlns:a="http://schemas.openxmlformats.org/drawingml/2006/main">
+          <a:bodyPr/>
+          <a:p/>
+        </p:txBody>
       </p:sp>
       <p:sp>
         <p:nvSpPr>
@@ -3123,7 +3396,7 @@
               </a:defRPr>
             </a:pPr>
             <a:r>
-              <a:rPr sz="1350" b="0">
+              <a:rPr sz="1350" b="0" lang="pl-PL">
                 <a:solidFill>
                   <a:srgbClr val="536873"/>
                 </a:solidFill>
@@ -3131,7 +3404,7 @@
                 <a:ea typeface="DejaVu Sans"/>
                 <a:cs typeface="DejaVu Sans"/>
               </a:rPr>
-              <a:t>1</a:t>
+              <a:t>5</a:t>
             </a:r>
           </a:p>
         </p:txBody>
@@ -3192,7 +3465,7 @@
               </a:defRPr>
             </a:pPr>
             <a:r>
-              <a:rPr sz="2025" b="0">
+              <a:rPr sz="2025" b="0" lang="pl-PL">
                 <a:solidFill>
                   <a:srgbClr val="192F3C"/>
                 </a:solidFill>
@@ -3200,7 +3473,7 @@
                 <a:ea typeface="DejaVu Sans"/>
                 <a:cs typeface="DejaVu Sans"/>
               </a:rPr>
-              <a:t>Complete a real task, extract the workflow, then move repeatable operations into code.</a:t>
+              <a:t>Wykonaj zadanie, opisz proces i przenieś powtarzalne operacje do kodu.</a:t>
             </a:r>
           </a:p>
         </p:txBody>
@@ -3237,6 +3510,10 @@
             <a:prstDash val="solid"/>
           </a:ln>
         </p:spPr>
+        <p:txBody xmlns:a="http://schemas.openxmlformats.org/drawingml/2006/main">
+          <a:bodyPr/>
+          <a:p/>
+        </p:txBody>
       </p:sp>
       <p:sp>
         <p:nvSpPr>
@@ -3363,7 +3640,7 @@
               </a:defRPr>
             </a:pPr>
             <a:r>
-              <a:rPr sz="2175" b="1">
+              <a:rPr sz="2175" b="1" lang="pl-PL">
                 <a:solidFill>
                   <a:srgbClr val="192F3C"/>
                 </a:solidFill>
@@ -3371,30 +3648,20 @@
                 <a:ea typeface="DejaVu Sans"/>
                 <a:cs typeface="DejaVu Sans"/>
               </a:rPr>
-              <a:t>Demonstrate</a:t>
+              <a:t>Pokaż</a:t>
             </a:r>
           </a:p>
           <a:p xmlns:a="http://schemas.openxmlformats.org/drawingml/2006/main">
-            <a:pPr algn="l">
-              <a:defRPr sz="2175" b="1">
+            <a:r>
+              <a:rPr sz="2175" b="1" lang="pl-PL">
                 <a:solidFill>
                   <a:srgbClr val="192F3C"/>
                 </a:solidFill>
                 <a:latin typeface="DejaVu Sans"/>
                 <a:ea typeface="DejaVu Sans"/>
                 <a:cs typeface="DejaVu Sans"/>
-              </a:defRPr>
-            </a:pPr>
-            <a:r>
-              <a:rPr sz="2175" b="1">
-                <a:solidFill>
-                  <a:srgbClr val="192F3C"/>
-                </a:solidFill>
-                <a:latin typeface="DejaVu Sans"/>
-                <a:ea typeface="DejaVu Sans"/>
-                <a:cs typeface="DejaVu Sans"/>
-              </a:rPr>
-              <a:t>and document</a:t>
+              </a:rPr>
+              <a:t>i udokumentuj</a:t>
             </a:r>
           </a:p>
         </p:txBody>
@@ -3455,7 +3722,7 @@
               </a:defRPr>
             </a:pPr>
             <a:r>
-              <a:rPr sz="1650" b="0">
+              <a:rPr sz="1650" b="0" lang="pl-PL">
                 <a:solidFill>
                   <a:srgbClr val="192F3C"/>
                 </a:solidFill>
@@ -3463,7 +3730,7 @@
                 <a:ea typeface="DejaVu Sans"/>
                 <a:cs typeface="DejaVu Sans"/>
               </a:rPr>
-              <a:t>Guide one operation at a time. Explain why. Record results and recovery.</a:t>
+              <a:t>Prowadź po jednej operacji. Wyjaśniaj cel. Zapisuj wyniki i naprawy.</a:t>
             </a:r>
           </a:p>
         </p:txBody>
@@ -3498,6 +3765,10 @@
             <a:prstDash val="solid"/>
           </a:ln>
         </p:spPr>
+        <p:txBody xmlns:a="http://schemas.openxmlformats.org/drawingml/2006/main">
+          <a:bodyPr/>
+          <a:p/>
+        </p:txBody>
       </p:sp>
       <p:sp>
         <p:nvSpPr>
@@ -3623,6 +3894,10 @@
             <a:prstDash val="solid"/>
           </a:ln>
         </p:spPr>
+        <p:txBody xmlns:a="http://schemas.openxmlformats.org/drawingml/2006/main">
+          <a:bodyPr/>
+          <a:p/>
+        </p:txBody>
       </p:sp>
       <p:sp>
         <p:nvSpPr>
@@ -3749,7 +4024,7 @@
               </a:defRPr>
             </a:pPr>
             <a:r>
-              <a:rPr sz="2175" b="1">
+              <a:rPr sz="2175" b="1" lang="pl-PL">
                 <a:solidFill>
                   <a:srgbClr val="192F3C"/>
                 </a:solidFill>
@@ -3757,30 +4032,20 @@
                 <a:ea typeface="DejaVu Sans"/>
                 <a:cs typeface="DejaVu Sans"/>
               </a:rPr>
-              <a:t>Abstract</a:t>
+              <a:t>Uogólnij</a:t>
             </a:r>
           </a:p>
           <a:p xmlns:a="http://schemas.openxmlformats.org/drawingml/2006/main">
-            <a:pPr algn="l">
-              <a:defRPr sz="2175" b="1">
+            <a:r>
+              <a:rPr sz="2175" b="1" lang="pl-PL">
                 <a:solidFill>
                   <a:srgbClr val="192F3C"/>
                 </a:solidFill>
                 <a:latin typeface="DejaVu Sans"/>
                 <a:ea typeface="DejaVu Sans"/>
                 <a:cs typeface="DejaVu Sans"/>
-              </a:defRPr>
-            </a:pPr>
-            <a:r>
-              <a:rPr sz="2175" b="1">
-                <a:solidFill>
-                  <a:srgbClr val="192F3C"/>
-                </a:solidFill>
-                <a:latin typeface="DejaVu Sans"/>
-                <a:ea typeface="DejaVu Sans"/>
-                <a:cs typeface="DejaVu Sans"/>
-              </a:rPr>
-              <a:t>the workflow</a:t>
+              </a:rPr>
+              <a:t>proces</a:t>
             </a:r>
           </a:p>
         </p:txBody>
@@ -3841,7 +4106,7 @@
               </a:defRPr>
             </a:pPr>
             <a:r>
-              <a:rPr sz="1650" b="0">
+              <a:rPr sz="1650" b="0" lang="pl-PL">
                 <a:solidFill>
                   <a:srgbClr val="192F3C"/>
                 </a:solidFill>
@@ -3849,7 +4114,7 @@
                 <a:ea typeface="DejaVu Sans"/>
                 <a:cs typeface="DejaVu Sans"/>
               </a:rPr>
-              <a:t>Define reusable inputs. Keep engineering constraints and acceptance criteria.</a:t>
+              <a:t>Zdefiniuj dane wejściowe. Zachowaj ograniczenia i kryteria odbioru.</a:t>
             </a:r>
           </a:p>
         </p:txBody>
@@ -3884,6 +4149,10 @@
             <a:prstDash val="solid"/>
           </a:ln>
         </p:spPr>
+        <p:txBody xmlns:a="http://schemas.openxmlformats.org/drawingml/2006/main">
+          <a:bodyPr/>
+          <a:p/>
+        </p:txBody>
       </p:sp>
       <p:sp>
         <p:nvSpPr>
@@ -4009,6 +4278,10 @@
             <a:prstDash val="solid"/>
           </a:ln>
         </p:spPr>
+        <p:txBody xmlns:a="http://schemas.openxmlformats.org/drawingml/2006/main">
+          <a:bodyPr/>
+          <a:p/>
+        </p:txBody>
       </p:sp>
       <p:sp>
         <p:nvSpPr>
@@ -4135,7 +4408,7 @@
               </a:defRPr>
             </a:pPr>
             <a:r>
-              <a:rPr sz="2175" b="1">
+              <a:rPr sz="2175" b="1" lang="pl-PL">
                 <a:solidFill>
                   <a:srgbClr val="192F3C"/>
                 </a:solidFill>
@@ -4143,30 +4416,20 @@
                 <a:ea typeface="DejaVu Sans"/>
                 <a:cs typeface="DejaVu Sans"/>
               </a:rPr>
-              <a:t>Make the</a:t>
+              <a:t>Wybierz operacje</a:t>
             </a:r>
           </a:p>
           <a:p xmlns:a="http://schemas.openxmlformats.org/drawingml/2006/main">
-            <a:pPr algn="l">
-              <a:defRPr sz="2175" b="1">
+            <a:r>
+              <a:rPr sz="2175" b="1" lang="pl-PL">
                 <a:solidFill>
                   <a:srgbClr val="192F3C"/>
                 </a:solidFill>
                 <a:latin typeface="DejaVu Sans"/>
                 <a:ea typeface="DejaVu Sans"/>
                 <a:cs typeface="DejaVu Sans"/>
-              </a:defRPr>
-            </a:pPr>
-            <a:r>
-              <a:rPr sz="2175" b="1">
-                <a:solidFill>
-                  <a:srgbClr val="192F3C"/>
-                </a:solidFill>
-                <a:latin typeface="DejaVu Sans"/>
-                <a:ea typeface="DejaVu Sans"/>
-                <a:cs typeface="DejaVu Sans"/>
-              </a:rPr>
-              <a:t>extraction decisions</a:t>
+              </a:rPr>
+              <a:t>do automatyzacji</a:t>
             </a:r>
           </a:p>
         </p:txBody>
@@ -4227,7 +4490,7 @@
               </a:defRPr>
             </a:pPr>
             <a:r>
-              <a:rPr sz="1650" b="0">
+              <a:rPr sz="1650" b="0" lang="pl-PL">
                 <a:solidFill>
                   <a:srgbClr val="192F3C"/>
                 </a:solidFill>
@@ -4235,7 +4498,7 @@
                 <a:ea typeface="DejaVu Sans"/>
                 <a:cs typeface="DejaVu Sans"/>
               </a:rPr>
-              <a:t>Classify operations as code, model judgment or human decisions.</a:t>
+              <a:t>Rozdziel operacje między kod, ocenę modelu i decyzje człowieka.</a:t>
             </a:r>
           </a:p>
         </p:txBody>
@@ -4270,6 +4533,10 @@
             <a:prstDash val="solid"/>
           </a:ln>
         </p:spPr>
+        <p:txBody xmlns:a="http://schemas.openxmlformats.org/drawingml/2006/main">
+          <a:bodyPr/>
+          <a:p/>
+        </p:txBody>
       </p:sp>
       <p:sp>
         <p:nvSpPr>
@@ -4372,6 +4639,10 @@
             <a:prstDash val="solid"/>
           </a:ln>
         </p:spPr>
+        <p:txBody xmlns:a="http://schemas.openxmlformats.org/drawingml/2006/main">
+          <a:bodyPr/>
+          <a:p/>
+        </p:txBody>
       </p:sp>
       <p:sp>
         <p:nvSpPr>
@@ -4498,7 +4769,7 @@
               </a:defRPr>
             </a:pPr>
             <a:r>
-              <a:rPr sz="2175" b="1">
+              <a:rPr sz="2175" b="1" lang="pl-PL">
                 <a:solidFill>
                   <a:srgbClr val="192F3C"/>
                 </a:solidFill>
@@ -4506,30 +4777,20 @@
                 <a:ea typeface="DejaVu Sans"/>
                 <a:cs typeface="DejaVu Sans"/>
               </a:rPr>
-              <a:t>Implement highly</a:t>
+              <a:t>Napisz czytelny,</a:t>
             </a:r>
           </a:p>
           <a:p xmlns:a="http://schemas.openxmlformats.org/drawingml/2006/main">
-            <a:pPr algn="l">
-              <a:defRPr sz="2175" b="1">
+            <a:r>
+              <a:rPr sz="2175" b="1" lang="pl-PL">
                 <a:solidFill>
                   <a:srgbClr val="192F3C"/>
                 </a:solidFill>
                 <a:latin typeface="DejaVu Sans"/>
                 <a:ea typeface="DejaVu Sans"/>
                 <a:cs typeface="DejaVu Sans"/>
-              </a:defRPr>
-            </a:pPr>
-            <a:r>
-              <a:rPr sz="2175" b="1">
-                <a:solidFill>
-                  <a:srgbClr val="192F3C"/>
-                </a:solidFill>
-                <a:latin typeface="DejaVu Sans"/>
-                <a:ea typeface="DejaVu Sans"/>
-                <a:cs typeface="DejaVu Sans"/>
-              </a:rPr>
-              <a:t>verbose code</a:t>
+              </a:rPr>
+              <a:t>szczegółowy kod</a:t>
             </a:r>
           </a:p>
         </p:txBody>
@@ -4590,7 +4851,7 @@
               </a:defRPr>
             </a:pPr>
             <a:r>
-              <a:rPr sz="1650" b="0">
+              <a:rPr sz="1650" b="0" lang="pl-PL">
                 <a:solidFill>
                   <a:srgbClr val="192F3C"/>
                 </a:solidFill>
@@ -4598,7 +4859,7 @@
                 <a:ea typeface="DejaVu Sans"/>
                 <a:cs typeface="DejaVu Sans"/>
               </a:rPr>
-              <a:t>Write readable functions and logs. Test the code. Update the workflow.</a:t>
+              <a:t>Twórz czytelne funkcje i logi. Testuj kod. Aktualizuj opis procesu.</a:t>
             </a:r>
           </a:p>
         </p:txBody>
@@ -4633,6 +4894,10 @@
             <a:prstDash val="solid"/>
           </a:ln>
         </p:spPr>
+        <p:txBody xmlns:a="http://schemas.openxmlformats.org/drawingml/2006/main">
+          <a:bodyPr/>
+          <a:p/>
+        </p:txBody>
       </p:sp>
       <p:sp>
         <p:nvSpPr>
@@ -4690,7 +4955,7 @@
               </a:defRPr>
             </a:pPr>
             <a:r>
-              <a:rPr sz="1350" b="0">
+              <a:rPr sz="1150" b="0" lang="pl-PL">
                 <a:solidFill>
                   <a:srgbClr val="006C86"/>
                 </a:solidFill>
@@ -4702,26 +4967,16 @@
             </a:r>
           </a:p>
           <a:p xmlns:a="http://schemas.openxmlformats.org/drawingml/2006/main">
-            <a:pPr algn="l">
-              <a:defRPr sz="1350" b="0">
+            <a:r>
+              <a:rPr sz="1150" b="0" lang="pl-PL">
                 <a:solidFill>
                   <a:srgbClr val="006C86"/>
                 </a:solidFill>
                 <a:latin typeface="DejaVu Sans"/>
                 <a:ea typeface="DejaVu Sans"/>
                 <a:cs typeface="DejaVu Sans"/>
-              </a:defRPr>
-            </a:pPr>
-            <a:r>
-              <a:rPr sz="1350" b="0">
-                <a:solidFill>
-                  <a:srgbClr val="006C86"/>
-                </a:solidFill>
-                <a:latin typeface="DejaVu Sans"/>
-                <a:ea typeface="DejaVu Sans"/>
-                <a:cs typeface="DejaVu Sans"/>
-              </a:rPr>
-              <a:t>updated workflow.md</a:t>
+              </a:rPr>
+              <a:t>zaktualizowany workflow.md</a:t>
             </a:r>
           </a:p>
         </p:txBody>
@@ -4782,7 +5037,7 @@
               </a:defRPr>
             </a:pPr>
             <a:r>
-              <a:rPr sz="2025" b="1">
+              <a:rPr sz="2025" b="1" lang="pl-PL">
                 <a:solidFill>
                   <a:srgbClr val="192F3C"/>
                 </a:solidFill>
@@ -4790,7 +5045,7 @@
                 <a:ea typeface="DejaVu Sans"/>
                 <a:cs typeface="DejaVu Sans"/>
               </a:rPr>
-              <a:t>After stage 4: replay on a fresh case and verify the acceptance criteria.</a:t>
+              <a:t>Po etapie 4: powtórz proces na nowym przypadku i sprawdź kryteria odbioru.</a:t>
             </a:r>
           </a:p>
         </p:txBody>
@@ -5360,7 +5615,7 @@
               </a:defRPr>
             </a:pPr>
             <a:r>
-              <a:rPr sz="1350" b="0">
+              <a:rPr sz="1350" b="0" lang="pl-PL">
                 <a:solidFill>
                   <a:srgbClr val="536873"/>
                 </a:solidFill>
@@ -5368,7 +5623,7 @@
                 <a:ea typeface="DejaVu Sans"/>
                 <a:cs typeface="DejaVu Sans"/>
               </a:rPr>
-              <a:t>ABB engineering training / Demonstrate - abstract - automate</a:t>
+              <a:t>Szkolenie inżynierskie ABB / Pokaż — uogólnij — zautomatyzuj</a:t>
             </a:r>
           </a:p>
         </p:txBody>
@@ -5429,7 +5684,7 @@
               </a:defRPr>
             </a:pPr>
             <a:r>
-              <a:rPr sz="3450" b="1">
+              <a:rPr sz="2900" b="1" lang="pl-PL">
                 <a:solidFill>
                   <a:srgbClr val="192F3C"/>
                 </a:solidFill>
@@ -5437,7 +5692,7 @@
                 <a:ea typeface="DejaVu Sans"/>
                 <a:cs typeface="DejaVu Sans"/>
               </a:rPr>
-              <a:t>One long instruction vs. separate Copilot CLI executions</a:t>
+              <a:t>Jedno długie polecenie czy osobne uruchomienia Copilot CLI?</a:t>
             </a:r>
           </a:p>
         </p:txBody>
@@ -5472,6 +5727,10 @@
             <a:prstDash val="solid"/>
           </a:ln>
         </p:spPr>
+        <p:txBody xmlns:a="http://schemas.openxmlformats.org/drawingml/2006/main">
+          <a:bodyPr/>
+          <a:p/>
+        </p:txBody>
       </p:sp>
       <p:sp>
         <p:nvSpPr>
@@ -5529,7 +5788,7 @@
               </a:defRPr>
             </a:pPr>
             <a:r>
-              <a:rPr sz="1350" b="0">
+              <a:rPr sz="1350" b="0" lang="pl-PL">
                 <a:solidFill>
                   <a:srgbClr val="536873"/>
                 </a:solidFill>
@@ -5537,7 +5796,7 @@
                 <a:ea typeface="DejaVu Sans"/>
                 <a:cs typeface="DejaVu Sans"/>
               </a:rPr>
-              <a:t>2</a:t>
+              <a:t>6</a:t>
             </a:r>
           </a:p>
         </p:txBody>
@@ -5598,7 +5857,7 @@
               </a:defRPr>
             </a:pPr>
             <a:r>
-              <a:rPr sz="2025" b="0">
+              <a:rPr sz="2025" b="0" lang="pl-PL">
                 <a:solidFill>
                   <a:srgbClr val="192F3C"/>
                 </a:solidFill>
@@ -5606,7 +5865,7 @@
                 <a:ea typeface="DejaVu Sans"/>
                 <a:cs typeface="DejaVu Sans"/>
               </a:rPr>
-              <a:t>The same seven actions, with different context boundaries</a:t>
+              <a:t>Te same siedem działań, ale różne granice kontekstu</a:t>
             </a:r>
           </a:p>
         </p:txBody>
@@ -5667,7 +5926,7 @@
               </a:defRPr>
             </a:pPr>
             <a:r>
-              <a:rPr sz="1650" b="1">
+              <a:rPr sz="1650" b="1" lang="pl-PL">
                 <a:solidFill>
                   <a:srgbClr val="B34B3D"/>
                 </a:solidFill>
@@ -5675,7 +5934,7 @@
                 <a:ea typeface="DejaVu Sans"/>
                 <a:cs typeface="DejaVu Sans"/>
               </a:rPr>
-              <a:t>A   ONE COPILOT CLI EXECUTION</a:t>
+              <a:t>A   JEDNO URUCHOMIENIE COPILOT CLI</a:t>
             </a:r>
           </a:p>
         </p:txBody>
@@ -5736,7 +5995,7 @@
               </a:defRPr>
             </a:pPr>
             <a:r>
-              <a:rPr sz="1650" b="0">
+              <a:rPr sz="1650" b="0" lang="pl-PL">
                 <a:solidFill>
                   <a:srgbClr val="536873"/>
                 </a:solidFill>
@@ -5744,7 +6003,7 @@
                 <a:ea typeface="DejaVu Sans"/>
                 <a:cs typeface="DejaVu Sans"/>
               </a:rPr>
-              <a:t>The original goal shares context with every tool response and recovery attempt.</a:t>
+              <a:t>Cel, wyniki narzędzi i kolejne próby naprawy trafiają do wspólnego kontekstu.</a:t>
             </a:r>
           </a:p>
         </p:txBody>
@@ -5781,6 +6040,10 @@
             <a:prstDash val="solid"/>
           </a:ln>
         </p:spPr>
+        <p:txBody xmlns:a="http://schemas.openxmlformats.org/drawingml/2006/main">
+          <a:bodyPr/>
+          <a:p/>
+        </p:txBody>
       </p:sp>
       <p:sp>
         <p:nvSpPr>
@@ -5838,7 +6101,7 @@
               </a:defRPr>
             </a:pPr>
             <a:r>
-              <a:rPr sz="1500" b="0">
+              <a:rPr sz="1500" b="0" lang="pl-PL">
                 <a:solidFill>
                   <a:srgbClr val="192F3C"/>
                 </a:solidFill>
@@ -5846,30 +6109,20 @@
                 <a:ea typeface="DejaVu Sans"/>
                 <a:cs typeface="DejaVu Sans"/>
               </a:rPr>
-              <a:t>Pull data</a:t>
+              <a:t>Pobierz dane</a:t>
             </a:r>
           </a:p>
           <a:p xmlns:a="http://schemas.openxmlformats.org/drawingml/2006/main">
-            <a:pPr algn="ctr">
-              <a:defRPr sz="1500" b="0">
+            <a:r>
+              <a:rPr sz="1500" b="0" lang="pl-PL">
                 <a:solidFill>
                   <a:srgbClr val="192F3C"/>
                 </a:solidFill>
                 <a:latin typeface="DejaVu Sans"/>
                 <a:ea typeface="DejaVu Sans"/>
                 <a:cs typeface="DejaVu Sans"/>
-              </a:defRPr>
-            </a:pPr>
-            <a:r>
-              <a:rPr sz="1500" b="0">
-                <a:solidFill>
-                  <a:srgbClr val="192F3C"/>
-                </a:solidFill>
-                <a:latin typeface="DejaVu Sans"/>
-                <a:ea typeface="DejaVu Sans"/>
-                <a:cs typeface="DejaVu Sans"/>
-              </a:rPr>
-              <a:t>from Jira MCP</a:t>
+              </a:rPr>
+              <a:t>z Jira MCP</a:t>
             </a:r>
           </a:p>
         </p:txBody>
@@ -5906,6 +6159,10 @@
             <a:prstDash val="solid"/>
           </a:ln>
         </p:spPr>
+        <p:txBody xmlns:a="http://schemas.openxmlformats.org/drawingml/2006/main">
+          <a:bodyPr/>
+          <a:p/>
+        </p:txBody>
       </p:sp>
       <p:sp>
         <p:nvSpPr>
@@ -5963,7 +6220,7 @@
               </a:defRPr>
             </a:pPr>
             <a:r>
-              <a:rPr sz="1500" b="0">
+              <a:rPr sz="1500" b="0" lang="pl-PL">
                 <a:solidFill>
                   <a:srgbClr val="192F3C"/>
                 </a:solidFill>
@@ -5971,30 +6228,20 @@
                 <a:ea typeface="DejaVu Sans"/>
                 <a:cs typeface="DejaVu Sans"/>
               </a:rPr>
-              <a:t>Read tasks and</a:t>
+              <a:t>Odczytaj zadania</a:t>
             </a:r>
           </a:p>
           <a:p xmlns:a="http://schemas.openxmlformats.org/drawingml/2006/main">
-            <a:pPr algn="ctr">
-              <a:defRPr sz="1500" b="0">
+            <a:r>
+              <a:rPr sz="1500" b="0" lang="pl-PL">
                 <a:solidFill>
                   <a:srgbClr val="192F3C"/>
                 </a:solidFill>
                 <a:latin typeface="DejaVu Sans"/>
                 <a:ea typeface="DejaVu Sans"/>
                 <a:cs typeface="DejaVu Sans"/>
-              </a:defRPr>
-            </a:pPr>
-            <a:r>
-              <a:rPr sz="1500" b="0">
-                <a:solidFill>
-                  <a:srgbClr val="192F3C"/>
-                </a:solidFill>
-                <a:latin typeface="DejaVu Sans"/>
-                <a:ea typeface="DejaVu Sans"/>
-                <a:cs typeface="DejaVu Sans"/>
-              </a:rPr>
-              <a:t>requirements</a:t>
+              </a:rPr>
+              <a:t>i wymagania</a:t>
             </a:r>
           </a:p>
         </p:txBody>
@@ -6031,6 +6278,10 @@
             <a:prstDash val="solid"/>
           </a:ln>
         </p:spPr>
+        <p:txBody xmlns:a="http://schemas.openxmlformats.org/drawingml/2006/main">
+          <a:bodyPr/>
+          <a:p/>
+        </p:txBody>
       </p:sp>
       <p:sp>
         <p:nvSpPr>
@@ -6088,7 +6339,7 @@
               </a:defRPr>
             </a:pPr>
             <a:r>
-              <a:rPr sz="1500" b="0">
+              <a:rPr sz="1500" b="0" lang="pl-PL">
                 <a:solidFill>
                   <a:srgbClr val="192F3C"/>
                 </a:solidFill>
@@ -6096,30 +6347,20 @@
                 <a:ea typeface="DejaVu Sans"/>
                 <a:cs typeface="DejaVu Sans"/>
               </a:rPr>
-              <a:t>Log in to the</a:t>
+              <a:t>Zaloguj się</a:t>
             </a:r>
           </a:p>
           <a:p xmlns:a="http://schemas.openxmlformats.org/drawingml/2006/main">
-            <a:pPr algn="ctr">
-              <a:defRPr sz="1500" b="0">
+            <a:r>
+              <a:rPr sz="1500" b="0" lang="pl-PL">
                 <a:solidFill>
                   <a:srgbClr val="192F3C"/>
                 </a:solidFill>
                 <a:latin typeface="DejaVu Sans"/>
                 <a:ea typeface="DejaVu Sans"/>
                 <a:cs typeface="DejaVu Sans"/>
-              </a:defRPr>
-            </a:pPr>
-            <a:r>
-              <a:rPr sz="1500" b="0">
-                <a:solidFill>
-                  <a:srgbClr val="192F3C"/>
-                </a:solidFill>
-                <a:latin typeface="DejaVu Sans"/>
-                <a:ea typeface="DejaVu Sans"/>
-                <a:cs typeface="DejaVu Sans"/>
-              </a:rPr>
-              <a:t>test system</a:t>
+              </a:rPr>
+              <a:t>do systemu</a:t>
             </a:r>
           </a:p>
         </p:txBody>
@@ -6156,6 +6397,10 @@
             <a:prstDash val="solid"/>
           </a:ln>
         </p:spPr>
+        <p:txBody xmlns:a="http://schemas.openxmlformats.org/drawingml/2006/main">
+          <a:bodyPr/>
+          <a:p/>
+        </p:txBody>
       </p:sp>
       <p:sp>
         <p:nvSpPr>
@@ -6213,7 +6458,7 @@
               </a:defRPr>
             </a:pPr>
             <a:r>
-              <a:rPr sz="1500" b="0">
+              <a:rPr sz="1500" b="0" lang="pl-PL">
                 <a:solidFill>
                   <a:srgbClr val="192F3C"/>
                 </a:solidFill>
@@ -6221,30 +6466,20 @@
                 <a:ea typeface="DejaVu Sans"/>
                 <a:cs typeface="DejaVu Sans"/>
               </a:rPr>
-              <a:t>Explore DOM</a:t>
+              <a:t>Sprawdź DOM</a:t>
             </a:r>
           </a:p>
           <a:p xmlns:a="http://schemas.openxmlformats.org/drawingml/2006/main">
-            <a:pPr algn="ctr">
-              <a:defRPr sz="1500" b="0">
+            <a:r>
+              <a:rPr sz="1500" b="0" lang="pl-PL">
                 <a:solidFill>
                   <a:srgbClr val="192F3C"/>
                 </a:solidFill>
                 <a:latin typeface="DejaVu Sans"/>
                 <a:ea typeface="DejaVu Sans"/>
                 <a:cs typeface="DejaVu Sans"/>
-              </a:defRPr>
-            </a:pPr>
-            <a:r>
-              <a:rPr sz="1500" b="0">
-                <a:solidFill>
-                  <a:srgbClr val="192F3C"/>
-                </a:solidFill>
-                <a:latin typeface="DejaVu Sans"/>
-                <a:ea typeface="DejaVu Sans"/>
-                <a:cs typeface="DejaVu Sans"/>
-              </a:rPr>
-              <a:t>and compare</a:t>
+              </a:rPr>
+              <a:t>i porównaj</a:t>
             </a:r>
           </a:p>
         </p:txBody>
@@ -6281,6 +6516,10 @@
             <a:prstDash val="solid"/>
           </a:ln>
         </p:spPr>
+        <p:txBody xmlns:a="http://schemas.openxmlformats.org/drawingml/2006/main">
+          <a:bodyPr/>
+          <a:p/>
+        </p:txBody>
       </p:sp>
       <p:sp>
         <p:nvSpPr>
@@ -6338,7 +6577,7 @@
               </a:defRPr>
             </a:pPr>
             <a:r>
-              <a:rPr sz="1500" b="0">
+              <a:rPr sz="1500" b="0" lang="pl-PL">
                 <a:solidFill>
                   <a:srgbClr val="192F3C"/>
                 </a:solidFill>
@@ -6346,30 +6585,20 @@
                 <a:ea typeface="DejaVu Sans"/>
                 <a:cs typeface="DejaVu Sans"/>
               </a:rPr>
-              <a:t>Record differences</a:t>
+              <a:t>Zapisz różnice</a:t>
             </a:r>
           </a:p>
           <a:p xmlns:a="http://schemas.openxmlformats.org/drawingml/2006/main">
-            <a:pPr algn="ctr">
-              <a:defRPr sz="1500" b="0">
+            <a:r>
+              <a:rPr sz="1500" b="0" lang="pl-PL">
                 <a:solidFill>
                   <a:srgbClr val="192F3C"/>
                 </a:solidFill>
                 <a:latin typeface="DejaVu Sans"/>
                 <a:ea typeface="DejaVu Sans"/>
                 <a:cs typeface="DejaVu Sans"/>
-              </a:defRPr>
-            </a:pPr>
-            <a:r>
-              <a:rPr sz="1500" b="0">
-                <a:solidFill>
-                  <a:srgbClr val="192F3C"/>
-                </a:solidFill>
-                <a:latin typeface="DejaVu Sans"/>
-                <a:ea typeface="DejaVu Sans"/>
-                <a:cs typeface="DejaVu Sans"/>
-              </a:rPr>
-              <a:t>in Markdown</a:t>
+              </a:rPr>
+              <a:t>w Markdown</a:t>
             </a:r>
           </a:p>
         </p:txBody>
@@ -6406,6 +6635,10 @@
             <a:prstDash val="solid"/>
           </a:ln>
         </p:spPr>
+        <p:txBody xmlns:a="http://schemas.openxmlformats.org/drawingml/2006/main">
+          <a:bodyPr/>
+          <a:p/>
+        </p:txBody>
       </p:sp>
       <p:sp>
         <p:nvSpPr>
@@ -6463,7 +6696,7 @@
               </a:defRPr>
             </a:pPr>
             <a:r>
-              <a:rPr sz="1500" b="0">
+              <a:rPr sz="1200" b="0" lang="pl-PL">
                 <a:solidFill>
                   <a:srgbClr val="192F3C"/>
                 </a:solidFill>
@@ -6471,30 +6704,20 @@
                 <a:ea typeface="DejaVu Sans"/>
                 <a:cs typeface="DejaVu Sans"/>
               </a:rPr>
-              <a:t>Store Markdown</a:t>
+              <a:t>Dodaj Markdown</a:t>
             </a:r>
           </a:p>
           <a:p xmlns:a="http://schemas.openxmlformats.org/drawingml/2006/main">
-            <a:pPr algn="ctr">
-              <a:defRPr sz="1500" b="0">
+            <a:r>
+              <a:rPr sz="1200" b="0" lang="pl-PL">
                 <a:solidFill>
                   <a:srgbClr val="192F3C"/>
                 </a:solidFill>
                 <a:latin typeface="DejaVu Sans"/>
                 <a:ea typeface="DejaVu Sans"/>
                 <a:cs typeface="DejaVu Sans"/>
-              </a:defRPr>
-            </a:pPr>
-            <a:r>
-              <a:rPr sz="1500" b="0">
-                <a:solidFill>
-                  <a:srgbClr val="192F3C"/>
-                </a:solidFill>
-                <a:latin typeface="DejaVu Sans"/>
-                <a:ea typeface="DejaVu Sans"/>
-                <a:cs typeface="DejaVu Sans"/>
-              </a:rPr>
-              <a:t>in a new Jira issue</a:t>
+              </a:rPr>
+              <a:t>do nowej sprawy Jira</a:t>
             </a:r>
           </a:p>
         </p:txBody>
@@ -6531,6 +6754,10 @@
             <a:prstDash val="solid"/>
           </a:ln>
         </p:spPr>
+        <p:txBody xmlns:a="http://schemas.openxmlformats.org/drawingml/2006/main">
+          <a:bodyPr/>
+          <a:p/>
+        </p:txBody>
       </p:sp>
       <p:sp>
         <p:nvSpPr>
@@ -6588,7 +6815,7 @@
               </a:defRPr>
             </a:pPr>
             <a:r>
-              <a:rPr sz="1500" b="0">
+              <a:rPr sz="1500" b="0" lang="pl-PL">
                 <a:solidFill>
                   <a:srgbClr val="192F3C"/>
                 </a:solidFill>
@@ -6596,30 +6823,20 @@
                 <a:ea typeface="DejaVu Sans"/>
                 <a:cs typeface="DejaVu Sans"/>
               </a:rPr>
-              <a:t>Create test</a:t>
+              <a:t>Utwórz test</a:t>
             </a:r>
           </a:p>
           <a:p xmlns:a="http://schemas.openxmlformats.org/drawingml/2006/main">
-            <a:pPr algn="ctr">
-              <a:defRPr sz="1500" b="0">
+            <a:r>
+              <a:rPr sz="1500" b="0" lang="pl-PL">
                 <a:solidFill>
                   <a:srgbClr val="192F3C"/>
                 </a:solidFill>
                 <a:latin typeface="DejaVu Sans"/>
                 <a:ea typeface="DejaVu Sans"/>
                 <a:cs typeface="DejaVu Sans"/>
-              </a:defRPr>
-            </a:pPr>
-            <a:r>
-              <a:rPr sz="1500" b="0">
-                <a:solidFill>
-                  <a:srgbClr val="192F3C"/>
-                </a:solidFill>
-                <a:latin typeface="DejaVu Sans"/>
-                <a:ea typeface="DejaVu Sans"/>
-                <a:cs typeface="DejaVu Sans"/>
-              </a:rPr>
-              <a:t>from evidence</a:t>
+              </a:rPr>
+              <a:t>na bazie dowodów</a:t>
             </a:r>
           </a:p>
         </p:txBody>
@@ -6680,7 +6897,7 @@
               </a:defRPr>
             </a:pPr>
             <a:r>
-              <a:rPr sz="1350" b="0">
+              <a:rPr sz="1350" b="0" lang="pl-PL">
                 <a:solidFill>
                   <a:srgbClr val="B34B3D"/>
                 </a:solidFill>
@@ -6688,7 +6905,7 @@
                 <a:ea typeface="DejaVu Sans"/>
                 <a:cs typeface="DejaVu Sans"/>
               </a:rPr>
-              <a:t>Login retries</a:t>
+              <a:t>Ponowne logowanie</a:t>
             </a:r>
           </a:p>
         </p:txBody>
@@ -6749,7 +6966,7 @@
               </a:defRPr>
             </a:pPr>
             <a:r>
-              <a:rPr sz="1350" b="0">
+              <a:rPr sz="1350" b="0" lang="pl-PL">
                 <a:solidFill>
                   <a:srgbClr val="B34B3D"/>
                 </a:solidFill>
@@ -6757,7 +6974,7 @@
                 <a:ea typeface="DejaVu Sans"/>
                 <a:cs typeface="DejaVu Sans"/>
               </a:rPr>
-              <a:t>Irrelevant DOM details</a:t>
+              <a:t>Zbędne szczegóły DOM</a:t>
             </a:r>
           </a:p>
         </p:txBody>
@@ -6818,7 +7035,7 @@
               </a:defRPr>
             </a:pPr>
             <a:r>
-              <a:rPr sz="1350" b="0">
+              <a:rPr sz="1350" b="0" lang="pl-PL">
                 <a:solidFill>
                   <a:srgbClr val="B34B3D"/>
                 </a:solidFill>
@@ -6826,7 +7043,7 @@
                 <a:ea typeface="DejaVu Sans"/>
                 <a:cs typeface="DejaVu Sans"/>
               </a:rPr>
-              <a:t>Formatting detour</a:t>
+              <a:t>Poprawki formatu</a:t>
             </a:r>
           </a:p>
         </p:txBody>
@@ -6887,7 +7104,7 @@
               </a:defRPr>
             </a:pPr>
             <a:r>
-              <a:rPr sz="1650" b="0">
+              <a:rPr sz="1650" b="0" lang="pl-PL">
                 <a:solidFill>
                   <a:srgbClr val="B34B3D"/>
                 </a:solidFill>
@@ -6895,7 +7112,7 @@
                 <a:ea typeface="DejaVu Sans"/>
                 <a:cs typeface="DejaVu Sans"/>
               </a:rPr>
-              <a:t>Possible drift: earlier requirements become harder to track as unrelated detail accumulates.</a:t>
+              <a:t>Ryzyko dryfu: nadmiar szczegółów utrudnia śledzenie wcześniejszych wymagań.</a:t>
             </a:r>
           </a:p>
         </p:txBody>
@@ -6930,6 +7147,10 @@
             <a:prstDash val="solid"/>
           </a:ln>
         </p:spPr>
+        <p:txBody xmlns:a="http://schemas.openxmlformats.org/drawingml/2006/main">
+          <a:bodyPr/>
+          <a:p/>
+        </p:txBody>
       </p:sp>
       <p:sp>
         <p:nvSpPr>
@@ -6987,7 +7208,7 @@
               </a:defRPr>
             </a:pPr>
             <a:r>
-              <a:rPr sz="1650" b="1">
+              <a:rPr sz="1650" b="1" lang="pl-PL">
                 <a:solidFill>
                   <a:srgbClr val="006C86"/>
                 </a:solidFill>
@@ -6995,7 +7216,7 @@
                 <a:ea typeface="DejaVu Sans"/>
                 <a:cs typeface="DejaVu Sans"/>
               </a:rPr>
-              <a:t>B   SEPARATE COPILOT CLI EXECUTIONS</a:t>
+              <a:t>B   OSOBNE URUCHOMIENIA COPILOT CLI</a:t>
             </a:r>
           </a:p>
         </p:txBody>
@@ -7056,7 +7277,7 @@
               </a:defRPr>
             </a:pPr>
             <a:r>
-              <a:rPr sz="1650" b="0">
+              <a:rPr sz="1650" b="0" lang="pl-PL">
                 <a:solidFill>
                   <a:srgbClr val="536873"/>
                 </a:solidFill>
@@ -7064,7 +7285,7 @@
                 <a:ea typeface="DejaVu Sans"/>
                 <a:cs typeface="DejaVu Sans"/>
               </a:rPr>
-              <a:t>Each run receives a focused instruction and the required outputs of the previous run.</a:t>
+              <a:t>Każde uruchomienie dostaje konkretne polecenie i potrzebne wyniki poprzedniego.</a:t>
             </a:r>
           </a:p>
         </p:txBody>
@@ -7101,6 +7322,10 @@
             <a:prstDash val="solid"/>
           </a:ln>
         </p:spPr>
+        <p:txBody xmlns:a="http://schemas.openxmlformats.org/drawingml/2006/main">
+          <a:bodyPr/>
+          <a:p/>
+        </p:txBody>
       </p:sp>
       <p:sp>
         <p:nvSpPr>
@@ -7158,7 +7383,7 @@
               </a:defRPr>
             </a:pPr>
             <a:r>
-              <a:rPr sz="1200" b="1">
+              <a:rPr sz="1200" b="1" lang="pl-PL">
                 <a:solidFill>
                   <a:srgbClr val="006C86"/>
                 </a:solidFill>
@@ -7166,7 +7391,7 @@
                 <a:ea typeface="DejaVu Sans"/>
                 <a:cs typeface="DejaVu Sans"/>
               </a:rPr>
-              <a:t>RUN 1</a:t>
+              <a:t>KROK 1</a:t>
             </a:r>
           </a:p>
         </p:txBody>
@@ -7227,7 +7452,7 @@
               </a:defRPr>
             </a:pPr>
             <a:r>
-              <a:rPr sz="1350" b="0">
+              <a:rPr sz="1350" b="0" lang="pl-PL">
                 <a:solidFill>
                   <a:srgbClr val="192F3C"/>
                 </a:solidFill>
@@ -7235,30 +7460,20 @@
                 <a:ea typeface="DejaVu Sans"/>
                 <a:cs typeface="DejaVu Sans"/>
               </a:rPr>
-              <a:t>Pull data</a:t>
+              <a:t>Pobierz dane</a:t>
             </a:r>
           </a:p>
           <a:p xmlns:a="http://schemas.openxmlformats.org/drawingml/2006/main">
-            <a:pPr algn="ctr">
-              <a:defRPr sz="1350" b="0">
+            <a:r>
+              <a:rPr sz="1350" b="0" lang="pl-PL">
                 <a:solidFill>
                   <a:srgbClr val="192F3C"/>
                 </a:solidFill>
                 <a:latin typeface="DejaVu Sans"/>
                 <a:ea typeface="DejaVu Sans"/>
                 <a:cs typeface="DejaVu Sans"/>
-              </a:defRPr>
-            </a:pPr>
-            <a:r>
-              <a:rPr sz="1350" b="0">
-                <a:solidFill>
-                  <a:srgbClr val="192F3C"/>
-                </a:solidFill>
-                <a:latin typeface="DejaVu Sans"/>
-                <a:ea typeface="DejaVu Sans"/>
-                <a:cs typeface="DejaVu Sans"/>
-              </a:rPr>
-              <a:t>from Jira MCP</a:t>
+              </a:rPr>
+              <a:t>z Jira MCP</a:t>
             </a:r>
           </a:p>
         </p:txBody>
@@ -7364,6 +7579,10 @@
             <a:prstDash val="solid"/>
           </a:ln>
         </p:spPr>
+        <p:txBody xmlns:a="http://schemas.openxmlformats.org/drawingml/2006/main">
+          <a:bodyPr/>
+          <a:p/>
+        </p:txBody>
       </p:sp>
       <p:sp>
         <p:nvSpPr>
@@ -7421,7 +7640,7 @@
               </a:defRPr>
             </a:pPr>
             <a:r>
-              <a:rPr sz="1200" b="1">
+              <a:rPr sz="1200" b="1" lang="pl-PL">
                 <a:solidFill>
                   <a:srgbClr val="006C86"/>
                 </a:solidFill>
@@ -7429,7 +7648,7 @@
                 <a:ea typeface="DejaVu Sans"/>
                 <a:cs typeface="DejaVu Sans"/>
               </a:rPr>
-              <a:t>RUN 2</a:t>
+              <a:t>KROK 2</a:t>
             </a:r>
           </a:p>
         </p:txBody>
@@ -7490,7 +7709,7 @@
               </a:defRPr>
             </a:pPr>
             <a:r>
-              <a:rPr sz="1350" b="0">
+              <a:rPr sz="1350" b="0" lang="pl-PL">
                 <a:solidFill>
                   <a:srgbClr val="192F3C"/>
                 </a:solidFill>
@@ -7498,30 +7717,20 @@
                 <a:ea typeface="DejaVu Sans"/>
                 <a:cs typeface="DejaVu Sans"/>
               </a:rPr>
-              <a:t>Read tasks and</a:t>
+              <a:t>Odczytaj zadania</a:t>
             </a:r>
           </a:p>
           <a:p xmlns:a="http://schemas.openxmlformats.org/drawingml/2006/main">
-            <a:pPr algn="ctr">
-              <a:defRPr sz="1350" b="0">
+            <a:r>
+              <a:rPr sz="1350" b="0" lang="pl-PL">
                 <a:solidFill>
                   <a:srgbClr val="192F3C"/>
                 </a:solidFill>
                 <a:latin typeface="DejaVu Sans"/>
                 <a:ea typeface="DejaVu Sans"/>
                 <a:cs typeface="DejaVu Sans"/>
-              </a:defRPr>
-            </a:pPr>
-            <a:r>
-              <a:rPr sz="1350" b="0">
-                <a:solidFill>
-                  <a:srgbClr val="192F3C"/>
-                </a:solidFill>
-                <a:latin typeface="DejaVu Sans"/>
-                <a:ea typeface="DejaVu Sans"/>
-                <a:cs typeface="DejaVu Sans"/>
-              </a:rPr>
-              <a:t>requirements</a:t>
+              </a:rPr>
+              <a:t>i wymagania</a:t>
             </a:r>
           </a:p>
         </p:txBody>
@@ -7627,6 +7836,10 @@
             <a:prstDash val="solid"/>
           </a:ln>
         </p:spPr>
+        <p:txBody xmlns:a="http://schemas.openxmlformats.org/drawingml/2006/main">
+          <a:bodyPr/>
+          <a:p/>
+        </p:txBody>
       </p:sp>
       <p:sp>
         <p:nvSpPr>
@@ -7684,7 +7897,7 @@
               </a:defRPr>
             </a:pPr>
             <a:r>
-              <a:rPr sz="1200" b="1">
+              <a:rPr sz="1200" b="1" lang="pl-PL">
                 <a:solidFill>
                   <a:srgbClr val="006C86"/>
                 </a:solidFill>
@@ -7692,7 +7905,7 @@
                 <a:ea typeface="DejaVu Sans"/>
                 <a:cs typeface="DejaVu Sans"/>
               </a:rPr>
-              <a:t>RUN 3</a:t>
+              <a:t>KROK 3</a:t>
             </a:r>
           </a:p>
         </p:txBody>
@@ -7753,7 +7966,7 @@
               </a:defRPr>
             </a:pPr>
             <a:r>
-              <a:rPr sz="1350" b="0">
+              <a:rPr sz="1350" b="0" lang="pl-PL">
                 <a:solidFill>
                   <a:srgbClr val="192F3C"/>
                 </a:solidFill>
@@ -7761,30 +7974,20 @@
                 <a:ea typeface="DejaVu Sans"/>
                 <a:cs typeface="DejaVu Sans"/>
               </a:rPr>
-              <a:t>Log in to the</a:t>
+              <a:t>Zaloguj się</a:t>
             </a:r>
           </a:p>
           <a:p xmlns:a="http://schemas.openxmlformats.org/drawingml/2006/main">
-            <a:pPr algn="ctr">
-              <a:defRPr sz="1350" b="0">
+            <a:r>
+              <a:rPr sz="1350" b="0" lang="pl-PL">
                 <a:solidFill>
                   <a:srgbClr val="192F3C"/>
                 </a:solidFill>
                 <a:latin typeface="DejaVu Sans"/>
                 <a:ea typeface="DejaVu Sans"/>
                 <a:cs typeface="DejaVu Sans"/>
-              </a:defRPr>
-            </a:pPr>
-            <a:r>
-              <a:rPr sz="1350" b="0">
-                <a:solidFill>
-                  <a:srgbClr val="192F3C"/>
-                </a:solidFill>
-                <a:latin typeface="DejaVu Sans"/>
-                <a:ea typeface="DejaVu Sans"/>
-                <a:cs typeface="DejaVu Sans"/>
-              </a:rPr>
-              <a:t>test system</a:t>
+              </a:rPr>
+              <a:t>do systemu</a:t>
             </a:r>
           </a:p>
         </p:txBody>
@@ -7890,6 +8093,10 @@
             <a:prstDash val="solid"/>
           </a:ln>
         </p:spPr>
+        <p:txBody xmlns:a="http://schemas.openxmlformats.org/drawingml/2006/main">
+          <a:bodyPr/>
+          <a:p/>
+        </p:txBody>
       </p:sp>
       <p:sp>
         <p:nvSpPr>
@@ -7947,7 +8154,7 @@
               </a:defRPr>
             </a:pPr>
             <a:r>
-              <a:rPr sz="1200" b="1">
+              <a:rPr sz="1200" b="1" lang="pl-PL">
                 <a:solidFill>
                   <a:srgbClr val="006C86"/>
                 </a:solidFill>
@@ -7955,7 +8162,7 @@
                 <a:ea typeface="DejaVu Sans"/>
                 <a:cs typeface="DejaVu Sans"/>
               </a:rPr>
-              <a:t>RUN 4</a:t>
+              <a:t>KROK 4</a:t>
             </a:r>
           </a:p>
         </p:txBody>
@@ -8016,7 +8223,7 @@
               </a:defRPr>
             </a:pPr>
             <a:r>
-              <a:rPr sz="1350" b="0">
+              <a:rPr sz="1350" b="0" lang="pl-PL">
                 <a:solidFill>
                   <a:srgbClr val="192F3C"/>
                 </a:solidFill>
@@ -8024,30 +8231,20 @@
                 <a:ea typeface="DejaVu Sans"/>
                 <a:cs typeface="DejaVu Sans"/>
               </a:rPr>
-              <a:t>Explore DOM</a:t>
+              <a:t>Sprawdź DOM</a:t>
             </a:r>
           </a:p>
           <a:p xmlns:a="http://schemas.openxmlformats.org/drawingml/2006/main">
-            <a:pPr algn="ctr">
-              <a:defRPr sz="1350" b="0">
+            <a:r>
+              <a:rPr sz="1350" b="0" lang="pl-PL">
                 <a:solidFill>
                   <a:srgbClr val="192F3C"/>
                 </a:solidFill>
                 <a:latin typeface="DejaVu Sans"/>
                 <a:ea typeface="DejaVu Sans"/>
                 <a:cs typeface="DejaVu Sans"/>
-              </a:defRPr>
-            </a:pPr>
-            <a:r>
-              <a:rPr sz="1350" b="0">
-                <a:solidFill>
-                  <a:srgbClr val="192F3C"/>
-                </a:solidFill>
-                <a:latin typeface="DejaVu Sans"/>
-                <a:ea typeface="DejaVu Sans"/>
-                <a:cs typeface="DejaVu Sans"/>
-              </a:rPr>
-              <a:t>and compare</a:t>
+              </a:rPr>
+              <a:t>i porównaj</a:t>
             </a:r>
           </a:p>
         </p:txBody>
@@ -8153,6 +8350,10 @@
             <a:prstDash val="solid"/>
           </a:ln>
         </p:spPr>
+        <p:txBody xmlns:a="http://schemas.openxmlformats.org/drawingml/2006/main">
+          <a:bodyPr/>
+          <a:p/>
+        </p:txBody>
       </p:sp>
       <p:sp>
         <p:nvSpPr>
@@ -8210,7 +8411,7 @@
               </a:defRPr>
             </a:pPr>
             <a:r>
-              <a:rPr sz="1200" b="1">
+              <a:rPr sz="1200" b="1" lang="pl-PL">
                 <a:solidFill>
                   <a:srgbClr val="006C86"/>
                 </a:solidFill>
@@ -8218,7 +8419,7 @@
                 <a:ea typeface="DejaVu Sans"/>
                 <a:cs typeface="DejaVu Sans"/>
               </a:rPr>
-              <a:t>RUN 5</a:t>
+              <a:t>KROK 5</a:t>
             </a:r>
           </a:p>
         </p:txBody>
@@ -8279,7 +8480,7 @@
               </a:defRPr>
             </a:pPr>
             <a:r>
-              <a:rPr sz="1350" b="0">
+              <a:rPr sz="1350" b="0" lang="pl-PL">
                 <a:solidFill>
                   <a:srgbClr val="192F3C"/>
                 </a:solidFill>
@@ -8287,30 +8488,20 @@
                 <a:ea typeface="DejaVu Sans"/>
                 <a:cs typeface="DejaVu Sans"/>
               </a:rPr>
-              <a:t>Record differences</a:t>
+              <a:t>Zapisz różnice</a:t>
             </a:r>
           </a:p>
           <a:p xmlns:a="http://schemas.openxmlformats.org/drawingml/2006/main">
-            <a:pPr algn="ctr">
-              <a:defRPr sz="1350" b="0">
+            <a:r>
+              <a:rPr sz="1350" b="0" lang="pl-PL">
                 <a:solidFill>
                   <a:srgbClr val="192F3C"/>
                 </a:solidFill>
                 <a:latin typeface="DejaVu Sans"/>
                 <a:ea typeface="DejaVu Sans"/>
                 <a:cs typeface="DejaVu Sans"/>
-              </a:defRPr>
-            </a:pPr>
-            <a:r>
-              <a:rPr sz="1350" b="0">
-                <a:solidFill>
-                  <a:srgbClr val="192F3C"/>
-                </a:solidFill>
-                <a:latin typeface="DejaVu Sans"/>
-                <a:ea typeface="DejaVu Sans"/>
-                <a:cs typeface="DejaVu Sans"/>
-              </a:rPr>
-              <a:t>in Markdown</a:t>
+              </a:rPr>
+              <a:t>w Markdown</a:t>
             </a:r>
           </a:p>
         </p:txBody>
@@ -8416,6 +8607,10 @@
             <a:prstDash val="solid"/>
           </a:ln>
         </p:spPr>
+        <p:txBody xmlns:a="http://schemas.openxmlformats.org/drawingml/2006/main">
+          <a:bodyPr/>
+          <a:p/>
+        </p:txBody>
       </p:sp>
       <p:sp>
         <p:nvSpPr>
@@ -8473,7 +8668,7 @@
               </a:defRPr>
             </a:pPr>
             <a:r>
-              <a:rPr sz="1200" b="1">
+              <a:rPr sz="1200" b="1" lang="pl-PL">
                 <a:solidFill>
                   <a:srgbClr val="006C86"/>
                 </a:solidFill>
@@ -8481,7 +8676,7 @@
                 <a:ea typeface="DejaVu Sans"/>
                 <a:cs typeface="DejaVu Sans"/>
               </a:rPr>
-              <a:t>RUN 6</a:t>
+              <a:t>KROK 6</a:t>
             </a:r>
           </a:p>
         </p:txBody>
@@ -8542,7 +8737,7 @@
               </a:defRPr>
             </a:pPr>
             <a:r>
-              <a:rPr sz="1350" b="0">
+              <a:rPr sz="1200" b="0" lang="pl-PL">
                 <a:solidFill>
                   <a:srgbClr val="192F3C"/>
                 </a:solidFill>
@@ -8550,30 +8745,20 @@
                 <a:ea typeface="DejaVu Sans"/>
                 <a:cs typeface="DejaVu Sans"/>
               </a:rPr>
-              <a:t>Store Markdown</a:t>
+              <a:t>Dodaj Markdown</a:t>
             </a:r>
           </a:p>
           <a:p xmlns:a="http://schemas.openxmlformats.org/drawingml/2006/main">
-            <a:pPr algn="ctr">
-              <a:defRPr sz="1350" b="0">
+            <a:r>
+              <a:rPr sz="1200" b="0" lang="pl-PL">
                 <a:solidFill>
                   <a:srgbClr val="192F3C"/>
                 </a:solidFill>
                 <a:latin typeface="DejaVu Sans"/>
                 <a:ea typeface="DejaVu Sans"/>
                 <a:cs typeface="DejaVu Sans"/>
-              </a:defRPr>
-            </a:pPr>
-            <a:r>
-              <a:rPr sz="1350" b="0">
-                <a:solidFill>
-                  <a:srgbClr val="192F3C"/>
-                </a:solidFill>
-                <a:latin typeface="DejaVu Sans"/>
-                <a:ea typeface="DejaVu Sans"/>
-                <a:cs typeface="DejaVu Sans"/>
-              </a:rPr>
-              <a:t>in a new Jira issue</a:t>
+              </a:rPr>
+              <a:t>do nowej sprawy Jira</a:t>
             </a:r>
           </a:p>
         </p:txBody>
@@ -8679,6 +8864,10 @@
             <a:prstDash val="solid"/>
           </a:ln>
         </p:spPr>
+        <p:txBody xmlns:a="http://schemas.openxmlformats.org/drawingml/2006/main">
+          <a:bodyPr/>
+          <a:p/>
+        </p:txBody>
       </p:sp>
       <p:sp>
         <p:nvSpPr>
@@ -8736,7 +8925,7 @@
               </a:defRPr>
             </a:pPr>
             <a:r>
-              <a:rPr sz="1200" b="1">
+              <a:rPr sz="1200" b="1" lang="pl-PL">
                 <a:solidFill>
                   <a:srgbClr val="006C86"/>
                 </a:solidFill>
@@ -8744,7 +8933,7 @@
                 <a:ea typeface="DejaVu Sans"/>
                 <a:cs typeface="DejaVu Sans"/>
               </a:rPr>
-              <a:t>RUN 7</a:t>
+              <a:t>KROK 7</a:t>
             </a:r>
           </a:p>
         </p:txBody>
@@ -8805,7 +8994,7 @@
               </a:defRPr>
             </a:pPr>
             <a:r>
-              <a:rPr sz="1350" b="0">
+              <a:rPr sz="1350" b="0" lang="pl-PL">
                 <a:solidFill>
                   <a:srgbClr val="192F3C"/>
                 </a:solidFill>
@@ -8813,30 +9002,20 @@
                 <a:ea typeface="DejaVu Sans"/>
                 <a:cs typeface="DejaVu Sans"/>
               </a:rPr>
-              <a:t>Create test</a:t>
+              <a:t>Utwórz test</a:t>
             </a:r>
           </a:p>
           <a:p xmlns:a="http://schemas.openxmlformats.org/drawingml/2006/main">
-            <a:pPr algn="ctr">
-              <a:defRPr sz="1350" b="0">
+            <a:r>
+              <a:rPr sz="1350" b="0" lang="pl-PL">
                 <a:solidFill>
                   <a:srgbClr val="192F3C"/>
                 </a:solidFill>
                 <a:latin typeface="DejaVu Sans"/>
                 <a:ea typeface="DejaVu Sans"/>
                 <a:cs typeface="DejaVu Sans"/>
-              </a:defRPr>
-            </a:pPr>
-            <a:r>
-              <a:rPr sz="1350" b="0">
-                <a:solidFill>
-                  <a:srgbClr val="192F3C"/>
-                </a:solidFill>
-                <a:latin typeface="DejaVu Sans"/>
-                <a:ea typeface="DejaVu Sans"/>
-                <a:cs typeface="DejaVu Sans"/>
-              </a:rPr>
-              <a:t>from evidence</a:t>
+              </a:rPr>
+              <a:t>na bazie dowodów</a:t>
             </a:r>
           </a:p>
         </p:txBody>
@@ -8897,7 +9076,7 @@
               </a:defRPr>
             </a:pPr>
             <a:r>
-              <a:rPr sz="1275" b="1">
+              <a:rPr sz="1275" b="1" lang="pl-PL">
                 <a:solidFill>
                   <a:srgbClr val="006C86"/>
                 </a:solidFill>
@@ -8905,7 +9084,7 @@
                 <a:ea typeface="DejaVu Sans"/>
                 <a:cs typeface="DejaVu Sans"/>
               </a:rPr>
-              <a:t>test files</a:t>
+              <a:t>pliki testów</a:t>
             </a:r>
           </a:p>
         </p:txBody>
@@ -8966,7 +9145,7 @@
               </a:defRPr>
             </a:pPr>
             <a:r>
-              <a:rPr sz="1275" b="0">
+              <a:rPr sz="1140" b="0" lang="pl-PL">
                 <a:solidFill>
                   <a:srgbClr val="536873"/>
                 </a:solidFill>
@@ -8974,7 +9153,7 @@
                 <a:ea typeface="DejaVu Sans"/>
                 <a:cs typeface="DejaVu Sans"/>
               </a:rPr>
-              <a:t>Conceptual example. Explicit handoffs support focus. *Browser session state must remain available.</a:t>
+              <a:t>Przykład poglądowy. Jawne przekazanie wyników pomaga skupić pracę. *Zachowaj stan sesji przeglądarki.</a:t>
             </a:r>
           </a:p>
         </p:txBody>
@@ -8986,6 +9165,4545 @@
       </p:ext>
     </p:extLst>
   </p:cSld>
+</p:sld>
+</file>
+
+<file path=ppt/slides/slide3.xml><?xml version="1.0" encoding="utf-8"?>
+<p:sld xmlns:a="http://schemas.openxmlformats.org/drawingml/2006/main" xmlns:p="http://schemas.openxmlformats.org/presentationml/2006/main" xmlns:r="http://schemas.openxmlformats.org/officeDocument/2006/relationships">
+  <p:cSld>
+    <p:bg>
+      <p:bgPr>
+        <a:solidFill>
+          <a:srgbClr val="FFFFFF"/>
+        </a:solidFill>
+        <a:effectLst/>
+      </p:bgPr>
+    </p:bg>
+    <p:spTree>
+      <p:nvGrpSpPr>
+        <p:cNvPr id="1" name=""/>
+        <p:cNvGrpSpPr/>
+        <p:nvPr/>
+      </p:nvGrpSpPr>
+      <p:grpSpPr/>
+      <p:sp>
+        <p:nvSpPr>
+          <p:cNvPr id="2" name="TextBox 1"/>
+          <p:cNvSpPr txBox="1"/>
+          <p:nvPr/>
+        </p:nvSpPr>
+        <p:spPr>
+          <a:xfrm>
+            <a:off x="548640" y="2944368"/>
+            <a:ext cx="14145768" cy="2286000"/>
+          </a:xfrm>
+          <a:prstGeom prst="rect">
+            <a:avLst/>
+          </a:prstGeom>
+          <a:noFill/>
+        </p:spPr>
+        <p:txBody>
+          <a:bodyPr wrap="square" lIns="0" rIns="0" tIns="0" bIns="0" anchor="ctr">
+            <a:spAutoFit/>
+          </a:bodyPr>
+          <a:lstStyle/>
+          <a:p>
+            <a:pPr algn="ctr">
+              <a:lnSpc>
+                <a:spcPct val="108000"/>
+              </a:lnSpc>
+              <a:spcBef>
+                <a:spcPts val="0"/>
+              </a:spcBef>
+              <a:spcAft>
+                <a:spcPts val="0"/>
+              </a:spcAft>
+            </a:pPr>
+            <a:r>
+              <a:rPr sz="14500" b="1" lang="pl-PL">
+                <a:solidFill>
+                  <a:srgbClr val="FF000F"/>
+                </a:solidFill>
+                <a:latin typeface="DejaVu Sans"/>
+              </a:rPr>
+              <a:t>Losowość</a:t>
+            </a:r>
+          </a:p>
+        </p:txBody>
+      </p:sp>
+      <p:grpSp>
+        <p:nvGrpSpPr>
+          <p:cNvPr id="3" name="Group 2"/>
+          <p:cNvGrpSpPr/>
+          <p:nvPr/>
+        </p:nvGrpSpPr>
+        <p:grpSpPr>
+          <a:xfrm rot="20760000">
+            <a:off x="12618720" y="6995160"/>
+            <a:ext cx="868680" cy="868680"/>
+            <a:chOff x="12618720" y="6995160"/>
+            <a:chExt cx="868680" cy="868680"/>
+          </a:xfrm>
+        </p:grpSpPr>
+        <p:sp>
+          <p:nvSpPr>
+            <p:cNvPr id="4" name="Rounded Rectangle 3"/>
+            <p:cNvSpPr/>
+            <p:nvPr/>
+          </p:nvSpPr>
+          <p:spPr>
+            <a:xfrm>
+              <a:off x="12618720" y="6995160"/>
+              <a:ext cx="868680" cy="868680"/>
+            </a:xfrm>
+            <a:prstGeom prst="roundRect">
+              <a:avLst>
+                <a:gd name="adj" fmla="val 12000"/>
+              </a:avLst>
+            </a:prstGeom>
+            <a:solidFill>
+              <a:srgbClr val="FFFFFF"/>
+            </a:solidFill>
+            <a:ln w="38100">
+              <a:solidFill>
+                <a:srgbClr val="FF000F"/>
+              </a:solidFill>
+            </a:ln>
+          </p:spPr>
+          <p:style>
+            <a:lnRef idx="1">
+              <a:schemeClr val="accent1"/>
+            </a:lnRef>
+            <a:fillRef idx="3">
+              <a:schemeClr val="accent1"/>
+            </a:fillRef>
+            <a:effectRef idx="2">
+              <a:schemeClr val="accent1"/>
+            </a:effectRef>
+            <a:fontRef idx="minor">
+              <a:schemeClr val="lt1"/>
+            </a:fontRef>
+          </p:style>
+          <p:txBody>
+            <a:bodyPr rtlCol="0" anchor="ctr"/>
+            <a:lstStyle/>
+            <a:p>
+              <a:pPr algn="ctr"/>
+            </a:p>
+          </p:txBody>
+        </p:sp>
+        <p:sp>
+          <p:nvSpPr>
+            <p:cNvPr id="5" name="Oval 4"/>
+            <p:cNvSpPr/>
+            <p:nvPr/>
+          </p:nvSpPr>
+          <p:spPr>
+            <a:xfrm>
+              <a:off x="12788112" y="7164552"/>
+              <a:ext cx="112928" cy="112928"/>
+            </a:xfrm>
+            <a:prstGeom prst="ellipse">
+              <a:avLst/>
+            </a:prstGeom>
+            <a:solidFill>
+              <a:srgbClr val="FF000F"/>
+            </a:solidFill>
+            <a:ln>
+              <a:noFill/>
+            </a:ln>
+          </p:spPr>
+          <p:style>
+            <a:lnRef idx="1">
+              <a:schemeClr val="accent1"/>
+            </a:lnRef>
+            <a:fillRef idx="3">
+              <a:schemeClr val="accent1"/>
+            </a:fillRef>
+            <a:effectRef idx="2">
+              <a:schemeClr val="accent1"/>
+            </a:effectRef>
+            <a:fontRef idx="minor">
+              <a:schemeClr val="lt1"/>
+            </a:fontRef>
+          </p:style>
+          <p:txBody>
+            <a:bodyPr rtlCol="0" anchor="ctr"/>
+            <a:lstStyle/>
+            <a:p>
+              <a:pPr algn="ctr"/>
+            </a:p>
+          </p:txBody>
+        </p:sp>
+        <p:sp>
+          <p:nvSpPr>
+            <p:cNvPr id="6" name="Oval 5"/>
+            <p:cNvSpPr/>
+            <p:nvPr/>
+          </p:nvSpPr>
+          <p:spPr>
+            <a:xfrm>
+              <a:off x="13205079" y="7164552"/>
+              <a:ext cx="112928" cy="112928"/>
+            </a:xfrm>
+            <a:prstGeom prst="ellipse">
+              <a:avLst/>
+            </a:prstGeom>
+            <a:solidFill>
+              <a:srgbClr val="FF000F"/>
+            </a:solidFill>
+            <a:ln>
+              <a:noFill/>
+            </a:ln>
+          </p:spPr>
+          <p:style>
+            <a:lnRef idx="1">
+              <a:schemeClr val="accent1"/>
+            </a:lnRef>
+            <a:fillRef idx="3">
+              <a:schemeClr val="accent1"/>
+            </a:fillRef>
+            <a:effectRef idx="2">
+              <a:schemeClr val="accent1"/>
+            </a:effectRef>
+            <a:fontRef idx="minor">
+              <a:schemeClr val="lt1"/>
+            </a:fontRef>
+          </p:style>
+          <p:txBody>
+            <a:bodyPr rtlCol="0" anchor="ctr"/>
+            <a:lstStyle/>
+            <a:p>
+              <a:pPr algn="ctr"/>
+            </a:p>
+          </p:txBody>
+        </p:sp>
+        <p:sp>
+          <p:nvSpPr>
+            <p:cNvPr id="7" name="Oval 6"/>
+            <p:cNvSpPr/>
+            <p:nvPr/>
+          </p:nvSpPr>
+          <p:spPr>
+            <a:xfrm>
+              <a:off x="12996595" y="7373035"/>
+              <a:ext cx="112928" cy="112928"/>
+            </a:xfrm>
+            <a:prstGeom prst="ellipse">
+              <a:avLst/>
+            </a:prstGeom>
+            <a:solidFill>
+              <a:srgbClr val="FF000F"/>
+            </a:solidFill>
+            <a:ln>
+              <a:noFill/>
+            </a:ln>
+          </p:spPr>
+          <p:style>
+            <a:lnRef idx="1">
+              <a:schemeClr val="accent1"/>
+            </a:lnRef>
+            <a:fillRef idx="3">
+              <a:schemeClr val="accent1"/>
+            </a:fillRef>
+            <a:effectRef idx="2">
+              <a:schemeClr val="accent1"/>
+            </a:effectRef>
+            <a:fontRef idx="minor">
+              <a:schemeClr val="lt1"/>
+            </a:fontRef>
+          </p:style>
+          <p:txBody>
+            <a:bodyPr rtlCol="0" anchor="ctr"/>
+            <a:lstStyle/>
+            <a:p>
+              <a:pPr algn="ctr"/>
+            </a:p>
+          </p:txBody>
+        </p:sp>
+        <p:sp>
+          <p:nvSpPr>
+            <p:cNvPr id="8" name="Oval 7"/>
+            <p:cNvSpPr/>
+            <p:nvPr/>
+          </p:nvSpPr>
+          <p:spPr>
+            <a:xfrm>
+              <a:off x="12788112" y="7581519"/>
+              <a:ext cx="112928" cy="112928"/>
+            </a:xfrm>
+            <a:prstGeom prst="ellipse">
+              <a:avLst/>
+            </a:prstGeom>
+            <a:solidFill>
+              <a:srgbClr val="FF000F"/>
+            </a:solidFill>
+            <a:ln>
+              <a:noFill/>
+            </a:ln>
+          </p:spPr>
+          <p:style>
+            <a:lnRef idx="1">
+              <a:schemeClr val="accent1"/>
+            </a:lnRef>
+            <a:fillRef idx="3">
+              <a:schemeClr val="accent1"/>
+            </a:fillRef>
+            <a:effectRef idx="2">
+              <a:schemeClr val="accent1"/>
+            </a:effectRef>
+            <a:fontRef idx="minor">
+              <a:schemeClr val="lt1"/>
+            </a:fontRef>
+          </p:style>
+          <p:txBody>
+            <a:bodyPr rtlCol="0" anchor="ctr"/>
+            <a:lstStyle/>
+            <a:p>
+              <a:pPr algn="ctr"/>
+            </a:p>
+          </p:txBody>
+        </p:sp>
+        <p:sp>
+          <p:nvSpPr>
+            <p:cNvPr id="9" name="Oval 8"/>
+            <p:cNvSpPr/>
+            <p:nvPr/>
+          </p:nvSpPr>
+          <p:spPr>
+            <a:xfrm>
+              <a:off x="13205079" y="7581519"/>
+              <a:ext cx="112928" cy="112928"/>
+            </a:xfrm>
+            <a:prstGeom prst="ellipse">
+              <a:avLst/>
+            </a:prstGeom>
+            <a:solidFill>
+              <a:srgbClr val="FF000F"/>
+            </a:solidFill>
+            <a:ln>
+              <a:noFill/>
+            </a:ln>
+          </p:spPr>
+          <p:style>
+            <a:lnRef idx="1">
+              <a:schemeClr val="accent1"/>
+            </a:lnRef>
+            <a:fillRef idx="3">
+              <a:schemeClr val="accent1"/>
+            </a:fillRef>
+            <a:effectRef idx="2">
+              <a:schemeClr val="accent1"/>
+            </a:effectRef>
+            <a:fontRef idx="minor">
+              <a:schemeClr val="lt1"/>
+            </a:fontRef>
+          </p:style>
+          <p:txBody>
+            <a:bodyPr rtlCol="0" anchor="ctr"/>
+            <a:lstStyle/>
+            <a:p>
+              <a:pPr algn="ctr"/>
+            </a:p>
+          </p:txBody>
+        </p:sp>
+      </p:grpSp>
+      <p:grpSp>
+        <p:nvGrpSpPr>
+          <p:cNvPr id="10" name="Group 9"/>
+          <p:cNvGrpSpPr/>
+          <p:nvPr/>
+        </p:nvGrpSpPr>
+        <p:grpSpPr>
+          <a:xfrm rot="720000">
+            <a:off x="13670280" y="7086600"/>
+            <a:ext cx="868680" cy="868680"/>
+            <a:chOff x="13670280" y="7086600"/>
+            <a:chExt cx="868680" cy="868680"/>
+          </a:xfrm>
+        </p:grpSpPr>
+        <p:sp>
+          <p:nvSpPr>
+            <p:cNvPr id="11" name="Rounded Rectangle 10"/>
+            <p:cNvSpPr/>
+            <p:nvPr/>
+          </p:nvSpPr>
+          <p:spPr>
+            <a:xfrm>
+              <a:off x="13670280" y="7086600"/>
+              <a:ext cx="868680" cy="868680"/>
+            </a:xfrm>
+            <a:prstGeom prst="roundRect">
+              <a:avLst>
+                <a:gd name="adj" fmla="val 12000"/>
+              </a:avLst>
+            </a:prstGeom>
+            <a:solidFill>
+              <a:srgbClr val="FFFFFF"/>
+            </a:solidFill>
+            <a:ln w="38100">
+              <a:solidFill>
+                <a:srgbClr val="FF000F"/>
+              </a:solidFill>
+            </a:ln>
+          </p:spPr>
+          <p:style>
+            <a:lnRef idx="1">
+              <a:schemeClr val="accent1"/>
+            </a:lnRef>
+            <a:fillRef idx="3">
+              <a:schemeClr val="accent1"/>
+            </a:fillRef>
+            <a:effectRef idx="2">
+              <a:schemeClr val="accent1"/>
+            </a:effectRef>
+            <a:fontRef idx="minor">
+              <a:schemeClr val="lt1"/>
+            </a:fontRef>
+          </p:style>
+          <p:txBody>
+            <a:bodyPr rtlCol="0" anchor="ctr"/>
+            <a:lstStyle/>
+            <a:p>
+              <a:pPr algn="ctr"/>
+            </a:p>
+          </p:txBody>
+        </p:sp>
+        <p:sp>
+          <p:nvSpPr>
+            <p:cNvPr id="12" name="Oval 11"/>
+            <p:cNvSpPr/>
+            <p:nvPr/>
+          </p:nvSpPr>
+          <p:spPr>
+            <a:xfrm>
+              <a:off x="13839672" y="7255992"/>
+              <a:ext cx="112928" cy="112928"/>
+            </a:xfrm>
+            <a:prstGeom prst="ellipse">
+              <a:avLst/>
+            </a:prstGeom>
+            <a:solidFill>
+              <a:srgbClr val="FF000F"/>
+            </a:solidFill>
+            <a:ln>
+              <a:noFill/>
+            </a:ln>
+          </p:spPr>
+          <p:style>
+            <a:lnRef idx="1">
+              <a:schemeClr val="accent1"/>
+            </a:lnRef>
+            <a:fillRef idx="3">
+              <a:schemeClr val="accent1"/>
+            </a:fillRef>
+            <a:effectRef idx="2">
+              <a:schemeClr val="accent1"/>
+            </a:effectRef>
+            <a:fontRef idx="minor">
+              <a:schemeClr val="lt1"/>
+            </a:fontRef>
+          </p:style>
+          <p:txBody>
+            <a:bodyPr rtlCol="0" anchor="ctr"/>
+            <a:lstStyle/>
+            <a:p>
+              <a:pPr algn="ctr"/>
+            </a:p>
+          </p:txBody>
+        </p:sp>
+        <p:sp>
+          <p:nvSpPr>
+            <p:cNvPr id="13" name="Oval 12"/>
+            <p:cNvSpPr/>
+            <p:nvPr/>
+          </p:nvSpPr>
+          <p:spPr>
+            <a:xfrm>
+              <a:off x="14048155" y="7464475"/>
+              <a:ext cx="112928" cy="112928"/>
+            </a:xfrm>
+            <a:prstGeom prst="ellipse">
+              <a:avLst/>
+            </a:prstGeom>
+            <a:solidFill>
+              <a:srgbClr val="FF000F"/>
+            </a:solidFill>
+            <a:ln>
+              <a:noFill/>
+            </a:ln>
+          </p:spPr>
+          <p:style>
+            <a:lnRef idx="1">
+              <a:schemeClr val="accent1"/>
+            </a:lnRef>
+            <a:fillRef idx="3">
+              <a:schemeClr val="accent1"/>
+            </a:fillRef>
+            <a:effectRef idx="2">
+              <a:schemeClr val="accent1"/>
+            </a:effectRef>
+            <a:fontRef idx="minor">
+              <a:schemeClr val="lt1"/>
+            </a:fontRef>
+          </p:style>
+          <p:txBody>
+            <a:bodyPr rtlCol="0" anchor="ctr"/>
+            <a:lstStyle/>
+            <a:p>
+              <a:pPr algn="ctr"/>
+            </a:p>
+          </p:txBody>
+        </p:sp>
+        <p:sp>
+          <p:nvSpPr>
+            <p:cNvPr id="14" name="Oval 13"/>
+            <p:cNvSpPr/>
+            <p:nvPr/>
+          </p:nvSpPr>
+          <p:spPr>
+            <a:xfrm>
+              <a:off x="14256638" y="7672958"/>
+              <a:ext cx="112928" cy="112928"/>
+            </a:xfrm>
+            <a:prstGeom prst="ellipse">
+              <a:avLst/>
+            </a:prstGeom>
+            <a:solidFill>
+              <a:srgbClr val="FF000F"/>
+            </a:solidFill>
+            <a:ln>
+              <a:noFill/>
+            </a:ln>
+          </p:spPr>
+          <p:style>
+            <a:lnRef idx="1">
+              <a:schemeClr val="accent1"/>
+            </a:lnRef>
+            <a:fillRef idx="3">
+              <a:schemeClr val="accent1"/>
+            </a:fillRef>
+            <a:effectRef idx="2">
+              <a:schemeClr val="accent1"/>
+            </a:effectRef>
+            <a:fontRef idx="minor">
+              <a:schemeClr val="lt1"/>
+            </a:fontRef>
+          </p:style>
+          <p:txBody>
+            <a:bodyPr rtlCol="0" anchor="ctr"/>
+            <a:lstStyle/>
+            <a:p>
+              <a:pPr algn="ctr"/>
+            </a:p>
+          </p:txBody>
+        </p:sp>
+      </p:grpSp>
+    </p:spTree>
+  </p:cSld>
+  <p:clrMapOvr>
+    <a:masterClrMapping/>
+  </p:clrMapOvr>
+</p:sld>
+</file>
+
+<file path=ppt/slides/slide4.xml><?xml version="1.0" encoding="utf-8"?>
+<p:sld xmlns:a="http://schemas.openxmlformats.org/drawingml/2006/main" xmlns:p="http://schemas.openxmlformats.org/presentationml/2006/main" xmlns:r="http://schemas.openxmlformats.org/officeDocument/2006/relationships">
+  <p:cSld>
+    <p:bg>
+      <p:bgPr>
+        <a:solidFill>
+          <a:srgbClr val="FFFFFF"/>
+        </a:solidFill>
+        <a:effectLst/>
+      </p:bgPr>
+    </p:bg>
+    <p:spTree>
+      <p:nvGrpSpPr>
+        <p:cNvPr id="1" name=""/>
+        <p:cNvGrpSpPr/>
+        <p:nvPr/>
+      </p:nvGrpSpPr>
+      <p:grpSpPr/>
+      <p:sp>
+        <p:nvSpPr>
+          <p:cNvPr id="2" name="TextBox 1"/>
+          <p:cNvSpPr txBox="1"/>
+          <p:nvPr/>
+        </p:nvSpPr>
+        <p:spPr>
+          <a:xfrm>
+            <a:off x="612648" y="320040"/>
+            <a:ext cx="12856464" cy="265176"/>
+          </a:xfrm>
+          <a:prstGeom prst="rect">
+            <a:avLst/>
+          </a:prstGeom>
+          <a:noFill/>
+        </p:spPr>
+        <p:txBody>
+          <a:bodyPr wrap="square" lIns="0" rIns="0" tIns="0" bIns="0" anchor="t">
+            <a:spAutoFit/>
+          </a:bodyPr>
+          <a:lstStyle/>
+          <a:p>
+            <a:pPr algn="l">
+              <a:lnSpc>
+                <a:spcPct val="108000"/>
+              </a:lnSpc>
+              <a:spcBef>
+                <a:spcPts val="0"/>
+              </a:spcBef>
+              <a:spcAft>
+                <a:spcPts val="0"/>
+              </a:spcAft>
+            </a:pPr>
+            <a:r>
+              <a:rPr sz="1350" b="0" lang="pl-PL">
+                <a:solidFill>
+                  <a:srgbClr val="536873"/>
+                </a:solidFill>
+                <a:latin typeface="DejaVu Sans"/>
+              </a:rPr>
+              <a:t>Szkolenie inżynierskie ABB / Pokaż — uogólnij — zautomatyzuj</a:t>
+            </a:r>
+          </a:p>
+        </p:txBody>
+      </p:sp>
+      <p:sp>
+        <p:nvSpPr>
+          <p:cNvPr id="3" name="TextBox 2"/>
+          <p:cNvSpPr txBox="1"/>
+          <p:nvPr/>
+        </p:nvSpPr>
+        <p:spPr>
+          <a:xfrm>
+            <a:off x="612648" y="841248"/>
+            <a:ext cx="14017752" cy="676656"/>
+          </a:xfrm>
+          <a:prstGeom prst="rect">
+            <a:avLst/>
+          </a:prstGeom>
+          <a:noFill/>
+        </p:spPr>
+        <p:txBody>
+          <a:bodyPr wrap="square" lIns="0" rIns="0" tIns="0" bIns="0" anchor="t">
+            <a:spAutoFit/>
+          </a:bodyPr>
+          <a:lstStyle/>
+          <a:p>
+            <a:pPr algn="l">
+              <a:lnSpc>
+                <a:spcPct val="108000"/>
+              </a:lnSpc>
+              <a:spcBef>
+                <a:spcPts val="0"/>
+              </a:spcBef>
+              <a:spcAft>
+                <a:spcPts val="0"/>
+              </a:spcAft>
+            </a:pPr>
+            <a:r>
+              <a:rPr sz="3450" b="1" lang="pl-PL">
+                <a:solidFill>
+                  <a:srgbClr val="192F3C"/>
+                </a:solidFill>
+                <a:latin typeface="DejaVu Sans"/>
+              </a:rPr>
+              <a:t>Ten sam prompt, różne poprawne odpowiedzi</a:t>
+            </a:r>
+          </a:p>
+        </p:txBody>
+      </p:sp>
+      <p:cxnSp>
+        <p:nvCxnSpPr>
+          <p:cNvPr id="4" name="Connector 3"/>
+          <p:cNvCxnSpPr/>
+          <p:nvPr/>
+        </p:nvCxnSpPr>
+        <p:spPr>
+          <a:xfrm>
+            <a:off x="612648" y="1673352"/>
+            <a:ext cx="14017752" cy="0"/>
+          </a:xfrm>
+          <a:prstGeom prst="line">
+            <a:avLst/>
+          </a:prstGeom>
+          <a:ln w="19050">
+            <a:solidFill>
+              <a:srgbClr val="006C86"/>
+            </a:solidFill>
+          </a:ln>
+        </p:spPr>
+        <p:style>
+          <a:lnRef idx="2">
+            <a:schemeClr val="accent1"/>
+          </a:lnRef>
+          <a:fillRef idx="0">
+            <a:schemeClr val="accent1"/>
+          </a:fillRef>
+          <a:effectRef idx="1">
+            <a:schemeClr val="accent1"/>
+          </a:effectRef>
+          <a:fontRef idx="minor">
+            <a:schemeClr val="tx1"/>
+          </a:fontRef>
+        </p:style>
+      </p:cxnSp>
+      <p:sp>
+        <p:nvSpPr>
+          <p:cNvPr id="5" name="TextBox 4"/>
+          <p:cNvSpPr txBox="1"/>
+          <p:nvPr/>
+        </p:nvSpPr>
+        <p:spPr>
+          <a:xfrm>
+            <a:off x="14282928" y="8074152"/>
+            <a:ext cx="347472" cy="265176"/>
+          </a:xfrm>
+          <a:prstGeom prst="rect">
+            <a:avLst/>
+          </a:prstGeom>
+          <a:noFill/>
+        </p:spPr>
+        <p:txBody>
+          <a:bodyPr wrap="square" lIns="0" rIns="0" tIns="0" bIns="0" anchor="t">
+            <a:spAutoFit/>
+          </a:bodyPr>
+          <a:lstStyle/>
+          <a:p>
+            <a:pPr algn="r">
+              <a:lnSpc>
+                <a:spcPct val="108000"/>
+              </a:lnSpc>
+              <a:spcBef>
+                <a:spcPts val="0"/>
+              </a:spcBef>
+              <a:spcAft>
+                <a:spcPts val="0"/>
+              </a:spcAft>
+            </a:pPr>
+            <a:r>
+              <a:rPr sz="1350" b="0" lang="pl-PL">
+                <a:solidFill>
+                  <a:srgbClr val="536873"/>
+                </a:solidFill>
+                <a:latin typeface="DejaVu Sans"/>
+              </a:rPr>
+              <a:t>2</a:t>
+            </a:r>
+          </a:p>
+        </p:txBody>
+      </p:sp>
+      <p:sp>
+        <p:nvSpPr>
+          <p:cNvPr id="6" name="TextBox 5"/>
+          <p:cNvSpPr txBox="1"/>
+          <p:nvPr/>
+        </p:nvSpPr>
+        <p:spPr>
+          <a:xfrm>
+            <a:off x="612648" y="1901952"/>
+            <a:ext cx="13853160" cy="566928"/>
+          </a:xfrm>
+          <a:prstGeom prst="rect">
+            <a:avLst/>
+          </a:prstGeom>
+          <a:noFill/>
+        </p:spPr>
+        <p:txBody>
+          <a:bodyPr wrap="square" lIns="0" rIns="0" tIns="0" bIns="0" anchor="t">
+            <a:spAutoFit/>
+          </a:bodyPr>
+          <a:lstStyle/>
+          <a:p>
+            <a:pPr algn="l">
+              <a:lnSpc>
+                <a:spcPct val="108000"/>
+              </a:lnSpc>
+              <a:spcBef>
+                <a:spcPts val="0"/>
+              </a:spcBef>
+              <a:spcAft>
+                <a:spcPts val="0"/>
+              </a:spcAft>
+            </a:pPr>
+            <a:r>
+              <a:rPr sz="2025" b="0" lang="pl-PL">
+                <a:solidFill>
+                  <a:srgbClr val="192F3C"/>
+                </a:solidFill>
+                <a:latin typeface="DejaVu Sans"/>
+              </a:rPr>
+              <a:t>Generowanie jest probabilistyczne: mogą zmieniać się słowa, kolejność i wnioski.</a:t>
+            </a:r>
+          </a:p>
+        </p:txBody>
+      </p:sp>
+      <p:sp>
+        <p:nvSpPr>
+          <p:cNvPr id="7" name="Rectangle 6"/>
+          <p:cNvSpPr/>
+          <p:nvPr/>
+        </p:nvSpPr>
+        <p:spPr>
+          <a:xfrm>
+            <a:off x="612648" y="2697480"/>
+            <a:ext cx="14017752" cy="731520"/>
+          </a:xfrm>
+          <a:prstGeom prst="rect">
+            <a:avLst/>
+          </a:prstGeom>
+          <a:solidFill>
+            <a:srgbClr val="ECF4F6"/>
+          </a:solidFill>
+          <a:ln w="12700">
+            <a:solidFill>
+              <a:srgbClr val="BFD4DE"/>
+            </a:solidFill>
+          </a:ln>
+        </p:spPr>
+        <p:style>
+          <a:lnRef idx="1">
+            <a:schemeClr val="accent1"/>
+          </a:lnRef>
+          <a:fillRef idx="3">
+            <a:schemeClr val="accent1"/>
+          </a:fillRef>
+          <a:effectRef idx="2">
+            <a:schemeClr val="accent1"/>
+          </a:effectRef>
+          <a:fontRef idx="minor">
+            <a:schemeClr val="lt1"/>
+          </a:fontRef>
+        </p:style>
+        <p:txBody>
+          <a:bodyPr rtlCol="0" anchor="ctr"/>
+          <a:lstStyle/>
+          <a:p>
+            <a:pPr algn="ctr"/>
+          </a:p>
+        </p:txBody>
+      </p:sp>
+      <p:sp>
+        <p:nvSpPr>
+          <p:cNvPr id="8" name="TextBox 7"/>
+          <p:cNvSpPr txBox="1"/>
+          <p:nvPr/>
+        </p:nvSpPr>
+        <p:spPr>
+          <a:xfrm>
+            <a:off x="832104" y="2880360"/>
+            <a:ext cx="13569696" cy="393192"/>
+          </a:xfrm>
+          <a:prstGeom prst="rect">
+            <a:avLst/>
+          </a:prstGeom>
+          <a:noFill/>
+        </p:spPr>
+        <p:txBody>
+          <a:bodyPr wrap="square" lIns="0" rIns="0" tIns="0" bIns="0" anchor="t">
+            <a:spAutoFit/>
+          </a:bodyPr>
+          <a:lstStyle/>
+          <a:p>
+            <a:pPr algn="l">
+              <a:lnSpc>
+                <a:spcPct val="108000"/>
+              </a:lnSpc>
+              <a:spcBef>
+                <a:spcPts val="0"/>
+              </a:spcBef>
+              <a:spcAft>
+                <a:spcPts val="0"/>
+              </a:spcAft>
+            </a:pPr>
+            <a:r>
+              <a:rPr sz="2050" b="1" lang="pl-PL">
+                <a:solidFill>
+                  <a:srgbClr val="192F3C"/>
+                </a:solidFill>
+                <a:latin typeface="DejaVu Sans"/>
+              </a:rPr>
+              <a:t>„Zaplanuj dwa tygodnie w Tajlandii. Co warto zobaczyć?”</a:t>
+            </a:r>
+          </a:p>
+        </p:txBody>
+      </p:sp>
+      <p:sp>
+        <p:nvSpPr>
+          <p:cNvPr id="9" name="Rectangle 8"/>
+          <p:cNvSpPr/>
+          <p:nvPr/>
+        </p:nvSpPr>
+        <p:spPr>
+          <a:xfrm>
+            <a:off x="612648" y="3694176"/>
+            <a:ext cx="4489704" cy="1508760"/>
+          </a:xfrm>
+          <a:prstGeom prst="rect">
+            <a:avLst/>
+          </a:prstGeom>
+          <a:solidFill>
+            <a:srgbClr val="ECF4F6"/>
+          </a:solidFill>
+          <a:ln w="12700">
+            <a:solidFill>
+              <a:srgbClr val="BFD4DE"/>
+            </a:solidFill>
+          </a:ln>
+        </p:spPr>
+        <p:style>
+          <a:lnRef idx="1">
+            <a:schemeClr val="accent1"/>
+          </a:lnRef>
+          <a:fillRef idx="3">
+            <a:schemeClr val="accent1"/>
+          </a:fillRef>
+          <a:effectRef idx="2">
+            <a:schemeClr val="accent1"/>
+          </a:effectRef>
+          <a:fontRef idx="minor">
+            <a:schemeClr val="lt1"/>
+          </a:fontRef>
+        </p:style>
+        <p:txBody>
+          <a:bodyPr rtlCol="0" anchor="ctr"/>
+          <a:lstStyle/>
+          <a:p>
+            <a:pPr algn="ctr"/>
+          </a:p>
+        </p:txBody>
+      </p:sp>
+      <p:sp>
+        <p:nvSpPr>
+          <p:cNvPr id="10" name="TextBox 9"/>
+          <p:cNvSpPr txBox="1"/>
+          <p:nvPr/>
+        </p:nvSpPr>
+        <p:spPr>
+          <a:xfrm>
+            <a:off x="813816" y="3867912"/>
+            <a:ext cx="594360" cy="365760"/>
+          </a:xfrm>
+          <a:prstGeom prst="rect">
+            <a:avLst/>
+          </a:prstGeom>
+          <a:noFill/>
+        </p:spPr>
+        <p:txBody>
+          <a:bodyPr wrap="square" lIns="0" rIns="0" tIns="0" bIns="0" anchor="t">
+            <a:spAutoFit/>
+          </a:bodyPr>
+          <a:lstStyle/>
+          <a:p>
+            <a:pPr algn="l">
+              <a:lnSpc>
+                <a:spcPct val="108000"/>
+              </a:lnSpc>
+              <a:spcBef>
+                <a:spcPts val="0"/>
+              </a:spcBef>
+              <a:spcAft>
+                <a:spcPts val="0"/>
+              </a:spcAft>
+            </a:pPr>
+            <a:r>
+              <a:rPr sz="2400" b="1" lang="pl-PL">
+                <a:solidFill>
+                  <a:srgbClr val="006C86"/>
+                </a:solidFill>
+                <a:latin typeface="DejaVu Sans"/>
+              </a:rPr>
+              <a:t>01</a:t>
+            </a:r>
+          </a:p>
+        </p:txBody>
+      </p:sp>
+      <p:sp>
+        <p:nvSpPr>
+          <p:cNvPr id="11" name="TextBox 10"/>
+          <p:cNvSpPr txBox="1"/>
+          <p:nvPr/>
+        </p:nvSpPr>
+        <p:spPr>
+          <a:xfrm>
+            <a:off x="1527048" y="3886200"/>
+            <a:ext cx="3346704" cy="365760"/>
+          </a:xfrm>
+          <a:prstGeom prst="rect">
+            <a:avLst/>
+          </a:prstGeom>
+          <a:noFill/>
+        </p:spPr>
+        <p:txBody>
+          <a:bodyPr wrap="square" lIns="0" rIns="0" tIns="0" bIns="0" anchor="t">
+            <a:spAutoFit/>
+          </a:bodyPr>
+          <a:lstStyle/>
+          <a:p>
+            <a:pPr algn="l">
+              <a:lnSpc>
+                <a:spcPct val="108000"/>
+              </a:lnSpc>
+              <a:spcBef>
+                <a:spcPts val="0"/>
+              </a:spcBef>
+              <a:spcAft>
+                <a:spcPts val="0"/>
+              </a:spcAft>
+            </a:pPr>
+            <a:r>
+              <a:rPr sz="1900" b="1" lang="pl-PL">
+                <a:solidFill>
+                  <a:srgbClr val="192F3C"/>
+                </a:solidFill>
+                <a:latin typeface="DejaVu Sans"/>
+              </a:rPr>
+              <a:t>Plan według miejsc</a:t>
+            </a:r>
+          </a:p>
+        </p:txBody>
+      </p:sp>
+      <p:sp>
+        <p:nvSpPr>
+          <p:cNvPr id="12" name="TextBox 11"/>
+          <p:cNvSpPr txBox="1"/>
+          <p:nvPr/>
+        </p:nvSpPr>
+        <p:spPr>
+          <a:xfrm>
+            <a:off x="822960" y="4434840"/>
+            <a:ext cx="4041648" cy="576072"/>
+          </a:xfrm>
+          <a:prstGeom prst="rect">
+            <a:avLst/>
+          </a:prstGeom>
+          <a:noFill/>
+        </p:spPr>
+        <p:txBody>
+          <a:bodyPr wrap="square" lIns="0" rIns="0" tIns="0" bIns="0" anchor="t">
+            <a:spAutoFit/>
+          </a:bodyPr>
+          <a:lstStyle/>
+          <a:p>
+            <a:pPr algn="l">
+              <a:lnSpc>
+                <a:spcPct val="108000"/>
+              </a:lnSpc>
+              <a:spcBef>
+                <a:spcPts val="0"/>
+              </a:spcBef>
+              <a:spcAft>
+                <a:spcPts val="0"/>
+              </a:spcAft>
+            </a:pPr>
+            <a:r>
+              <a:rPr sz="1750" b="0" lang="pl-PL">
+                <a:solidFill>
+                  <a:srgbClr val="192F3C"/>
+                </a:solidFill>
+                <a:latin typeface="DejaVu Sans"/>
+              </a:rPr>
+              <a:t>Bangkok → północ Tajlandii</a:t>
+            </a:r>
+          </a:p>
+          <a:p>
+            <a:pPr algn="l">
+              <a:lnSpc>
+                <a:spcPct val="108000"/>
+              </a:lnSpc>
+              <a:spcBef>
+                <a:spcPts val="0"/>
+              </a:spcBef>
+              <a:spcAft>
+                <a:spcPts val="0"/>
+              </a:spcAft>
+            </a:pPr>
+            <a:r>
+              <a:rPr sz="1750" b="0" lang="pl-PL">
+                <a:solidFill>
+                  <a:srgbClr val="192F3C"/>
+                </a:solidFill>
+                <a:latin typeface="DejaVu Sans"/>
+              </a:rPr>
+              <a:t>→ plaże i wyspy</a:t>
+            </a:r>
+          </a:p>
+        </p:txBody>
+      </p:sp>
+      <p:sp>
+        <p:nvSpPr>
+          <p:cNvPr id="13" name="Rectangle 12"/>
+          <p:cNvSpPr/>
+          <p:nvPr/>
+        </p:nvSpPr>
+        <p:spPr>
+          <a:xfrm>
+            <a:off x="5376672" y="3694176"/>
+            <a:ext cx="4489704" cy="1508760"/>
+          </a:xfrm>
+          <a:prstGeom prst="rect">
+            <a:avLst/>
+          </a:prstGeom>
+          <a:solidFill>
+            <a:srgbClr val="ECF4F6"/>
+          </a:solidFill>
+          <a:ln w="12700">
+            <a:solidFill>
+              <a:srgbClr val="BFD4DE"/>
+            </a:solidFill>
+          </a:ln>
+        </p:spPr>
+        <p:style>
+          <a:lnRef idx="1">
+            <a:schemeClr val="accent1"/>
+          </a:lnRef>
+          <a:fillRef idx="3">
+            <a:schemeClr val="accent1"/>
+          </a:fillRef>
+          <a:effectRef idx="2">
+            <a:schemeClr val="accent1"/>
+          </a:effectRef>
+          <a:fontRef idx="minor">
+            <a:schemeClr val="lt1"/>
+          </a:fontRef>
+        </p:style>
+        <p:txBody>
+          <a:bodyPr rtlCol="0" anchor="ctr"/>
+          <a:lstStyle/>
+          <a:p>
+            <a:pPr algn="ctr"/>
+          </a:p>
+        </p:txBody>
+      </p:sp>
+      <p:sp>
+        <p:nvSpPr>
+          <p:cNvPr id="14" name="TextBox 13"/>
+          <p:cNvSpPr txBox="1"/>
+          <p:nvPr/>
+        </p:nvSpPr>
+        <p:spPr>
+          <a:xfrm>
+            <a:off x="5577840" y="3867912"/>
+            <a:ext cx="594360" cy="365760"/>
+          </a:xfrm>
+          <a:prstGeom prst="rect">
+            <a:avLst/>
+          </a:prstGeom>
+          <a:noFill/>
+        </p:spPr>
+        <p:txBody>
+          <a:bodyPr wrap="square" lIns="0" rIns="0" tIns="0" bIns="0" anchor="t">
+            <a:spAutoFit/>
+          </a:bodyPr>
+          <a:lstStyle/>
+          <a:p>
+            <a:pPr algn="l">
+              <a:lnSpc>
+                <a:spcPct val="108000"/>
+              </a:lnSpc>
+              <a:spcBef>
+                <a:spcPts val="0"/>
+              </a:spcBef>
+              <a:spcAft>
+                <a:spcPts val="0"/>
+              </a:spcAft>
+            </a:pPr>
+            <a:r>
+              <a:rPr sz="2400" b="1" lang="pl-PL">
+                <a:solidFill>
+                  <a:srgbClr val="006C86"/>
+                </a:solidFill>
+                <a:latin typeface="DejaVu Sans"/>
+              </a:rPr>
+              <a:t>02</a:t>
+            </a:r>
+          </a:p>
+        </p:txBody>
+      </p:sp>
+      <p:sp>
+        <p:nvSpPr>
+          <p:cNvPr id="15" name="TextBox 14"/>
+          <p:cNvSpPr txBox="1"/>
+          <p:nvPr/>
+        </p:nvSpPr>
+        <p:spPr>
+          <a:xfrm>
+            <a:off x="6291072" y="3886200"/>
+            <a:ext cx="3346704" cy="365760"/>
+          </a:xfrm>
+          <a:prstGeom prst="rect">
+            <a:avLst/>
+          </a:prstGeom>
+          <a:noFill/>
+        </p:spPr>
+        <p:txBody>
+          <a:bodyPr wrap="square" lIns="0" rIns="0" tIns="0" bIns="0" anchor="t">
+            <a:spAutoFit/>
+          </a:bodyPr>
+          <a:lstStyle/>
+          <a:p>
+            <a:pPr algn="l">
+              <a:lnSpc>
+                <a:spcPct val="108000"/>
+              </a:lnSpc>
+              <a:spcBef>
+                <a:spcPts val="0"/>
+              </a:spcBef>
+              <a:spcAft>
+                <a:spcPts val="0"/>
+              </a:spcAft>
+            </a:pPr>
+            <a:r>
+              <a:rPr sz="1900" b="1" lang="pl-PL">
+                <a:solidFill>
+                  <a:srgbClr val="192F3C"/>
+                </a:solidFill>
+                <a:latin typeface="DejaVu Sans"/>
+              </a:rPr>
+              <a:t>Najpierw doprecyzowanie</a:t>
+            </a:r>
+          </a:p>
+        </p:txBody>
+      </p:sp>
+      <p:sp>
+        <p:nvSpPr>
+          <p:cNvPr id="16" name="TextBox 15"/>
+          <p:cNvSpPr txBox="1"/>
+          <p:nvPr/>
+        </p:nvSpPr>
+        <p:spPr>
+          <a:xfrm>
+            <a:off x="5586984" y="4434840"/>
+            <a:ext cx="4041648" cy="576072"/>
+          </a:xfrm>
+          <a:prstGeom prst="rect">
+            <a:avLst/>
+          </a:prstGeom>
+          <a:noFill/>
+        </p:spPr>
+        <p:txBody>
+          <a:bodyPr wrap="square" lIns="0" rIns="0" tIns="0" bIns="0" anchor="t">
+            <a:spAutoFit/>
+          </a:bodyPr>
+          <a:lstStyle/>
+          <a:p>
+            <a:pPr algn="l">
+              <a:lnSpc>
+                <a:spcPct val="108000"/>
+              </a:lnSpc>
+              <a:spcBef>
+                <a:spcPts val="0"/>
+              </a:spcBef>
+              <a:spcAft>
+                <a:spcPts val="0"/>
+              </a:spcAft>
+            </a:pPr>
+            <a:r>
+              <a:rPr sz="1750" b="0" lang="pl-PL">
+                <a:solidFill>
+                  <a:srgbClr val="192F3C"/>
+                </a:solidFill>
+                <a:latin typeface="DejaVu Sans"/>
+              </a:rPr>
+              <a:t>Pytania o zainteresowania,</a:t>
+            </a:r>
+          </a:p>
+          <a:p>
+            <a:pPr algn="l">
+              <a:lnSpc>
+                <a:spcPct val="108000"/>
+              </a:lnSpc>
+              <a:spcBef>
+                <a:spcPts val="0"/>
+              </a:spcBef>
+              <a:spcAft>
+                <a:spcPts val="0"/>
+              </a:spcAft>
+            </a:pPr>
+            <a:r>
+              <a:rPr sz="1750" b="0" lang="pl-PL">
+                <a:solidFill>
+                  <a:srgbClr val="192F3C"/>
+                </a:solidFill>
+                <a:latin typeface="DejaVu Sans"/>
+              </a:rPr>
+              <a:t>budżet i tempo podróży</a:t>
+            </a:r>
+          </a:p>
+        </p:txBody>
+      </p:sp>
+      <p:sp>
+        <p:nvSpPr>
+          <p:cNvPr id="17" name="Rectangle 16"/>
+          <p:cNvSpPr/>
+          <p:nvPr/>
+        </p:nvSpPr>
+        <p:spPr>
+          <a:xfrm>
+            <a:off x="10140696" y="3694176"/>
+            <a:ext cx="4489704" cy="1508760"/>
+          </a:xfrm>
+          <a:prstGeom prst="rect">
+            <a:avLst/>
+          </a:prstGeom>
+          <a:solidFill>
+            <a:srgbClr val="ECF4F6"/>
+          </a:solidFill>
+          <a:ln w="12700">
+            <a:solidFill>
+              <a:srgbClr val="BFD4DE"/>
+            </a:solidFill>
+          </a:ln>
+        </p:spPr>
+        <p:style>
+          <a:lnRef idx="1">
+            <a:schemeClr val="accent1"/>
+          </a:lnRef>
+          <a:fillRef idx="3">
+            <a:schemeClr val="accent1"/>
+          </a:fillRef>
+          <a:effectRef idx="2">
+            <a:schemeClr val="accent1"/>
+          </a:effectRef>
+          <a:fontRef idx="minor">
+            <a:schemeClr val="lt1"/>
+          </a:fontRef>
+        </p:style>
+        <p:txBody>
+          <a:bodyPr rtlCol="0" anchor="ctr"/>
+          <a:lstStyle/>
+          <a:p>
+            <a:pPr algn="ctr"/>
+          </a:p>
+        </p:txBody>
+      </p:sp>
+      <p:sp>
+        <p:nvSpPr>
+          <p:cNvPr id="18" name="TextBox 17"/>
+          <p:cNvSpPr txBox="1"/>
+          <p:nvPr/>
+        </p:nvSpPr>
+        <p:spPr>
+          <a:xfrm>
+            <a:off x="10341864" y="3867912"/>
+            <a:ext cx="594360" cy="365760"/>
+          </a:xfrm>
+          <a:prstGeom prst="rect">
+            <a:avLst/>
+          </a:prstGeom>
+          <a:noFill/>
+        </p:spPr>
+        <p:txBody>
+          <a:bodyPr wrap="square" lIns="0" rIns="0" tIns="0" bIns="0" anchor="t">
+            <a:spAutoFit/>
+          </a:bodyPr>
+          <a:lstStyle/>
+          <a:p>
+            <a:pPr algn="l">
+              <a:lnSpc>
+                <a:spcPct val="108000"/>
+              </a:lnSpc>
+              <a:spcBef>
+                <a:spcPts val="0"/>
+              </a:spcBef>
+              <a:spcAft>
+                <a:spcPts val="0"/>
+              </a:spcAft>
+            </a:pPr>
+            <a:r>
+              <a:rPr sz="2400" b="1" lang="pl-PL">
+                <a:solidFill>
+                  <a:srgbClr val="006C86"/>
+                </a:solidFill>
+                <a:latin typeface="DejaVu Sans"/>
+              </a:rPr>
+              <a:t>03</a:t>
+            </a:r>
+          </a:p>
+        </p:txBody>
+      </p:sp>
+      <p:sp>
+        <p:nvSpPr>
+          <p:cNvPr id="19" name="TextBox 18"/>
+          <p:cNvSpPr txBox="1"/>
+          <p:nvPr/>
+        </p:nvSpPr>
+        <p:spPr>
+          <a:xfrm>
+            <a:off x="11055096" y="3886200"/>
+            <a:ext cx="3346704" cy="365760"/>
+          </a:xfrm>
+          <a:prstGeom prst="rect">
+            <a:avLst/>
+          </a:prstGeom>
+          <a:noFill/>
+        </p:spPr>
+        <p:txBody>
+          <a:bodyPr wrap="square" lIns="0" rIns="0" tIns="0" bIns="0" anchor="t">
+            <a:spAutoFit/>
+          </a:bodyPr>
+          <a:lstStyle/>
+          <a:p>
+            <a:pPr algn="l">
+              <a:lnSpc>
+                <a:spcPct val="108000"/>
+              </a:lnSpc>
+              <a:spcBef>
+                <a:spcPts val="0"/>
+              </a:spcBef>
+              <a:spcAft>
+                <a:spcPts val="0"/>
+              </a:spcAft>
+            </a:pPr>
+            <a:r>
+              <a:rPr sz="1900" b="1" lang="pl-PL">
+                <a:solidFill>
+                  <a:srgbClr val="192F3C"/>
+                </a:solidFill>
+                <a:latin typeface="DejaVu Sans"/>
+              </a:rPr>
+              <a:t>Plan dzień po dniu</a:t>
+            </a:r>
+          </a:p>
+        </p:txBody>
+      </p:sp>
+      <p:sp>
+        <p:nvSpPr>
+          <p:cNvPr id="20" name="TextBox 19"/>
+          <p:cNvSpPr txBox="1"/>
+          <p:nvPr/>
+        </p:nvSpPr>
+        <p:spPr>
+          <a:xfrm>
+            <a:off x="10351008" y="4434840"/>
+            <a:ext cx="4041648" cy="576072"/>
+          </a:xfrm>
+          <a:prstGeom prst="rect">
+            <a:avLst/>
+          </a:prstGeom>
+          <a:noFill/>
+        </p:spPr>
+        <p:txBody>
+          <a:bodyPr wrap="square" lIns="0" rIns="0" tIns="0" bIns="0" anchor="t">
+            <a:spAutoFit/>
+          </a:bodyPr>
+          <a:lstStyle/>
+          <a:p>
+            <a:pPr algn="l">
+              <a:lnSpc>
+                <a:spcPct val="108000"/>
+              </a:lnSpc>
+              <a:spcBef>
+                <a:spcPts val="0"/>
+              </a:spcBef>
+              <a:spcAft>
+                <a:spcPts val="0"/>
+              </a:spcAft>
+            </a:pPr>
+            <a:r>
+              <a:rPr sz="1750" b="0" lang="pl-PL">
+                <a:solidFill>
+                  <a:srgbClr val="192F3C"/>
+                </a:solidFill>
+                <a:latin typeface="DejaVu Sans"/>
+              </a:rPr>
+              <a:t>Bangkok → Chiang Mai → wyspy,</a:t>
+            </a:r>
+          </a:p>
+          <a:p>
+            <a:pPr algn="l">
+              <a:lnSpc>
+                <a:spcPct val="108000"/>
+              </a:lnSpc>
+              <a:spcBef>
+                <a:spcPts val="0"/>
+              </a:spcBef>
+              <a:spcAft>
+                <a:spcPts val="0"/>
+              </a:spcAft>
+            </a:pPr>
+            <a:r>
+              <a:rPr sz="1750" b="0" lang="pl-PL">
+                <a:solidFill>
+                  <a:srgbClr val="192F3C"/>
+                </a:solidFill>
+                <a:latin typeface="DejaVu Sans"/>
+              </a:rPr>
+              <a:t>z podziałem na dni</a:t>
+            </a:r>
+          </a:p>
+        </p:txBody>
+      </p:sp>
+      <p:sp>
+        <p:nvSpPr>
+          <p:cNvPr id="21" name="TextBox 20"/>
+          <p:cNvSpPr txBox="1"/>
+          <p:nvPr/>
+        </p:nvSpPr>
+        <p:spPr>
+          <a:xfrm>
+            <a:off x="612648" y="5431536"/>
+            <a:ext cx="13898880" cy="292608"/>
+          </a:xfrm>
+          <a:prstGeom prst="rect">
+            <a:avLst/>
+          </a:prstGeom>
+          <a:noFill/>
+        </p:spPr>
+        <p:txBody>
+          <a:bodyPr wrap="square" lIns="0" rIns="0" tIns="0" bIns="0" anchor="t">
+            <a:spAutoFit/>
+          </a:bodyPr>
+          <a:lstStyle/>
+          <a:p>
+            <a:pPr algn="l">
+              <a:lnSpc>
+                <a:spcPct val="108000"/>
+              </a:lnSpc>
+              <a:spcBef>
+                <a:spcPts val="0"/>
+              </a:spcBef>
+              <a:spcAft>
+                <a:spcPts val="0"/>
+              </a:spcAft>
+            </a:pPr>
+            <a:r>
+              <a:rPr sz="1400" b="0" lang="pl-PL">
+                <a:solidFill>
+                  <a:srgbClr val="536873"/>
+                </a:solidFill>
+                <a:latin typeface="DejaVu Sans"/>
+              </a:rPr>
+              <a:t>Przykłady poglądowe — poprawność sprawdzamy według wymagań i dowodów.</a:t>
+            </a:r>
+          </a:p>
+        </p:txBody>
+      </p:sp>
+      <p:sp>
+        <p:nvSpPr>
+          <p:cNvPr id="22" name="TextBox 21"/>
+          <p:cNvSpPr txBox="1"/>
+          <p:nvPr/>
+        </p:nvSpPr>
+        <p:spPr>
+          <a:xfrm>
+            <a:off x="612648" y="5952744"/>
+            <a:ext cx="13898880" cy="384048"/>
+          </a:xfrm>
+          <a:prstGeom prst="rect">
+            <a:avLst/>
+          </a:prstGeom>
+          <a:noFill/>
+        </p:spPr>
+        <p:txBody>
+          <a:bodyPr wrap="square" lIns="0" rIns="0" tIns="0" bIns="0" anchor="t">
+            <a:spAutoFit/>
+          </a:bodyPr>
+          <a:lstStyle/>
+          <a:p>
+            <a:pPr algn="l">
+              <a:lnSpc>
+                <a:spcPct val="108000"/>
+              </a:lnSpc>
+              <a:spcBef>
+                <a:spcPts val="0"/>
+              </a:spcBef>
+              <a:spcAft>
+                <a:spcPts val="0"/>
+              </a:spcAft>
+            </a:pPr>
+            <a:r>
+              <a:rPr sz="2300" b="1" lang="pl-PL">
+                <a:solidFill>
+                  <a:srgbClr val="006C86"/>
+                </a:solidFill>
+                <a:latin typeface="DejaVu Sans"/>
+              </a:rPr>
+              <a:t>Jak ograniczyć niepożądaną zmienność?</a:t>
+            </a:r>
+          </a:p>
+        </p:txBody>
+      </p:sp>
+      <p:sp>
+        <p:nvSpPr>
+          <p:cNvPr id="23" name="TextBox 22"/>
+          <p:cNvSpPr txBox="1"/>
+          <p:nvPr/>
+        </p:nvSpPr>
+        <p:spPr>
+          <a:xfrm>
+            <a:off x="612648" y="6574536"/>
+            <a:ext cx="3218688" cy="347472"/>
+          </a:xfrm>
+          <a:prstGeom prst="rect">
+            <a:avLst/>
+          </a:prstGeom>
+          <a:noFill/>
+        </p:spPr>
+        <p:txBody>
+          <a:bodyPr wrap="square" lIns="0" rIns="0" tIns="0" bIns="0" anchor="t">
+            <a:spAutoFit/>
+          </a:bodyPr>
+          <a:lstStyle/>
+          <a:p>
+            <a:pPr algn="l">
+              <a:lnSpc>
+                <a:spcPct val="108000"/>
+              </a:lnSpc>
+              <a:spcBef>
+                <a:spcPts val="0"/>
+              </a:spcBef>
+              <a:spcAft>
+                <a:spcPts val="0"/>
+              </a:spcAft>
+            </a:pPr>
+            <a:r>
+              <a:rPr sz="1739" b="1" lang="pl-PL">
+                <a:solidFill>
+                  <a:srgbClr val="006C86"/>
+                </a:solidFill>
+                <a:latin typeface="DejaVu Sans"/>
+              </a:rPr>
+              <a:t>Jedno zadanie na prompt</a:t>
+            </a:r>
+          </a:p>
+        </p:txBody>
+      </p:sp>
+      <p:sp>
+        <p:nvSpPr>
+          <p:cNvPr id="24" name="TextBox 23"/>
+          <p:cNvSpPr txBox="1"/>
+          <p:nvPr/>
+        </p:nvSpPr>
+        <p:spPr>
+          <a:xfrm>
+            <a:off x="612648" y="7059168"/>
+            <a:ext cx="3200400" cy="630936"/>
+          </a:xfrm>
+          <a:prstGeom prst="rect">
+            <a:avLst/>
+          </a:prstGeom>
+          <a:noFill/>
+        </p:spPr>
+        <p:txBody>
+          <a:bodyPr wrap="square" lIns="0" rIns="0" tIns="0" bIns="0" anchor="t">
+            <a:spAutoFit/>
+          </a:bodyPr>
+          <a:lstStyle/>
+          <a:p>
+            <a:pPr algn="l">
+              <a:lnSpc>
+                <a:spcPct val="108000"/>
+              </a:lnSpc>
+              <a:spcBef>
+                <a:spcPts val="0"/>
+              </a:spcBef>
+              <a:spcAft>
+                <a:spcPts val="0"/>
+              </a:spcAft>
+            </a:pPr>
+            <a:r>
+              <a:rPr sz="1620" b="0" lang="pl-PL">
+                <a:solidFill>
+                  <a:srgbClr val="192F3C"/>
+                </a:solidFill>
+                <a:latin typeface="DejaVu Sans"/>
+              </a:rPr>
+              <a:t>Dziel pracę na małe, jasno określone kroki.</a:t>
+            </a:r>
+          </a:p>
+        </p:txBody>
+      </p:sp>
+      <p:sp>
+        <p:nvSpPr>
+          <p:cNvPr id="25" name="TextBox 24"/>
+          <p:cNvSpPr txBox="1"/>
+          <p:nvPr/>
+        </p:nvSpPr>
+        <p:spPr>
+          <a:xfrm>
+            <a:off x="4187952" y="6574536"/>
+            <a:ext cx="3218688" cy="347472"/>
+          </a:xfrm>
+          <a:prstGeom prst="rect">
+            <a:avLst/>
+          </a:prstGeom>
+          <a:noFill/>
+        </p:spPr>
+        <p:txBody>
+          <a:bodyPr wrap="square" lIns="0" rIns="0" tIns="0" bIns="0" anchor="t">
+            <a:spAutoFit/>
+          </a:bodyPr>
+          <a:lstStyle/>
+          <a:p>
+            <a:pPr algn="l">
+              <a:lnSpc>
+                <a:spcPct val="108000"/>
+              </a:lnSpc>
+              <a:spcBef>
+                <a:spcPts val="0"/>
+              </a:spcBef>
+              <a:spcAft>
+                <a:spcPts val="0"/>
+              </a:spcAft>
+            </a:pPr>
+            <a:r>
+              <a:rPr sz="1739" b="1" lang="pl-PL">
+                <a:solidFill>
+                  <a:srgbClr val="006C86"/>
+                </a:solidFill>
+                <a:latin typeface="DejaVu Sans"/>
+              </a:rPr>
+              <a:t>Precyzyjne kryteria</a:t>
+            </a:r>
+          </a:p>
+        </p:txBody>
+      </p:sp>
+      <p:sp>
+        <p:nvSpPr>
+          <p:cNvPr id="26" name="TextBox 25"/>
+          <p:cNvSpPr txBox="1"/>
+          <p:nvPr/>
+        </p:nvSpPr>
+        <p:spPr>
+          <a:xfrm>
+            <a:off x="4187952" y="7059168"/>
+            <a:ext cx="3200400" cy="630936"/>
+          </a:xfrm>
+          <a:prstGeom prst="rect">
+            <a:avLst/>
+          </a:prstGeom>
+          <a:noFill/>
+        </p:spPr>
+        <p:txBody>
+          <a:bodyPr wrap="square" lIns="0" rIns="0" tIns="0" bIns="0" anchor="t">
+            <a:spAutoFit/>
+          </a:bodyPr>
+          <a:lstStyle/>
+          <a:p>
+            <a:pPr algn="l">
+              <a:lnSpc>
+                <a:spcPct val="108000"/>
+              </a:lnSpc>
+              <a:spcBef>
+                <a:spcPts val="0"/>
+              </a:spcBef>
+              <a:spcAft>
+                <a:spcPts val="0"/>
+              </a:spcAft>
+            </a:pPr>
+            <a:r>
+              <a:rPr sz="1620" b="0" lang="pl-PL">
+                <a:solidFill>
+                  <a:srgbClr val="192F3C"/>
+                </a:solidFill>
+                <a:latin typeface="DejaVu Sans"/>
+              </a:rPr>
+              <a:t>Określ źródła, format i warunki odbioru.</a:t>
+            </a:r>
+          </a:p>
+        </p:txBody>
+      </p:sp>
+      <p:sp>
+        <p:nvSpPr>
+          <p:cNvPr id="27" name="TextBox 26"/>
+          <p:cNvSpPr txBox="1"/>
+          <p:nvPr/>
+        </p:nvSpPr>
+        <p:spPr>
+          <a:xfrm>
+            <a:off x="7772400" y="6574536"/>
+            <a:ext cx="3218688" cy="347472"/>
+          </a:xfrm>
+          <a:prstGeom prst="rect">
+            <a:avLst/>
+          </a:prstGeom>
+          <a:noFill/>
+        </p:spPr>
+        <p:txBody>
+          <a:bodyPr wrap="square" lIns="0" rIns="0" tIns="0" bIns="0" anchor="t">
+            <a:spAutoFit/>
+          </a:bodyPr>
+          <a:lstStyle/>
+          <a:p>
+            <a:pPr algn="l">
+              <a:lnSpc>
+                <a:spcPct val="108000"/>
+              </a:lnSpc>
+              <a:spcBef>
+                <a:spcPts val="0"/>
+              </a:spcBef>
+              <a:spcAft>
+                <a:spcPts val="0"/>
+              </a:spcAft>
+            </a:pPr>
+            <a:r>
+              <a:rPr sz="1739" b="1" lang="pl-PL">
+                <a:solidFill>
+                  <a:srgbClr val="006C86"/>
+                </a:solidFill>
+                <a:latin typeface="DejaVu Sans"/>
+              </a:rPr>
+              <a:t>Kod do stałych reguł</a:t>
+            </a:r>
+          </a:p>
+        </p:txBody>
+      </p:sp>
+      <p:sp>
+        <p:nvSpPr>
+          <p:cNvPr id="28" name="TextBox 27"/>
+          <p:cNvSpPr txBox="1"/>
+          <p:nvPr/>
+        </p:nvSpPr>
+        <p:spPr>
+          <a:xfrm>
+            <a:off x="7772400" y="7059168"/>
+            <a:ext cx="3200400" cy="630936"/>
+          </a:xfrm>
+          <a:prstGeom prst="rect">
+            <a:avLst/>
+          </a:prstGeom>
+          <a:noFill/>
+        </p:spPr>
+        <p:txBody>
+          <a:bodyPr wrap="square" lIns="0" rIns="0" tIns="0" bIns="0" anchor="t">
+            <a:spAutoFit/>
+          </a:bodyPr>
+          <a:lstStyle/>
+          <a:p>
+            <a:pPr algn="l">
+              <a:lnSpc>
+                <a:spcPct val="108000"/>
+              </a:lnSpc>
+              <a:spcBef>
+                <a:spcPts val="0"/>
+              </a:spcBef>
+              <a:spcAft>
+                <a:spcPts val="0"/>
+              </a:spcAft>
+            </a:pPr>
+            <a:r>
+              <a:rPr sz="1620" b="0" lang="pl-PL">
+                <a:solidFill>
+                  <a:srgbClr val="192F3C"/>
+                </a:solidFill>
+                <a:latin typeface="DejaVu Sans"/>
+              </a:rPr>
+              <a:t>Obliczenia i kontrole przenieś do kodu.</a:t>
+            </a:r>
+          </a:p>
+        </p:txBody>
+      </p:sp>
+      <p:sp>
+        <p:nvSpPr>
+          <p:cNvPr id="29" name="TextBox 28"/>
+          <p:cNvSpPr txBox="1"/>
+          <p:nvPr/>
+        </p:nvSpPr>
+        <p:spPr>
+          <a:xfrm>
+            <a:off x="11356848" y="6574536"/>
+            <a:ext cx="3218688" cy="347472"/>
+          </a:xfrm>
+          <a:prstGeom prst="rect">
+            <a:avLst/>
+          </a:prstGeom>
+          <a:noFill/>
+        </p:spPr>
+        <p:txBody>
+          <a:bodyPr wrap="square" lIns="0" rIns="0" tIns="0" bIns="0" anchor="t">
+            <a:spAutoFit/>
+          </a:bodyPr>
+          <a:lstStyle/>
+          <a:p>
+            <a:pPr algn="l">
+              <a:lnSpc>
+                <a:spcPct val="108000"/>
+              </a:lnSpc>
+              <a:spcBef>
+                <a:spcPts val="0"/>
+              </a:spcBef>
+              <a:spcAft>
+                <a:spcPts val="0"/>
+              </a:spcAft>
+            </a:pPr>
+            <a:r>
+              <a:rPr sz="1739" b="1" lang="pl-PL">
+                <a:solidFill>
+                  <a:srgbClr val="006C86"/>
+                </a:solidFill>
+                <a:latin typeface="DejaVu Sans"/>
+              </a:rPr>
+              <a:t>Powtórz i porównaj</a:t>
+            </a:r>
+          </a:p>
+        </p:txBody>
+      </p:sp>
+      <p:sp>
+        <p:nvSpPr>
+          <p:cNvPr id="30" name="TextBox 29"/>
+          <p:cNvSpPr txBox="1"/>
+          <p:nvPr/>
+        </p:nvSpPr>
+        <p:spPr>
+          <a:xfrm>
+            <a:off x="11356848" y="7059168"/>
+            <a:ext cx="3200400" cy="630936"/>
+          </a:xfrm>
+          <a:prstGeom prst="rect">
+            <a:avLst/>
+          </a:prstGeom>
+          <a:noFill/>
+        </p:spPr>
+        <p:txBody>
+          <a:bodyPr wrap="square" lIns="0" rIns="0" tIns="0" bIns="0" anchor="t">
+            <a:spAutoFit/>
+          </a:bodyPr>
+          <a:lstStyle/>
+          <a:p>
+            <a:pPr algn="l">
+              <a:lnSpc>
+                <a:spcPct val="108000"/>
+              </a:lnSpc>
+              <a:spcBef>
+                <a:spcPts val="0"/>
+              </a:spcBef>
+              <a:spcAft>
+                <a:spcPts val="0"/>
+              </a:spcAft>
+            </a:pPr>
+            <a:r>
+              <a:rPr sz="1620" b="0" lang="pl-PL">
+                <a:solidFill>
+                  <a:srgbClr val="192F3C"/>
+                </a:solidFill>
+                <a:latin typeface="DejaVu Sans"/>
+              </a:rPr>
+              <a:t>Sprawdź istotne różnice w źródłach.</a:t>
+            </a:r>
+          </a:p>
+        </p:txBody>
+      </p:sp>
+    </p:spTree>
+  </p:cSld>
+  <p:clrMapOvr>
+    <a:masterClrMapping/>
+  </p:clrMapOvr>
+</p:sld>
+</file>
+
+<file path=ppt/slides/slide5.xml><?xml version="1.0" encoding="utf-8"?>
+<p:sld xmlns:a="http://schemas.openxmlformats.org/drawingml/2006/main" xmlns:p="http://schemas.openxmlformats.org/presentationml/2006/main" xmlns:r="http://schemas.openxmlformats.org/officeDocument/2006/relationships">
+  <p:cSld>
+    <p:bg>
+      <p:bgPr>
+        <a:solidFill>
+          <a:srgbClr val="FFFFFF"/>
+        </a:solidFill>
+        <a:effectLst/>
+      </p:bgPr>
+    </p:bg>
+    <p:spTree>
+      <p:nvGrpSpPr>
+        <p:cNvPr id="1" name=""/>
+        <p:cNvGrpSpPr/>
+        <p:nvPr/>
+      </p:nvGrpSpPr>
+      <p:grpSpPr/>
+      <p:sp>
+        <p:nvSpPr>
+          <p:cNvPr id="2" name="TextBox 1"/>
+          <p:cNvSpPr txBox="1"/>
+          <p:nvPr/>
+        </p:nvSpPr>
+        <p:spPr>
+          <a:xfrm>
+            <a:off x="548640" y="2944368"/>
+            <a:ext cx="14145768" cy="2286000"/>
+          </a:xfrm>
+          <a:prstGeom prst="rect">
+            <a:avLst/>
+          </a:prstGeom>
+          <a:noFill/>
+        </p:spPr>
+        <p:txBody>
+          <a:bodyPr wrap="square" lIns="0" rIns="0" tIns="0" bIns="0" anchor="ctr">
+            <a:spAutoFit/>
+          </a:bodyPr>
+          <a:lstStyle/>
+          <a:p>
+            <a:pPr algn="ctr">
+              <a:lnSpc>
+                <a:spcPct val="108000"/>
+              </a:lnSpc>
+              <a:spcBef>
+                <a:spcPts val="0"/>
+              </a:spcBef>
+              <a:spcAft>
+                <a:spcPts val="0"/>
+              </a:spcAft>
+            </a:pPr>
+            <a:r>
+              <a:rPr sz="14500" b="1" lang="pl-PL">
+                <a:solidFill>
+                  <a:srgbClr val="FF000F"/>
+                </a:solidFill>
+                <a:latin typeface="DejaVu Sans"/>
+              </a:rPr>
+              <a:t>Amnezja</a:t>
+            </a:r>
+          </a:p>
+        </p:txBody>
+      </p:sp>
+    </p:spTree>
+  </p:cSld>
+  <p:clrMapOvr>
+    <a:masterClrMapping/>
+  </p:clrMapOvr>
+</p:sld>
+</file>
+
+<file path=ppt/slides/slide6.xml><?xml version="1.0" encoding="utf-8"?>
+<p:sld xmlns:a="http://schemas.openxmlformats.org/drawingml/2006/main" xmlns:p="http://schemas.openxmlformats.org/presentationml/2006/main" xmlns:r="http://schemas.openxmlformats.org/officeDocument/2006/relationships">
+  <p:cSld>
+    <p:bg>
+      <p:bgPr>
+        <a:solidFill>
+          <a:srgbClr val="FFFFFF"/>
+        </a:solidFill>
+        <a:effectLst/>
+      </p:bgPr>
+    </p:bg>
+    <p:spTree>
+      <p:nvGrpSpPr>
+        <p:cNvPr id="1" name=""/>
+        <p:cNvGrpSpPr/>
+        <p:nvPr/>
+      </p:nvGrpSpPr>
+      <p:grpSpPr/>
+      <p:sp>
+        <p:nvSpPr>
+          <p:cNvPr id="2" name="TextBox 1"/>
+          <p:cNvSpPr txBox="1"/>
+          <p:nvPr/>
+        </p:nvSpPr>
+        <p:spPr>
+          <a:xfrm>
+            <a:off x="612648" y="320040"/>
+            <a:ext cx="12856464" cy="265176"/>
+          </a:xfrm>
+          <a:prstGeom prst="rect">
+            <a:avLst/>
+          </a:prstGeom>
+          <a:noFill/>
+        </p:spPr>
+        <p:txBody>
+          <a:bodyPr wrap="square" lIns="0" rIns="0" tIns="0" bIns="0" anchor="t">
+            <a:spAutoFit/>
+          </a:bodyPr>
+          <a:lstStyle/>
+          <a:p>
+            <a:pPr algn="l">
+              <a:lnSpc>
+                <a:spcPct val="108000"/>
+              </a:lnSpc>
+              <a:spcBef>
+                <a:spcPts val="0"/>
+              </a:spcBef>
+              <a:spcAft>
+                <a:spcPts val="0"/>
+              </a:spcAft>
+            </a:pPr>
+            <a:r>
+              <a:rPr sz="1350" b="0" lang="pl-PL">
+                <a:solidFill>
+                  <a:srgbClr val="536873"/>
+                </a:solidFill>
+                <a:latin typeface="DejaVu Sans"/>
+              </a:rPr>
+              <a:t>Szkolenie inżynierskie ABB / Pokaż — uogólnij — zautomatyzuj</a:t>
+            </a:r>
+          </a:p>
+        </p:txBody>
+      </p:sp>
+      <p:sp>
+        <p:nvSpPr>
+          <p:cNvPr id="3" name="TextBox 2"/>
+          <p:cNvSpPr txBox="1"/>
+          <p:nvPr/>
+        </p:nvSpPr>
+        <p:spPr>
+          <a:xfrm>
+            <a:off x="612648" y="841248"/>
+            <a:ext cx="14017752" cy="676656"/>
+          </a:xfrm>
+          <a:prstGeom prst="rect">
+            <a:avLst/>
+          </a:prstGeom>
+          <a:noFill/>
+        </p:spPr>
+        <p:txBody>
+          <a:bodyPr wrap="square" lIns="0" rIns="0" tIns="0" bIns="0" anchor="t">
+            <a:spAutoFit/>
+          </a:bodyPr>
+          <a:lstStyle/>
+          <a:p>
+            <a:pPr algn="l">
+              <a:lnSpc>
+                <a:spcPct val="108000"/>
+              </a:lnSpc>
+              <a:spcBef>
+                <a:spcPts val="0"/>
+              </a:spcBef>
+              <a:spcAft>
+                <a:spcPts val="0"/>
+              </a:spcAft>
+            </a:pPr>
+            <a:r>
+              <a:rPr sz="3450" b="1" lang="pl-PL">
+                <a:solidFill>
+                  <a:srgbClr val="192F3C"/>
+                </a:solidFill>
+                <a:latin typeface="DejaVu Sans"/>
+              </a:rPr>
+              <a:t>Bezstanowość: historia w każdym wywołaniu</a:t>
+            </a:r>
+          </a:p>
+        </p:txBody>
+      </p:sp>
+      <p:cxnSp>
+        <p:nvCxnSpPr>
+          <p:cNvPr id="4" name="Connector 3"/>
+          <p:cNvCxnSpPr/>
+          <p:nvPr/>
+        </p:nvCxnSpPr>
+        <p:spPr>
+          <a:xfrm>
+            <a:off x="612648" y="1673352"/>
+            <a:ext cx="14017752" cy="0"/>
+          </a:xfrm>
+          <a:prstGeom prst="line">
+            <a:avLst/>
+          </a:prstGeom>
+          <a:ln w="19050">
+            <a:solidFill>
+              <a:srgbClr val="006C86"/>
+            </a:solidFill>
+          </a:ln>
+        </p:spPr>
+        <p:style>
+          <a:lnRef idx="2">
+            <a:schemeClr val="accent1"/>
+          </a:lnRef>
+          <a:fillRef idx="0">
+            <a:schemeClr val="accent1"/>
+          </a:fillRef>
+          <a:effectRef idx="1">
+            <a:schemeClr val="accent1"/>
+          </a:effectRef>
+          <a:fontRef idx="minor">
+            <a:schemeClr val="tx1"/>
+          </a:fontRef>
+        </p:style>
+      </p:cxnSp>
+      <p:sp>
+        <p:nvSpPr>
+          <p:cNvPr id="5" name="TextBox 4"/>
+          <p:cNvSpPr txBox="1"/>
+          <p:nvPr/>
+        </p:nvSpPr>
+        <p:spPr>
+          <a:xfrm>
+            <a:off x="14282928" y="8074152"/>
+            <a:ext cx="347472" cy="265176"/>
+          </a:xfrm>
+          <a:prstGeom prst="rect">
+            <a:avLst/>
+          </a:prstGeom>
+          <a:noFill/>
+        </p:spPr>
+        <p:txBody>
+          <a:bodyPr wrap="square" lIns="0" rIns="0" tIns="0" bIns="0" anchor="t">
+            <a:spAutoFit/>
+          </a:bodyPr>
+          <a:lstStyle/>
+          <a:p>
+            <a:pPr algn="r">
+              <a:lnSpc>
+                <a:spcPct val="108000"/>
+              </a:lnSpc>
+              <a:spcBef>
+                <a:spcPts val="0"/>
+              </a:spcBef>
+              <a:spcAft>
+                <a:spcPts val="0"/>
+              </a:spcAft>
+            </a:pPr>
+            <a:r>
+              <a:rPr sz="1350" b="0" lang="pl-PL">
+                <a:solidFill>
+                  <a:srgbClr val="536873"/>
+                </a:solidFill>
+                <a:latin typeface="DejaVu Sans"/>
+              </a:rPr>
+              <a:t>4</a:t>
+            </a:r>
+          </a:p>
+        </p:txBody>
+      </p:sp>
+      <p:sp>
+        <p:nvSpPr>
+          <p:cNvPr id="6" name="TextBox 5"/>
+          <p:cNvSpPr txBox="1"/>
+          <p:nvPr/>
+        </p:nvSpPr>
+        <p:spPr>
+          <a:xfrm>
+            <a:off x="612648" y="1901952"/>
+            <a:ext cx="13944600" cy="576072"/>
+          </a:xfrm>
+          <a:prstGeom prst="rect">
+            <a:avLst/>
+          </a:prstGeom>
+          <a:noFill/>
+        </p:spPr>
+        <p:txBody>
+          <a:bodyPr wrap="square" lIns="0" rIns="0" tIns="0" bIns="0" anchor="t">
+            <a:spAutoFit/>
+          </a:bodyPr>
+          <a:lstStyle/>
+          <a:p>
+            <a:pPr algn="l">
+              <a:lnSpc>
+                <a:spcPct val="108000"/>
+              </a:lnSpc>
+              <a:spcBef>
+                <a:spcPts val="0"/>
+              </a:spcBef>
+              <a:spcAft>
+                <a:spcPts val="0"/>
+              </a:spcAft>
+            </a:pPr>
+            <a:r>
+              <a:rPr sz="2025" b="0" lang="pl-PL">
+                <a:solidFill>
+                  <a:srgbClr val="192F3C"/>
+                </a:solidFill>
+                <a:latin typeface="DejaVu Sans"/>
+              </a:rPr>
+              <a:t>Model nie zachowuje rozmowy między wywołaniami. Kontekst dostarcza aplikacja.</a:t>
+            </a:r>
+          </a:p>
+        </p:txBody>
+      </p:sp>
+      <p:sp>
+        <p:nvSpPr>
+          <p:cNvPr id="7" name="TextBox 6"/>
+          <p:cNvSpPr txBox="1"/>
+          <p:nvPr/>
+        </p:nvSpPr>
+        <p:spPr>
+          <a:xfrm>
+            <a:off x="612648" y="2999232"/>
+            <a:ext cx="1691640" cy="393192"/>
+          </a:xfrm>
+          <a:prstGeom prst="rect">
+            <a:avLst/>
+          </a:prstGeom>
+          <a:noFill/>
+        </p:spPr>
+        <p:txBody>
+          <a:bodyPr wrap="square" lIns="0" rIns="0" tIns="0" bIns="0" anchor="t">
+            <a:spAutoFit/>
+          </a:bodyPr>
+          <a:lstStyle/>
+          <a:p>
+            <a:pPr algn="l">
+              <a:lnSpc>
+                <a:spcPct val="108000"/>
+              </a:lnSpc>
+              <a:spcBef>
+                <a:spcPts val="0"/>
+              </a:spcBef>
+              <a:spcAft>
+                <a:spcPts val="0"/>
+              </a:spcAft>
+            </a:pPr>
+            <a:r>
+              <a:rPr sz="1800" b="1" lang="pl-PL">
+                <a:solidFill>
+                  <a:srgbClr val="192F3C"/>
+                </a:solidFill>
+                <a:latin typeface="DejaVu Sans"/>
+              </a:rPr>
+              <a:t>Wywołanie 1</a:t>
+            </a:r>
+          </a:p>
+        </p:txBody>
+      </p:sp>
+      <p:sp>
+        <p:nvSpPr>
+          <p:cNvPr id="8" name="Rectangle 7"/>
+          <p:cNvSpPr/>
+          <p:nvPr/>
+        </p:nvSpPr>
+        <p:spPr>
+          <a:xfrm>
+            <a:off x="9966960" y="2907792"/>
+            <a:ext cx="1444752" cy="585216"/>
+          </a:xfrm>
+          <a:prstGeom prst="rect">
+            <a:avLst/>
+          </a:prstGeom>
+          <a:solidFill>
+            <a:srgbClr val="DFF0F4"/>
+          </a:solidFill>
+          <a:ln>
+            <a:noFill/>
+          </a:ln>
+        </p:spPr>
+        <p:style>
+          <a:lnRef idx="1">
+            <a:schemeClr val="accent1"/>
+          </a:lnRef>
+          <a:fillRef idx="3">
+            <a:schemeClr val="accent1"/>
+          </a:fillRef>
+          <a:effectRef idx="2">
+            <a:schemeClr val="accent1"/>
+          </a:effectRef>
+          <a:fontRef idx="minor">
+            <a:schemeClr val="lt1"/>
+          </a:fontRef>
+        </p:style>
+        <p:txBody>
+          <a:bodyPr rtlCol="0" anchor="ctr"/>
+          <a:lstStyle/>
+          <a:p>
+            <a:pPr algn="ctr"/>
+          </a:p>
+        </p:txBody>
+      </p:sp>
+      <p:sp>
+        <p:nvSpPr>
+          <p:cNvPr id="9" name="TextBox 8"/>
+          <p:cNvSpPr txBox="1"/>
+          <p:nvPr/>
+        </p:nvSpPr>
+        <p:spPr>
+          <a:xfrm>
+            <a:off x="10003536" y="2930652"/>
+            <a:ext cx="1371600" cy="539496"/>
+          </a:xfrm>
+          <a:prstGeom prst="rect">
+            <a:avLst/>
+          </a:prstGeom>
+          <a:noFill/>
+        </p:spPr>
+        <p:txBody>
+          <a:bodyPr wrap="square" lIns="0" rIns="0" tIns="0" bIns="0" anchor="ctr">
+            <a:spAutoFit/>
+          </a:bodyPr>
+          <a:lstStyle/>
+          <a:p>
+            <a:pPr algn="ctr">
+              <a:lnSpc>
+                <a:spcPct val="108000"/>
+              </a:lnSpc>
+              <a:spcBef>
+                <a:spcPts val="0"/>
+              </a:spcBef>
+              <a:spcAft>
+                <a:spcPts val="0"/>
+              </a:spcAft>
+            </a:pPr>
+            <a:r>
+              <a:rPr sz="1570" b="1" lang="pl-PL">
+                <a:solidFill>
+                  <a:srgbClr val="192F3C"/>
+                </a:solidFill>
+                <a:latin typeface="DejaVu Sans"/>
+              </a:rPr>
+              <a:t>Prompt 1</a:t>
+            </a:r>
+          </a:p>
+        </p:txBody>
+      </p:sp>
+      <p:cxnSp>
+        <p:nvCxnSpPr>
+          <p:cNvPr id="10" name="Connector 9"/>
+          <p:cNvCxnSpPr/>
+          <p:nvPr/>
+        </p:nvCxnSpPr>
+        <p:spPr>
+          <a:xfrm>
+            <a:off x="11494008" y="3200400"/>
+            <a:ext cx="329184" cy="0"/>
+          </a:xfrm>
+          <a:prstGeom prst="line">
+            <a:avLst/>
+          </a:prstGeom>
+          <a:ln w="22860">
+            <a:solidFill>
+              <a:srgbClr val="006C86"/>
+            </a:solidFill>
+            <a:tailEnd type="triangle"/>
+          </a:ln>
+        </p:spPr>
+        <p:style>
+          <a:lnRef idx="2">
+            <a:schemeClr val="accent1"/>
+          </a:lnRef>
+          <a:fillRef idx="0">
+            <a:schemeClr val="accent1"/>
+          </a:fillRef>
+          <a:effectRef idx="1">
+            <a:schemeClr val="accent1"/>
+          </a:effectRef>
+          <a:fontRef idx="minor">
+            <a:schemeClr val="tx1"/>
+          </a:fontRef>
+        </p:style>
+      </p:cxnSp>
+      <p:sp>
+        <p:nvSpPr>
+          <p:cNvPr id="11" name="Rectangle 10"/>
+          <p:cNvSpPr/>
+          <p:nvPr/>
+        </p:nvSpPr>
+        <p:spPr>
+          <a:xfrm>
+            <a:off x="11905488" y="2907792"/>
+            <a:ext cx="1188720" cy="585216"/>
+          </a:xfrm>
+          <a:prstGeom prst="rect">
+            <a:avLst/>
+          </a:prstGeom>
+          <a:solidFill>
+            <a:srgbClr val="FFFFFF"/>
+          </a:solidFill>
+          <a:ln w="12700">
+            <a:solidFill>
+              <a:srgbClr val="006C86"/>
+            </a:solidFill>
+          </a:ln>
+        </p:spPr>
+        <p:style>
+          <a:lnRef idx="1">
+            <a:schemeClr val="accent1"/>
+          </a:lnRef>
+          <a:fillRef idx="3">
+            <a:schemeClr val="accent1"/>
+          </a:fillRef>
+          <a:effectRef idx="2">
+            <a:schemeClr val="accent1"/>
+          </a:effectRef>
+          <a:fontRef idx="minor">
+            <a:schemeClr val="lt1"/>
+          </a:fontRef>
+        </p:style>
+        <p:txBody>
+          <a:bodyPr rtlCol="0" anchor="ctr"/>
+          <a:lstStyle/>
+          <a:p>
+            <a:pPr algn="ctr"/>
+          </a:p>
+        </p:txBody>
+      </p:sp>
+      <p:sp>
+        <p:nvSpPr>
+          <p:cNvPr id="12" name="TextBox 11"/>
+          <p:cNvSpPr txBox="1"/>
+          <p:nvPr/>
+        </p:nvSpPr>
+        <p:spPr>
+          <a:xfrm>
+            <a:off x="11942063" y="2930652"/>
+            <a:ext cx="1115568" cy="539496"/>
+          </a:xfrm>
+          <a:prstGeom prst="rect">
+            <a:avLst/>
+          </a:prstGeom>
+          <a:noFill/>
+        </p:spPr>
+        <p:txBody>
+          <a:bodyPr wrap="square" lIns="0" rIns="0" tIns="0" bIns="0" anchor="ctr">
+            <a:spAutoFit/>
+          </a:bodyPr>
+          <a:lstStyle/>
+          <a:p>
+            <a:pPr algn="ctr">
+              <a:lnSpc>
+                <a:spcPct val="108000"/>
+              </a:lnSpc>
+              <a:spcBef>
+                <a:spcPts val="0"/>
+              </a:spcBef>
+              <a:spcAft>
+                <a:spcPts val="0"/>
+              </a:spcAft>
+            </a:pPr>
+            <a:r>
+              <a:rPr sz="1670" b="1" lang="pl-PL">
+                <a:solidFill>
+                  <a:srgbClr val="192F3C"/>
+                </a:solidFill>
+                <a:latin typeface="DejaVu Sans"/>
+              </a:rPr>
+              <a:t>Model</a:t>
+            </a:r>
+          </a:p>
+        </p:txBody>
+      </p:sp>
+      <p:cxnSp>
+        <p:nvCxnSpPr>
+          <p:cNvPr id="13" name="Connector 12"/>
+          <p:cNvCxnSpPr/>
+          <p:nvPr/>
+        </p:nvCxnSpPr>
+        <p:spPr>
+          <a:xfrm>
+            <a:off x="13167360" y="3200400"/>
+            <a:ext cx="310896" cy="0"/>
+          </a:xfrm>
+          <a:prstGeom prst="line">
+            <a:avLst/>
+          </a:prstGeom>
+          <a:ln w="22860">
+            <a:solidFill>
+              <a:srgbClr val="006C86"/>
+            </a:solidFill>
+            <a:tailEnd type="triangle"/>
+          </a:ln>
+        </p:spPr>
+        <p:style>
+          <a:lnRef idx="2">
+            <a:schemeClr val="accent1"/>
+          </a:lnRef>
+          <a:fillRef idx="0">
+            <a:schemeClr val="accent1"/>
+          </a:fillRef>
+          <a:effectRef idx="1">
+            <a:schemeClr val="accent1"/>
+          </a:effectRef>
+          <a:fontRef idx="minor">
+            <a:schemeClr val="tx1"/>
+          </a:fontRef>
+        </p:style>
+      </p:cxnSp>
+      <p:sp>
+        <p:nvSpPr>
+          <p:cNvPr id="14" name="Rectangle 13"/>
+          <p:cNvSpPr/>
+          <p:nvPr/>
+        </p:nvSpPr>
+        <p:spPr>
+          <a:xfrm>
+            <a:off x="13551408" y="2907792"/>
+            <a:ext cx="1078992" cy="585216"/>
+          </a:xfrm>
+          <a:prstGeom prst="rect">
+            <a:avLst/>
+          </a:prstGeom>
+          <a:solidFill>
+            <a:srgbClr val="ECE7F5"/>
+          </a:solidFill>
+          <a:ln>
+            <a:noFill/>
+          </a:ln>
+        </p:spPr>
+        <p:style>
+          <a:lnRef idx="1">
+            <a:schemeClr val="accent1"/>
+          </a:lnRef>
+          <a:fillRef idx="3">
+            <a:schemeClr val="accent1"/>
+          </a:fillRef>
+          <a:effectRef idx="2">
+            <a:schemeClr val="accent1"/>
+          </a:effectRef>
+          <a:fontRef idx="minor">
+            <a:schemeClr val="lt1"/>
+          </a:fontRef>
+        </p:style>
+        <p:txBody>
+          <a:bodyPr rtlCol="0" anchor="ctr"/>
+          <a:lstStyle/>
+          <a:p>
+            <a:pPr algn="ctr"/>
+          </a:p>
+        </p:txBody>
+      </p:sp>
+      <p:sp>
+        <p:nvSpPr>
+          <p:cNvPr id="15" name="TextBox 14"/>
+          <p:cNvSpPr txBox="1"/>
+          <p:nvPr/>
+        </p:nvSpPr>
+        <p:spPr>
+          <a:xfrm>
+            <a:off x="13587984" y="2930652"/>
+            <a:ext cx="1005839" cy="539496"/>
+          </a:xfrm>
+          <a:prstGeom prst="rect">
+            <a:avLst/>
+          </a:prstGeom>
+          <a:noFill/>
+        </p:spPr>
+        <p:txBody>
+          <a:bodyPr wrap="square" lIns="0" rIns="0" tIns="0" bIns="0" anchor="ctr">
+            <a:spAutoFit/>
+          </a:bodyPr>
+          <a:lstStyle/>
+          <a:p>
+            <a:pPr algn="ctr">
+              <a:lnSpc>
+                <a:spcPct val="108000"/>
+              </a:lnSpc>
+              <a:spcBef>
+                <a:spcPts val="0"/>
+              </a:spcBef>
+              <a:spcAft>
+                <a:spcPts val="0"/>
+              </a:spcAft>
+            </a:pPr>
+            <a:r>
+              <a:rPr sz="1570" b="0" lang="pl-PL">
+                <a:solidFill>
+                  <a:srgbClr val="192F3C"/>
+                </a:solidFill>
+                <a:latin typeface="DejaVu Sans"/>
+              </a:rPr>
+              <a:t>Odp. 1</a:t>
+            </a:r>
+          </a:p>
+        </p:txBody>
+      </p:sp>
+      <p:sp>
+        <p:nvSpPr>
+          <p:cNvPr id="16" name="TextBox 15"/>
+          <p:cNvSpPr txBox="1"/>
+          <p:nvPr/>
+        </p:nvSpPr>
+        <p:spPr>
+          <a:xfrm>
+            <a:off x="612648" y="4480559"/>
+            <a:ext cx="1691640" cy="393192"/>
+          </a:xfrm>
+          <a:prstGeom prst="rect">
+            <a:avLst/>
+          </a:prstGeom>
+          <a:noFill/>
+        </p:spPr>
+        <p:txBody>
+          <a:bodyPr wrap="square" lIns="0" rIns="0" tIns="0" bIns="0" anchor="t">
+            <a:spAutoFit/>
+          </a:bodyPr>
+          <a:lstStyle/>
+          <a:p>
+            <a:pPr algn="l">
+              <a:lnSpc>
+                <a:spcPct val="108000"/>
+              </a:lnSpc>
+              <a:spcBef>
+                <a:spcPts val="0"/>
+              </a:spcBef>
+              <a:spcAft>
+                <a:spcPts val="0"/>
+              </a:spcAft>
+            </a:pPr>
+            <a:r>
+              <a:rPr sz="1800" b="1" lang="pl-PL">
+                <a:solidFill>
+                  <a:srgbClr val="192F3C"/>
+                </a:solidFill>
+                <a:latin typeface="DejaVu Sans"/>
+              </a:rPr>
+              <a:t>Wywołanie 2</a:t>
+            </a:r>
+          </a:p>
+        </p:txBody>
+      </p:sp>
+      <p:sp>
+        <p:nvSpPr>
+          <p:cNvPr id="17" name="Rectangle 16"/>
+          <p:cNvSpPr/>
+          <p:nvPr/>
+        </p:nvSpPr>
+        <p:spPr>
+          <a:xfrm>
+            <a:off x="5925312" y="4325112"/>
+            <a:ext cx="3767328" cy="713232"/>
+          </a:xfrm>
+          <a:prstGeom prst="rect">
+            <a:avLst/>
+          </a:prstGeom>
+          <a:solidFill>
+            <a:srgbClr val="ECE7F5"/>
+          </a:solidFill>
+          <a:ln>
+            <a:noFill/>
+          </a:ln>
+        </p:spPr>
+        <p:style>
+          <a:lnRef idx="1">
+            <a:schemeClr val="accent1"/>
+          </a:lnRef>
+          <a:fillRef idx="3">
+            <a:schemeClr val="accent1"/>
+          </a:fillRef>
+          <a:effectRef idx="2">
+            <a:schemeClr val="accent1"/>
+          </a:effectRef>
+          <a:fontRef idx="minor">
+            <a:schemeClr val="lt1"/>
+          </a:fontRef>
+        </p:style>
+        <p:txBody>
+          <a:bodyPr rtlCol="0" anchor="ctr"/>
+          <a:lstStyle/>
+          <a:p>
+            <a:pPr algn="ctr"/>
+          </a:p>
+        </p:txBody>
+      </p:sp>
+      <p:sp>
+        <p:nvSpPr>
+          <p:cNvPr id="18" name="Rectangle 17"/>
+          <p:cNvSpPr/>
+          <p:nvPr/>
+        </p:nvSpPr>
+        <p:spPr>
+          <a:xfrm>
+            <a:off x="5998464" y="4389120"/>
+            <a:ext cx="1600200" cy="585216"/>
+          </a:xfrm>
+          <a:prstGeom prst="rect">
+            <a:avLst/>
+          </a:prstGeom>
+          <a:solidFill>
+            <a:srgbClr val="DFF0F4"/>
+          </a:solidFill>
+          <a:ln>
+            <a:noFill/>
+          </a:ln>
+        </p:spPr>
+        <p:style>
+          <a:lnRef idx="1">
+            <a:schemeClr val="accent1"/>
+          </a:lnRef>
+          <a:fillRef idx="3">
+            <a:schemeClr val="accent1"/>
+          </a:fillRef>
+          <a:effectRef idx="2">
+            <a:schemeClr val="accent1"/>
+          </a:effectRef>
+          <a:fontRef idx="minor">
+            <a:schemeClr val="lt1"/>
+          </a:fontRef>
+        </p:style>
+        <p:txBody>
+          <a:bodyPr rtlCol="0" anchor="ctr"/>
+          <a:lstStyle/>
+          <a:p>
+            <a:pPr algn="ctr"/>
+          </a:p>
+        </p:txBody>
+      </p:sp>
+      <p:sp>
+        <p:nvSpPr>
+          <p:cNvPr id="19" name="TextBox 18"/>
+          <p:cNvSpPr txBox="1"/>
+          <p:nvPr/>
+        </p:nvSpPr>
+        <p:spPr>
+          <a:xfrm>
+            <a:off x="6035040" y="4411980"/>
+            <a:ext cx="1527048" cy="539496"/>
+          </a:xfrm>
+          <a:prstGeom prst="rect">
+            <a:avLst/>
+          </a:prstGeom>
+          <a:noFill/>
+        </p:spPr>
+        <p:txBody>
+          <a:bodyPr wrap="square" lIns="0" rIns="0" tIns="0" bIns="0" anchor="ctr">
+            <a:spAutoFit/>
+          </a:bodyPr>
+          <a:lstStyle/>
+          <a:p>
+            <a:pPr algn="ctr">
+              <a:lnSpc>
+                <a:spcPct val="108000"/>
+              </a:lnSpc>
+              <a:spcBef>
+                <a:spcPts val="0"/>
+              </a:spcBef>
+              <a:spcAft>
+                <a:spcPts val="0"/>
+              </a:spcAft>
+            </a:pPr>
+            <a:r>
+              <a:rPr sz="1570" b="0" lang="pl-PL">
+                <a:solidFill>
+                  <a:srgbClr val="192F3C"/>
+                </a:solidFill>
+                <a:latin typeface="DejaVu Sans"/>
+              </a:rPr>
+              <a:t>Prompt 1</a:t>
+            </a:r>
+          </a:p>
+        </p:txBody>
+      </p:sp>
+      <p:sp>
+        <p:nvSpPr>
+          <p:cNvPr id="20" name="TextBox 19"/>
+          <p:cNvSpPr txBox="1"/>
+          <p:nvPr/>
+        </p:nvSpPr>
+        <p:spPr>
+          <a:xfrm>
+            <a:off x="7644383" y="4480559"/>
+            <a:ext cx="228600" cy="365760"/>
+          </a:xfrm>
+          <a:prstGeom prst="rect">
+            <a:avLst/>
+          </a:prstGeom>
+          <a:noFill/>
+        </p:spPr>
+        <p:txBody>
+          <a:bodyPr wrap="square" lIns="0" rIns="0" tIns="0" bIns="0" anchor="t">
+            <a:spAutoFit/>
+          </a:bodyPr>
+          <a:lstStyle/>
+          <a:p>
+            <a:pPr algn="ctr">
+              <a:lnSpc>
+                <a:spcPct val="108000"/>
+              </a:lnSpc>
+              <a:spcBef>
+                <a:spcPts val="0"/>
+              </a:spcBef>
+              <a:spcAft>
+                <a:spcPts val="0"/>
+              </a:spcAft>
+            </a:pPr>
+            <a:r>
+              <a:rPr sz="1600" b="0" lang="pl-PL">
+                <a:solidFill>
+                  <a:srgbClr val="536873"/>
+                </a:solidFill>
+                <a:latin typeface="DejaVu Sans"/>
+              </a:rPr>
+              <a:t>+</a:t>
+            </a:r>
+          </a:p>
+        </p:txBody>
+      </p:sp>
+      <p:sp>
+        <p:nvSpPr>
+          <p:cNvPr id="21" name="Rectangle 20"/>
+          <p:cNvSpPr/>
+          <p:nvPr/>
+        </p:nvSpPr>
+        <p:spPr>
+          <a:xfrm>
+            <a:off x="7909560" y="4389120"/>
+            <a:ext cx="1700784" cy="585216"/>
+          </a:xfrm>
+          <a:prstGeom prst="rect">
+            <a:avLst/>
+          </a:prstGeom>
+          <a:solidFill>
+            <a:srgbClr val="ECE7F5"/>
+          </a:solidFill>
+          <a:ln>
+            <a:noFill/>
+          </a:ln>
+        </p:spPr>
+        <p:style>
+          <a:lnRef idx="1">
+            <a:schemeClr val="accent1"/>
+          </a:lnRef>
+          <a:fillRef idx="3">
+            <a:schemeClr val="accent1"/>
+          </a:fillRef>
+          <a:effectRef idx="2">
+            <a:schemeClr val="accent1"/>
+          </a:effectRef>
+          <a:fontRef idx="minor">
+            <a:schemeClr val="lt1"/>
+          </a:fontRef>
+        </p:style>
+        <p:txBody>
+          <a:bodyPr rtlCol="0" anchor="ctr"/>
+          <a:lstStyle/>
+          <a:p>
+            <a:pPr algn="ctr"/>
+          </a:p>
+        </p:txBody>
+      </p:sp>
+      <p:sp>
+        <p:nvSpPr>
+          <p:cNvPr id="22" name="TextBox 21"/>
+          <p:cNvSpPr txBox="1"/>
+          <p:nvPr/>
+        </p:nvSpPr>
+        <p:spPr>
+          <a:xfrm>
+            <a:off x="7946136" y="4411980"/>
+            <a:ext cx="1627632" cy="539496"/>
+          </a:xfrm>
+          <a:prstGeom prst="rect">
+            <a:avLst/>
+          </a:prstGeom>
+          <a:noFill/>
+        </p:spPr>
+        <p:txBody>
+          <a:bodyPr wrap="square" lIns="0" rIns="0" tIns="0" bIns="0" anchor="ctr">
+            <a:spAutoFit/>
+          </a:bodyPr>
+          <a:lstStyle/>
+          <a:p>
+            <a:pPr algn="ctr">
+              <a:lnSpc>
+                <a:spcPct val="108000"/>
+              </a:lnSpc>
+              <a:spcBef>
+                <a:spcPts val="0"/>
+              </a:spcBef>
+              <a:spcAft>
+                <a:spcPts val="0"/>
+              </a:spcAft>
+            </a:pPr>
+            <a:r>
+              <a:rPr sz="1570" b="0" lang="pl-PL">
+                <a:solidFill>
+                  <a:srgbClr val="192F3C"/>
+                </a:solidFill>
+                <a:latin typeface="DejaVu Sans"/>
+              </a:rPr>
+              <a:t>Odpowiedź 1</a:t>
+            </a:r>
+          </a:p>
+        </p:txBody>
+      </p:sp>
+      <p:sp>
+        <p:nvSpPr>
+          <p:cNvPr id="23" name="TextBox 22"/>
+          <p:cNvSpPr txBox="1"/>
+          <p:nvPr/>
+        </p:nvSpPr>
+        <p:spPr>
+          <a:xfrm>
+            <a:off x="5925312" y="4032504"/>
+            <a:ext cx="3767328" cy="246888"/>
+          </a:xfrm>
+          <a:prstGeom prst="rect">
+            <a:avLst/>
+          </a:prstGeom>
+          <a:noFill/>
+        </p:spPr>
+        <p:txBody>
+          <a:bodyPr wrap="square" lIns="0" rIns="0" tIns="0" bIns="0" anchor="t">
+            <a:spAutoFit/>
+          </a:bodyPr>
+          <a:lstStyle/>
+          <a:p>
+            <a:pPr algn="ctr">
+              <a:lnSpc>
+                <a:spcPct val="108000"/>
+              </a:lnSpc>
+              <a:spcBef>
+                <a:spcPts val="0"/>
+              </a:spcBef>
+              <a:spcAft>
+                <a:spcPts val="0"/>
+              </a:spcAft>
+            </a:pPr>
+            <a:r>
+              <a:rPr sz="1100" b="1" lang="pl-PL">
+                <a:solidFill>
+                  <a:srgbClr val="7955A4"/>
+                </a:solidFill>
+                <a:latin typeface="DejaVu Sans"/>
+              </a:rPr>
+              <a:t>HISTORIA / POWTARZANY PREFIKS</a:t>
+            </a:r>
+          </a:p>
+        </p:txBody>
+      </p:sp>
+      <p:sp>
+        <p:nvSpPr>
+          <p:cNvPr id="24" name="TextBox 23"/>
+          <p:cNvSpPr txBox="1"/>
+          <p:nvPr/>
+        </p:nvSpPr>
+        <p:spPr>
+          <a:xfrm>
+            <a:off x="9720072" y="4480559"/>
+            <a:ext cx="201168" cy="365760"/>
+          </a:xfrm>
+          <a:prstGeom prst="rect">
+            <a:avLst/>
+          </a:prstGeom>
+          <a:noFill/>
+        </p:spPr>
+        <p:txBody>
+          <a:bodyPr wrap="square" lIns="0" rIns="0" tIns="0" bIns="0" anchor="t">
+            <a:spAutoFit/>
+          </a:bodyPr>
+          <a:lstStyle/>
+          <a:p>
+            <a:pPr algn="ctr">
+              <a:lnSpc>
+                <a:spcPct val="108000"/>
+              </a:lnSpc>
+              <a:spcBef>
+                <a:spcPts val="0"/>
+              </a:spcBef>
+              <a:spcAft>
+                <a:spcPts val="0"/>
+              </a:spcAft>
+            </a:pPr>
+            <a:r>
+              <a:rPr sz="1600" b="0" lang="pl-PL">
+                <a:solidFill>
+                  <a:srgbClr val="536873"/>
+                </a:solidFill>
+                <a:latin typeface="DejaVu Sans"/>
+              </a:rPr>
+              <a:t>+</a:t>
+            </a:r>
+          </a:p>
+        </p:txBody>
+      </p:sp>
+      <p:sp>
+        <p:nvSpPr>
+          <p:cNvPr id="25" name="Rectangle 24"/>
+          <p:cNvSpPr/>
+          <p:nvPr/>
+        </p:nvSpPr>
+        <p:spPr>
+          <a:xfrm>
+            <a:off x="9966960" y="4389120"/>
+            <a:ext cx="1444752" cy="585216"/>
+          </a:xfrm>
+          <a:prstGeom prst="rect">
+            <a:avLst/>
+          </a:prstGeom>
+          <a:solidFill>
+            <a:srgbClr val="DFF0F4"/>
+          </a:solidFill>
+          <a:ln>
+            <a:noFill/>
+          </a:ln>
+        </p:spPr>
+        <p:style>
+          <a:lnRef idx="1">
+            <a:schemeClr val="accent1"/>
+          </a:lnRef>
+          <a:fillRef idx="3">
+            <a:schemeClr val="accent1"/>
+          </a:fillRef>
+          <a:effectRef idx="2">
+            <a:schemeClr val="accent1"/>
+          </a:effectRef>
+          <a:fontRef idx="minor">
+            <a:schemeClr val="lt1"/>
+          </a:fontRef>
+        </p:style>
+        <p:txBody>
+          <a:bodyPr rtlCol="0" anchor="ctr"/>
+          <a:lstStyle/>
+          <a:p>
+            <a:pPr algn="ctr"/>
+          </a:p>
+        </p:txBody>
+      </p:sp>
+      <p:sp>
+        <p:nvSpPr>
+          <p:cNvPr id="26" name="TextBox 25"/>
+          <p:cNvSpPr txBox="1"/>
+          <p:nvPr/>
+        </p:nvSpPr>
+        <p:spPr>
+          <a:xfrm>
+            <a:off x="10003536" y="4411980"/>
+            <a:ext cx="1371600" cy="539496"/>
+          </a:xfrm>
+          <a:prstGeom prst="rect">
+            <a:avLst/>
+          </a:prstGeom>
+          <a:noFill/>
+        </p:spPr>
+        <p:txBody>
+          <a:bodyPr wrap="square" lIns="0" rIns="0" tIns="0" bIns="0" anchor="ctr">
+            <a:spAutoFit/>
+          </a:bodyPr>
+          <a:lstStyle/>
+          <a:p>
+            <a:pPr algn="ctr">
+              <a:lnSpc>
+                <a:spcPct val="108000"/>
+              </a:lnSpc>
+              <a:spcBef>
+                <a:spcPts val="0"/>
+              </a:spcBef>
+              <a:spcAft>
+                <a:spcPts val="0"/>
+              </a:spcAft>
+            </a:pPr>
+            <a:r>
+              <a:rPr sz="1570" b="1" lang="pl-PL">
+                <a:solidFill>
+                  <a:srgbClr val="192F3C"/>
+                </a:solidFill>
+                <a:latin typeface="DejaVu Sans"/>
+              </a:rPr>
+              <a:t>Prompt 2</a:t>
+            </a:r>
+          </a:p>
+        </p:txBody>
+      </p:sp>
+      <p:cxnSp>
+        <p:nvCxnSpPr>
+          <p:cNvPr id="27" name="Connector 26"/>
+          <p:cNvCxnSpPr/>
+          <p:nvPr/>
+        </p:nvCxnSpPr>
+        <p:spPr>
+          <a:xfrm>
+            <a:off x="11494008" y="4681728"/>
+            <a:ext cx="329184" cy="0"/>
+          </a:xfrm>
+          <a:prstGeom prst="line">
+            <a:avLst/>
+          </a:prstGeom>
+          <a:ln w="22860">
+            <a:solidFill>
+              <a:srgbClr val="006C86"/>
+            </a:solidFill>
+            <a:tailEnd type="triangle"/>
+          </a:ln>
+        </p:spPr>
+        <p:style>
+          <a:lnRef idx="2">
+            <a:schemeClr val="accent1"/>
+          </a:lnRef>
+          <a:fillRef idx="0">
+            <a:schemeClr val="accent1"/>
+          </a:fillRef>
+          <a:effectRef idx="1">
+            <a:schemeClr val="accent1"/>
+          </a:effectRef>
+          <a:fontRef idx="minor">
+            <a:schemeClr val="tx1"/>
+          </a:fontRef>
+        </p:style>
+      </p:cxnSp>
+      <p:sp>
+        <p:nvSpPr>
+          <p:cNvPr id="28" name="Rectangle 27"/>
+          <p:cNvSpPr/>
+          <p:nvPr/>
+        </p:nvSpPr>
+        <p:spPr>
+          <a:xfrm>
+            <a:off x="11905488" y="4389120"/>
+            <a:ext cx="1188720" cy="585216"/>
+          </a:xfrm>
+          <a:prstGeom prst="rect">
+            <a:avLst/>
+          </a:prstGeom>
+          <a:solidFill>
+            <a:srgbClr val="FFFFFF"/>
+          </a:solidFill>
+          <a:ln w="12700">
+            <a:solidFill>
+              <a:srgbClr val="006C86"/>
+            </a:solidFill>
+          </a:ln>
+        </p:spPr>
+        <p:style>
+          <a:lnRef idx="1">
+            <a:schemeClr val="accent1"/>
+          </a:lnRef>
+          <a:fillRef idx="3">
+            <a:schemeClr val="accent1"/>
+          </a:fillRef>
+          <a:effectRef idx="2">
+            <a:schemeClr val="accent1"/>
+          </a:effectRef>
+          <a:fontRef idx="minor">
+            <a:schemeClr val="lt1"/>
+          </a:fontRef>
+        </p:style>
+        <p:txBody>
+          <a:bodyPr rtlCol="0" anchor="ctr"/>
+          <a:lstStyle/>
+          <a:p>
+            <a:pPr algn="ctr"/>
+          </a:p>
+        </p:txBody>
+      </p:sp>
+      <p:sp>
+        <p:nvSpPr>
+          <p:cNvPr id="29" name="TextBox 28"/>
+          <p:cNvSpPr txBox="1"/>
+          <p:nvPr/>
+        </p:nvSpPr>
+        <p:spPr>
+          <a:xfrm>
+            <a:off x="11942063" y="4411980"/>
+            <a:ext cx="1115568" cy="539496"/>
+          </a:xfrm>
+          <a:prstGeom prst="rect">
+            <a:avLst/>
+          </a:prstGeom>
+          <a:noFill/>
+        </p:spPr>
+        <p:txBody>
+          <a:bodyPr wrap="square" lIns="0" rIns="0" tIns="0" bIns="0" anchor="ctr">
+            <a:spAutoFit/>
+          </a:bodyPr>
+          <a:lstStyle/>
+          <a:p>
+            <a:pPr algn="ctr">
+              <a:lnSpc>
+                <a:spcPct val="108000"/>
+              </a:lnSpc>
+              <a:spcBef>
+                <a:spcPts val="0"/>
+              </a:spcBef>
+              <a:spcAft>
+                <a:spcPts val="0"/>
+              </a:spcAft>
+            </a:pPr>
+            <a:r>
+              <a:rPr sz="1670" b="1" lang="pl-PL">
+                <a:solidFill>
+                  <a:srgbClr val="192F3C"/>
+                </a:solidFill>
+                <a:latin typeface="DejaVu Sans"/>
+              </a:rPr>
+              <a:t>Model</a:t>
+            </a:r>
+          </a:p>
+        </p:txBody>
+      </p:sp>
+      <p:cxnSp>
+        <p:nvCxnSpPr>
+          <p:cNvPr id="30" name="Connector 29"/>
+          <p:cNvCxnSpPr/>
+          <p:nvPr/>
+        </p:nvCxnSpPr>
+        <p:spPr>
+          <a:xfrm>
+            <a:off x="13167360" y="4681728"/>
+            <a:ext cx="310896" cy="0"/>
+          </a:xfrm>
+          <a:prstGeom prst="line">
+            <a:avLst/>
+          </a:prstGeom>
+          <a:ln w="22860">
+            <a:solidFill>
+              <a:srgbClr val="006C86"/>
+            </a:solidFill>
+            <a:tailEnd type="triangle"/>
+          </a:ln>
+        </p:spPr>
+        <p:style>
+          <a:lnRef idx="2">
+            <a:schemeClr val="accent1"/>
+          </a:lnRef>
+          <a:fillRef idx="0">
+            <a:schemeClr val="accent1"/>
+          </a:fillRef>
+          <a:effectRef idx="1">
+            <a:schemeClr val="accent1"/>
+          </a:effectRef>
+          <a:fontRef idx="minor">
+            <a:schemeClr val="tx1"/>
+          </a:fontRef>
+        </p:style>
+      </p:cxnSp>
+      <p:sp>
+        <p:nvSpPr>
+          <p:cNvPr id="31" name="Rectangle 30"/>
+          <p:cNvSpPr/>
+          <p:nvPr/>
+        </p:nvSpPr>
+        <p:spPr>
+          <a:xfrm>
+            <a:off x="13551408" y="4389120"/>
+            <a:ext cx="1078992" cy="585216"/>
+          </a:xfrm>
+          <a:prstGeom prst="rect">
+            <a:avLst/>
+          </a:prstGeom>
+          <a:solidFill>
+            <a:srgbClr val="ECE7F5"/>
+          </a:solidFill>
+          <a:ln>
+            <a:noFill/>
+          </a:ln>
+        </p:spPr>
+        <p:style>
+          <a:lnRef idx="1">
+            <a:schemeClr val="accent1"/>
+          </a:lnRef>
+          <a:fillRef idx="3">
+            <a:schemeClr val="accent1"/>
+          </a:fillRef>
+          <a:effectRef idx="2">
+            <a:schemeClr val="accent1"/>
+          </a:effectRef>
+          <a:fontRef idx="minor">
+            <a:schemeClr val="lt1"/>
+          </a:fontRef>
+        </p:style>
+        <p:txBody>
+          <a:bodyPr rtlCol="0" anchor="ctr"/>
+          <a:lstStyle/>
+          <a:p>
+            <a:pPr algn="ctr"/>
+          </a:p>
+        </p:txBody>
+      </p:sp>
+      <p:sp>
+        <p:nvSpPr>
+          <p:cNvPr id="32" name="TextBox 31"/>
+          <p:cNvSpPr txBox="1"/>
+          <p:nvPr/>
+        </p:nvSpPr>
+        <p:spPr>
+          <a:xfrm>
+            <a:off x="13587984" y="4411980"/>
+            <a:ext cx="1005839" cy="539496"/>
+          </a:xfrm>
+          <a:prstGeom prst="rect">
+            <a:avLst/>
+          </a:prstGeom>
+          <a:noFill/>
+        </p:spPr>
+        <p:txBody>
+          <a:bodyPr wrap="square" lIns="0" rIns="0" tIns="0" bIns="0" anchor="ctr">
+            <a:spAutoFit/>
+          </a:bodyPr>
+          <a:lstStyle/>
+          <a:p>
+            <a:pPr algn="ctr">
+              <a:lnSpc>
+                <a:spcPct val="108000"/>
+              </a:lnSpc>
+              <a:spcBef>
+                <a:spcPts val="0"/>
+              </a:spcBef>
+              <a:spcAft>
+                <a:spcPts val="0"/>
+              </a:spcAft>
+            </a:pPr>
+            <a:r>
+              <a:rPr sz="1570" b="0" lang="pl-PL">
+                <a:solidFill>
+                  <a:srgbClr val="192F3C"/>
+                </a:solidFill>
+                <a:latin typeface="DejaVu Sans"/>
+              </a:rPr>
+              <a:t>Odp. 2</a:t>
+            </a:r>
+          </a:p>
+        </p:txBody>
+      </p:sp>
+      <p:sp>
+        <p:nvSpPr>
+          <p:cNvPr id="33" name="TextBox 32"/>
+          <p:cNvSpPr txBox="1"/>
+          <p:nvPr/>
+        </p:nvSpPr>
+        <p:spPr>
+          <a:xfrm>
+            <a:off x="612648" y="5961888"/>
+            <a:ext cx="1691640" cy="393192"/>
+          </a:xfrm>
+          <a:prstGeom prst="rect">
+            <a:avLst/>
+          </a:prstGeom>
+          <a:noFill/>
+        </p:spPr>
+        <p:txBody>
+          <a:bodyPr wrap="square" lIns="0" rIns="0" tIns="0" bIns="0" anchor="t">
+            <a:spAutoFit/>
+          </a:bodyPr>
+          <a:lstStyle/>
+          <a:p>
+            <a:pPr algn="l">
+              <a:lnSpc>
+                <a:spcPct val="108000"/>
+              </a:lnSpc>
+              <a:spcBef>
+                <a:spcPts val="0"/>
+              </a:spcBef>
+              <a:spcAft>
+                <a:spcPts val="0"/>
+              </a:spcAft>
+            </a:pPr>
+            <a:r>
+              <a:rPr sz="1800" b="1" lang="pl-PL">
+                <a:solidFill>
+                  <a:srgbClr val="192F3C"/>
+                </a:solidFill>
+                <a:latin typeface="DejaVu Sans"/>
+              </a:rPr>
+              <a:t>Wywołanie 3</a:t>
+            </a:r>
+          </a:p>
+        </p:txBody>
+      </p:sp>
+      <p:sp>
+        <p:nvSpPr>
+          <p:cNvPr id="34" name="Rectangle 33"/>
+          <p:cNvSpPr/>
+          <p:nvPr/>
+        </p:nvSpPr>
+        <p:spPr>
+          <a:xfrm>
+            <a:off x="2359152" y="5806440"/>
+            <a:ext cx="7333488" cy="713232"/>
+          </a:xfrm>
+          <a:prstGeom prst="rect">
+            <a:avLst/>
+          </a:prstGeom>
+          <a:solidFill>
+            <a:srgbClr val="ECE7F5"/>
+          </a:solidFill>
+          <a:ln>
+            <a:noFill/>
+          </a:ln>
+        </p:spPr>
+        <p:style>
+          <a:lnRef idx="1">
+            <a:schemeClr val="accent1"/>
+          </a:lnRef>
+          <a:fillRef idx="3">
+            <a:schemeClr val="accent1"/>
+          </a:fillRef>
+          <a:effectRef idx="2">
+            <a:schemeClr val="accent1"/>
+          </a:effectRef>
+          <a:fontRef idx="minor">
+            <a:schemeClr val="lt1"/>
+          </a:fontRef>
+        </p:style>
+        <p:txBody>
+          <a:bodyPr rtlCol="0" anchor="ctr"/>
+          <a:lstStyle/>
+          <a:p>
+            <a:pPr algn="ctr"/>
+          </a:p>
+        </p:txBody>
+      </p:sp>
+      <p:sp>
+        <p:nvSpPr>
+          <p:cNvPr id="35" name="Rectangle 34"/>
+          <p:cNvSpPr/>
+          <p:nvPr/>
+        </p:nvSpPr>
+        <p:spPr>
+          <a:xfrm>
+            <a:off x="2432304" y="5870448"/>
+            <a:ext cx="1444752" cy="585216"/>
+          </a:xfrm>
+          <a:prstGeom prst="rect">
+            <a:avLst/>
+          </a:prstGeom>
+          <a:solidFill>
+            <a:srgbClr val="DFF0F4"/>
+          </a:solidFill>
+          <a:ln>
+            <a:noFill/>
+          </a:ln>
+        </p:spPr>
+        <p:style>
+          <a:lnRef idx="1">
+            <a:schemeClr val="accent1"/>
+          </a:lnRef>
+          <a:fillRef idx="3">
+            <a:schemeClr val="accent1"/>
+          </a:fillRef>
+          <a:effectRef idx="2">
+            <a:schemeClr val="accent1"/>
+          </a:effectRef>
+          <a:fontRef idx="minor">
+            <a:schemeClr val="lt1"/>
+          </a:fontRef>
+        </p:style>
+        <p:txBody>
+          <a:bodyPr rtlCol="0" anchor="ctr"/>
+          <a:lstStyle/>
+          <a:p>
+            <a:pPr algn="ctr"/>
+          </a:p>
+        </p:txBody>
+      </p:sp>
+      <p:sp>
+        <p:nvSpPr>
+          <p:cNvPr id="36" name="TextBox 35"/>
+          <p:cNvSpPr txBox="1"/>
+          <p:nvPr/>
+        </p:nvSpPr>
+        <p:spPr>
+          <a:xfrm>
+            <a:off x="2468880" y="5893308"/>
+            <a:ext cx="1371600" cy="539496"/>
+          </a:xfrm>
+          <a:prstGeom prst="rect">
+            <a:avLst/>
+          </a:prstGeom>
+          <a:noFill/>
+        </p:spPr>
+        <p:txBody>
+          <a:bodyPr wrap="square" lIns="0" rIns="0" tIns="0" bIns="0" anchor="ctr">
+            <a:spAutoFit/>
+          </a:bodyPr>
+          <a:lstStyle/>
+          <a:p>
+            <a:pPr algn="ctr">
+              <a:lnSpc>
+                <a:spcPct val="108000"/>
+              </a:lnSpc>
+              <a:spcBef>
+                <a:spcPts val="0"/>
+              </a:spcBef>
+              <a:spcAft>
+                <a:spcPts val="0"/>
+              </a:spcAft>
+            </a:pPr>
+            <a:r>
+              <a:rPr sz="1470" b="0" lang="pl-PL">
+                <a:solidFill>
+                  <a:srgbClr val="192F3C"/>
+                </a:solidFill>
+                <a:latin typeface="DejaVu Sans"/>
+              </a:rPr>
+              <a:t>Prompt 1</a:t>
+            </a:r>
+          </a:p>
+        </p:txBody>
+      </p:sp>
+      <p:sp>
+        <p:nvSpPr>
+          <p:cNvPr id="37" name="Rectangle 36"/>
+          <p:cNvSpPr/>
+          <p:nvPr/>
+        </p:nvSpPr>
+        <p:spPr>
+          <a:xfrm>
+            <a:off x="4178808" y="5870448"/>
+            <a:ext cx="1664208" cy="585216"/>
+          </a:xfrm>
+          <a:prstGeom prst="rect">
+            <a:avLst/>
+          </a:prstGeom>
+          <a:solidFill>
+            <a:srgbClr val="ECE7F5"/>
+          </a:solidFill>
+          <a:ln>
+            <a:noFill/>
+          </a:ln>
+        </p:spPr>
+        <p:style>
+          <a:lnRef idx="1">
+            <a:schemeClr val="accent1"/>
+          </a:lnRef>
+          <a:fillRef idx="3">
+            <a:schemeClr val="accent1"/>
+          </a:fillRef>
+          <a:effectRef idx="2">
+            <a:schemeClr val="accent1"/>
+          </a:effectRef>
+          <a:fontRef idx="minor">
+            <a:schemeClr val="lt1"/>
+          </a:fontRef>
+        </p:style>
+        <p:txBody>
+          <a:bodyPr rtlCol="0" anchor="ctr"/>
+          <a:lstStyle/>
+          <a:p>
+            <a:pPr algn="ctr"/>
+          </a:p>
+        </p:txBody>
+      </p:sp>
+      <p:sp>
+        <p:nvSpPr>
+          <p:cNvPr id="38" name="TextBox 37"/>
+          <p:cNvSpPr txBox="1"/>
+          <p:nvPr/>
+        </p:nvSpPr>
+        <p:spPr>
+          <a:xfrm>
+            <a:off x="4215384" y="5893308"/>
+            <a:ext cx="1591056" cy="539496"/>
+          </a:xfrm>
+          <a:prstGeom prst="rect">
+            <a:avLst/>
+          </a:prstGeom>
+          <a:noFill/>
+        </p:spPr>
+        <p:txBody>
+          <a:bodyPr wrap="square" lIns="0" rIns="0" tIns="0" bIns="0" anchor="ctr">
+            <a:spAutoFit/>
+          </a:bodyPr>
+          <a:lstStyle/>
+          <a:p>
+            <a:pPr algn="ctr">
+              <a:lnSpc>
+                <a:spcPct val="108000"/>
+              </a:lnSpc>
+              <a:spcBef>
+                <a:spcPts val="0"/>
+              </a:spcBef>
+              <a:spcAft>
+                <a:spcPts val="0"/>
+              </a:spcAft>
+            </a:pPr>
+            <a:r>
+              <a:rPr sz="1470" b="0" lang="pl-PL">
+                <a:solidFill>
+                  <a:srgbClr val="192F3C"/>
+                </a:solidFill>
+                <a:latin typeface="DejaVu Sans"/>
+              </a:rPr>
+              <a:t>Odpowiedź 1</a:t>
+            </a:r>
+          </a:p>
+        </p:txBody>
+      </p:sp>
+      <p:sp>
+        <p:nvSpPr>
+          <p:cNvPr id="39" name="Rectangle 38"/>
+          <p:cNvSpPr/>
+          <p:nvPr/>
+        </p:nvSpPr>
+        <p:spPr>
+          <a:xfrm>
+            <a:off x="6144768" y="5870448"/>
+            <a:ext cx="1444752" cy="585216"/>
+          </a:xfrm>
+          <a:prstGeom prst="rect">
+            <a:avLst/>
+          </a:prstGeom>
+          <a:solidFill>
+            <a:srgbClr val="DFF0F4"/>
+          </a:solidFill>
+          <a:ln>
+            <a:noFill/>
+          </a:ln>
+        </p:spPr>
+        <p:style>
+          <a:lnRef idx="1">
+            <a:schemeClr val="accent1"/>
+          </a:lnRef>
+          <a:fillRef idx="3">
+            <a:schemeClr val="accent1"/>
+          </a:fillRef>
+          <a:effectRef idx="2">
+            <a:schemeClr val="accent1"/>
+          </a:effectRef>
+          <a:fontRef idx="minor">
+            <a:schemeClr val="lt1"/>
+          </a:fontRef>
+        </p:style>
+        <p:txBody>
+          <a:bodyPr rtlCol="0" anchor="ctr"/>
+          <a:lstStyle/>
+          <a:p>
+            <a:pPr algn="ctr"/>
+          </a:p>
+        </p:txBody>
+      </p:sp>
+      <p:sp>
+        <p:nvSpPr>
+          <p:cNvPr id="40" name="TextBox 39"/>
+          <p:cNvSpPr txBox="1"/>
+          <p:nvPr/>
+        </p:nvSpPr>
+        <p:spPr>
+          <a:xfrm>
+            <a:off x="6181344" y="5893308"/>
+            <a:ext cx="1371600" cy="539496"/>
+          </a:xfrm>
+          <a:prstGeom prst="rect">
+            <a:avLst/>
+          </a:prstGeom>
+          <a:noFill/>
+        </p:spPr>
+        <p:txBody>
+          <a:bodyPr wrap="square" lIns="0" rIns="0" tIns="0" bIns="0" anchor="ctr">
+            <a:spAutoFit/>
+          </a:bodyPr>
+          <a:lstStyle/>
+          <a:p>
+            <a:pPr algn="ctr">
+              <a:lnSpc>
+                <a:spcPct val="108000"/>
+              </a:lnSpc>
+              <a:spcBef>
+                <a:spcPts val="0"/>
+              </a:spcBef>
+              <a:spcAft>
+                <a:spcPts val="0"/>
+              </a:spcAft>
+            </a:pPr>
+            <a:r>
+              <a:rPr sz="1470" b="0" lang="pl-PL">
+                <a:solidFill>
+                  <a:srgbClr val="192F3C"/>
+                </a:solidFill>
+                <a:latin typeface="DejaVu Sans"/>
+              </a:rPr>
+              <a:t>Prompt 2</a:t>
+            </a:r>
+          </a:p>
+        </p:txBody>
+      </p:sp>
+      <p:sp>
+        <p:nvSpPr>
+          <p:cNvPr id="41" name="Rectangle 40"/>
+          <p:cNvSpPr/>
+          <p:nvPr/>
+        </p:nvSpPr>
+        <p:spPr>
+          <a:xfrm>
+            <a:off x="7891272" y="5870448"/>
+            <a:ext cx="1728216" cy="585216"/>
+          </a:xfrm>
+          <a:prstGeom prst="rect">
+            <a:avLst/>
+          </a:prstGeom>
+          <a:solidFill>
+            <a:srgbClr val="ECE7F5"/>
+          </a:solidFill>
+          <a:ln>
+            <a:noFill/>
+          </a:ln>
+        </p:spPr>
+        <p:style>
+          <a:lnRef idx="1">
+            <a:schemeClr val="accent1"/>
+          </a:lnRef>
+          <a:fillRef idx="3">
+            <a:schemeClr val="accent1"/>
+          </a:fillRef>
+          <a:effectRef idx="2">
+            <a:schemeClr val="accent1"/>
+          </a:effectRef>
+          <a:fontRef idx="minor">
+            <a:schemeClr val="lt1"/>
+          </a:fontRef>
+        </p:style>
+        <p:txBody>
+          <a:bodyPr rtlCol="0" anchor="ctr"/>
+          <a:lstStyle/>
+          <a:p>
+            <a:pPr algn="ctr"/>
+          </a:p>
+        </p:txBody>
+      </p:sp>
+      <p:sp>
+        <p:nvSpPr>
+          <p:cNvPr id="42" name="TextBox 41"/>
+          <p:cNvSpPr txBox="1"/>
+          <p:nvPr/>
+        </p:nvSpPr>
+        <p:spPr>
+          <a:xfrm>
+            <a:off x="7927848" y="5893308"/>
+            <a:ext cx="1655063" cy="539496"/>
+          </a:xfrm>
+          <a:prstGeom prst="rect">
+            <a:avLst/>
+          </a:prstGeom>
+          <a:noFill/>
+        </p:spPr>
+        <p:txBody>
+          <a:bodyPr wrap="square" lIns="0" rIns="0" tIns="0" bIns="0" anchor="ctr">
+            <a:spAutoFit/>
+          </a:bodyPr>
+          <a:lstStyle/>
+          <a:p>
+            <a:pPr algn="ctr">
+              <a:lnSpc>
+                <a:spcPct val="108000"/>
+              </a:lnSpc>
+              <a:spcBef>
+                <a:spcPts val="0"/>
+              </a:spcBef>
+              <a:spcAft>
+                <a:spcPts val="0"/>
+              </a:spcAft>
+            </a:pPr>
+            <a:r>
+              <a:rPr sz="1470" b="0" lang="pl-PL">
+                <a:solidFill>
+                  <a:srgbClr val="192F3C"/>
+                </a:solidFill>
+                <a:latin typeface="DejaVu Sans"/>
+              </a:rPr>
+              <a:t>Odpowiedź 2</a:t>
+            </a:r>
+          </a:p>
+        </p:txBody>
+      </p:sp>
+      <p:sp>
+        <p:nvSpPr>
+          <p:cNvPr id="43" name="TextBox 42"/>
+          <p:cNvSpPr txBox="1"/>
+          <p:nvPr/>
+        </p:nvSpPr>
+        <p:spPr>
+          <a:xfrm>
+            <a:off x="3913632" y="5961888"/>
+            <a:ext cx="228600" cy="365760"/>
+          </a:xfrm>
+          <a:prstGeom prst="rect">
+            <a:avLst/>
+          </a:prstGeom>
+          <a:noFill/>
+        </p:spPr>
+        <p:txBody>
+          <a:bodyPr wrap="square" lIns="0" rIns="0" tIns="0" bIns="0" anchor="t">
+            <a:spAutoFit/>
+          </a:bodyPr>
+          <a:lstStyle/>
+          <a:p>
+            <a:pPr algn="ctr">
+              <a:lnSpc>
+                <a:spcPct val="108000"/>
+              </a:lnSpc>
+              <a:spcBef>
+                <a:spcPts val="0"/>
+              </a:spcBef>
+              <a:spcAft>
+                <a:spcPts val="0"/>
+              </a:spcAft>
+            </a:pPr>
+            <a:r>
+              <a:rPr sz="1600" b="0" lang="pl-PL">
+                <a:solidFill>
+                  <a:srgbClr val="536873"/>
+                </a:solidFill>
+                <a:latin typeface="DejaVu Sans"/>
+              </a:rPr>
+              <a:t>+</a:t>
+            </a:r>
+          </a:p>
+        </p:txBody>
+      </p:sp>
+      <p:sp>
+        <p:nvSpPr>
+          <p:cNvPr id="44" name="TextBox 43"/>
+          <p:cNvSpPr txBox="1"/>
+          <p:nvPr/>
+        </p:nvSpPr>
+        <p:spPr>
+          <a:xfrm>
+            <a:off x="5879592" y="5961888"/>
+            <a:ext cx="228600" cy="365760"/>
+          </a:xfrm>
+          <a:prstGeom prst="rect">
+            <a:avLst/>
+          </a:prstGeom>
+          <a:noFill/>
+        </p:spPr>
+        <p:txBody>
+          <a:bodyPr wrap="square" lIns="0" rIns="0" tIns="0" bIns="0" anchor="t">
+            <a:spAutoFit/>
+          </a:bodyPr>
+          <a:lstStyle/>
+          <a:p>
+            <a:pPr algn="ctr">
+              <a:lnSpc>
+                <a:spcPct val="108000"/>
+              </a:lnSpc>
+              <a:spcBef>
+                <a:spcPts val="0"/>
+              </a:spcBef>
+              <a:spcAft>
+                <a:spcPts val="0"/>
+              </a:spcAft>
+            </a:pPr>
+            <a:r>
+              <a:rPr sz="1600" b="0" lang="pl-PL">
+                <a:solidFill>
+                  <a:srgbClr val="536873"/>
+                </a:solidFill>
+                <a:latin typeface="DejaVu Sans"/>
+              </a:rPr>
+              <a:t>+</a:t>
+            </a:r>
+          </a:p>
+        </p:txBody>
+      </p:sp>
+      <p:sp>
+        <p:nvSpPr>
+          <p:cNvPr id="45" name="TextBox 44"/>
+          <p:cNvSpPr txBox="1"/>
+          <p:nvPr/>
+        </p:nvSpPr>
+        <p:spPr>
+          <a:xfrm>
+            <a:off x="7626096" y="5961888"/>
+            <a:ext cx="228600" cy="365760"/>
+          </a:xfrm>
+          <a:prstGeom prst="rect">
+            <a:avLst/>
+          </a:prstGeom>
+          <a:noFill/>
+        </p:spPr>
+        <p:txBody>
+          <a:bodyPr wrap="square" lIns="0" rIns="0" tIns="0" bIns="0" anchor="t">
+            <a:spAutoFit/>
+          </a:bodyPr>
+          <a:lstStyle/>
+          <a:p>
+            <a:pPr algn="ctr">
+              <a:lnSpc>
+                <a:spcPct val="108000"/>
+              </a:lnSpc>
+              <a:spcBef>
+                <a:spcPts val="0"/>
+              </a:spcBef>
+              <a:spcAft>
+                <a:spcPts val="0"/>
+              </a:spcAft>
+            </a:pPr>
+            <a:r>
+              <a:rPr sz="1600" b="0" lang="pl-PL">
+                <a:solidFill>
+                  <a:srgbClr val="536873"/>
+                </a:solidFill>
+                <a:latin typeface="DejaVu Sans"/>
+              </a:rPr>
+              <a:t>+</a:t>
+            </a:r>
+          </a:p>
+        </p:txBody>
+      </p:sp>
+      <p:sp>
+        <p:nvSpPr>
+          <p:cNvPr id="46" name="TextBox 45"/>
+          <p:cNvSpPr txBox="1"/>
+          <p:nvPr/>
+        </p:nvSpPr>
+        <p:spPr>
+          <a:xfrm>
+            <a:off x="2359152" y="5513832"/>
+            <a:ext cx="7333488" cy="246888"/>
+          </a:xfrm>
+          <a:prstGeom prst="rect">
+            <a:avLst/>
+          </a:prstGeom>
+          <a:noFill/>
+        </p:spPr>
+        <p:txBody>
+          <a:bodyPr wrap="square" lIns="0" rIns="0" tIns="0" bIns="0" anchor="t">
+            <a:spAutoFit/>
+          </a:bodyPr>
+          <a:lstStyle/>
+          <a:p>
+            <a:pPr algn="ctr">
+              <a:lnSpc>
+                <a:spcPct val="108000"/>
+              </a:lnSpc>
+              <a:spcBef>
+                <a:spcPts val="0"/>
+              </a:spcBef>
+              <a:spcAft>
+                <a:spcPts val="0"/>
+              </a:spcAft>
+            </a:pPr>
+            <a:r>
+              <a:rPr sz="1100" b="1" lang="pl-PL">
+                <a:solidFill>
+                  <a:srgbClr val="7955A4"/>
+                </a:solidFill>
+                <a:latin typeface="DejaVu Sans"/>
+              </a:rPr>
+              <a:t>HISTORIA / POWTARZANY PREFIKS</a:t>
+            </a:r>
+          </a:p>
+        </p:txBody>
+      </p:sp>
+      <p:sp>
+        <p:nvSpPr>
+          <p:cNvPr id="47" name="TextBox 46"/>
+          <p:cNvSpPr txBox="1"/>
+          <p:nvPr/>
+        </p:nvSpPr>
+        <p:spPr>
+          <a:xfrm>
+            <a:off x="9720072" y="5961888"/>
+            <a:ext cx="201168" cy="365760"/>
+          </a:xfrm>
+          <a:prstGeom prst="rect">
+            <a:avLst/>
+          </a:prstGeom>
+          <a:noFill/>
+        </p:spPr>
+        <p:txBody>
+          <a:bodyPr wrap="square" lIns="0" rIns="0" tIns="0" bIns="0" anchor="t">
+            <a:spAutoFit/>
+          </a:bodyPr>
+          <a:lstStyle/>
+          <a:p>
+            <a:pPr algn="ctr">
+              <a:lnSpc>
+                <a:spcPct val="108000"/>
+              </a:lnSpc>
+              <a:spcBef>
+                <a:spcPts val="0"/>
+              </a:spcBef>
+              <a:spcAft>
+                <a:spcPts val="0"/>
+              </a:spcAft>
+            </a:pPr>
+            <a:r>
+              <a:rPr sz="1600" b="0" lang="pl-PL">
+                <a:solidFill>
+                  <a:srgbClr val="536873"/>
+                </a:solidFill>
+                <a:latin typeface="DejaVu Sans"/>
+              </a:rPr>
+              <a:t>+</a:t>
+            </a:r>
+          </a:p>
+        </p:txBody>
+      </p:sp>
+      <p:sp>
+        <p:nvSpPr>
+          <p:cNvPr id="48" name="Rectangle 47"/>
+          <p:cNvSpPr/>
+          <p:nvPr/>
+        </p:nvSpPr>
+        <p:spPr>
+          <a:xfrm>
+            <a:off x="9966960" y="5870448"/>
+            <a:ext cx="1444752" cy="585216"/>
+          </a:xfrm>
+          <a:prstGeom prst="rect">
+            <a:avLst/>
+          </a:prstGeom>
+          <a:solidFill>
+            <a:srgbClr val="DFF0F4"/>
+          </a:solidFill>
+          <a:ln>
+            <a:noFill/>
+          </a:ln>
+        </p:spPr>
+        <p:style>
+          <a:lnRef idx="1">
+            <a:schemeClr val="accent1"/>
+          </a:lnRef>
+          <a:fillRef idx="3">
+            <a:schemeClr val="accent1"/>
+          </a:fillRef>
+          <a:effectRef idx="2">
+            <a:schemeClr val="accent1"/>
+          </a:effectRef>
+          <a:fontRef idx="minor">
+            <a:schemeClr val="lt1"/>
+          </a:fontRef>
+        </p:style>
+        <p:txBody>
+          <a:bodyPr rtlCol="0" anchor="ctr"/>
+          <a:lstStyle/>
+          <a:p>
+            <a:pPr algn="ctr"/>
+          </a:p>
+        </p:txBody>
+      </p:sp>
+      <p:sp>
+        <p:nvSpPr>
+          <p:cNvPr id="49" name="TextBox 48"/>
+          <p:cNvSpPr txBox="1"/>
+          <p:nvPr/>
+        </p:nvSpPr>
+        <p:spPr>
+          <a:xfrm>
+            <a:off x="10003536" y="5893308"/>
+            <a:ext cx="1371600" cy="539496"/>
+          </a:xfrm>
+          <a:prstGeom prst="rect">
+            <a:avLst/>
+          </a:prstGeom>
+          <a:noFill/>
+        </p:spPr>
+        <p:txBody>
+          <a:bodyPr wrap="square" lIns="0" rIns="0" tIns="0" bIns="0" anchor="ctr">
+            <a:spAutoFit/>
+          </a:bodyPr>
+          <a:lstStyle/>
+          <a:p>
+            <a:pPr algn="ctr">
+              <a:lnSpc>
+                <a:spcPct val="108000"/>
+              </a:lnSpc>
+              <a:spcBef>
+                <a:spcPts val="0"/>
+              </a:spcBef>
+              <a:spcAft>
+                <a:spcPts val="0"/>
+              </a:spcAft>
+            </a:pPr>
+            <a:r>
+              <a:rPr sz="1570" b="1" lang="pl-PL">
+                <a:solidFill>
+                  <a:srgbClr val="192F3C"/>
+                </a:solidFill>
+                <a:latin typeface="DejaVu Sans"/>
+              </a:rPr>
+              <a:t>Prompt 3</a:t>
+            </a:r>
+          </a:p>
+        </p:txBody>
+      </p:sp>
+      <p:cxnSp>
+        <p:nvCxnSpPr>
+          <p:cNvPr id="50" name="Connector 49"/>
+          <p:cNvCxnSpPr/>
+          <p:nvPr/>
+        </p:nvCxnSpPr>
+        <p:spPr>
+          <a:xfrm>
+            <a:off x="11494008" y="6163056"/>
+            <a:ext cx="329184" cy="0"/>
+          </a:xfrm>
+          <a:prstGeom prst="line">
+            <a:avLst/>
+          </a:prstGeom>
+          <a:ln w="22860">
+            <a:solidFill>
+              <a:srgbClr val="006C86"/>
+            </a:solidFill>
+            <a:tailEnd type="triangle"/>
+          </a:ln>
+        </p:spPr>
+        <p:style>
+          <a:lnRef idx="2">
+            <a:schemeClr val="accent1"/>
+          </a:lnRef>
+          <a:fillRef idx="0">
+            <a:schemeClr val="accent1"/>
+          </a:fillRef>
+          <a:effectRef idx="1">
+            <a:schemeClr val="accent1"/>
+          </a:effectRef>
+          <a:fontRef idx="minor">
+            <a:schemeClr val="tx1"/>
+          </a:fontRef>
+        </p:style>
+      </p:cxnSp>
+      <p:sp>
+        <p:nvSpPr>
+          <p:cNvPr id="51" name="Rectangle 50"/>
+          <p:cNvSpPr/>
+          <p:nvPr/>
+        </p:nvSpPr>
+        <p:spPr>
+          <a:xfrm>
+            <a:off x="11905488" y="5870448"/>
+            <a:ext cx="1188720" cy="585216"/>
+          </a:xfrm>
+          <a:prstGeom prst="rect">
+            <a:avLst/>
+          </a:prstGeom>
+          <a:solidFill>
+            <a:srgbClr val="FFFFFF"/>
+          </a:solidFill>
+          <a:ln w="12700">
+            <a:solidFill>
+              <a:srgbClr val="006C86"/>
+            </a:solidFill>
+          </a:ln>
+        </p:spPr>
+        <p:style>
+          <a:lnRef idx="1">
+            <a:schemeClr val="accent1"/>
+          </a:lnRef>
+          <a:fillRef idx="3">
+            <a:schemeClr val="accent1"/>
+          </a:fillRef>
+          <a:effectRef idx="2">
+            <a:schemeClr val="accent1"/>
+          </a:effectRef>
+          <a:fontRef idx="minor">
+            <a:schemeClr val="lt1"/>
+          </a:fontRef>
+        </p:style>
+        <p:txBody>
+          <a:bodyPr rtlCol="0" anchor="ctr"/>
+          <a:lstStyle/>
+          <a:p>
+            <a:pPr algn="ctr"/>
+          </a:p>
+        </p:txBody>
+      </p:sp>
+      <p:sp>
+        <p:nvSpPr>
+          <p:cNvPr id="52" name="TextBox 51"/>
+          <p:cNvSpPr txBox="1"/>
+          <p:nvPr/>
+        </p:nvSpPr>
+        <p:spPr>
+          <a:xfrm>
+            <a:off x="11942063" y="5893308"/>
+            <a:ext cx="1115568" cy="539496"/>
+          </a:xfrm>
+          <a:prstGeom prst="rect">
+            <a:avLst/>
+          </a:prstGeom>
+          <a:noFill/>
+        </p:spPr>
+        <p:txBody>
+          <a:bodyPr wrap="square" lIns="0" rIns="0" tIns="0" bIns="0" anchor="ctr">
+            <a:spAutoFit/>
+          </a:bodyPr>
+          <a:lstStyle/>
+          <a:p>
+            <a:pPr algn="ctr">
+              <a:lnSpc>
+                <a:spcPct val="108000"/>
+              </a:lnSpc>
+              <a:spcBef>
+                <a:spcPts val="0"/>
+              </a:spcBef>
+              <a:spcAft>
+                <a:spcPts val="0"/>
+              </a:spcAft>
+            </a:pPr>
+            <a:r>
+              <a:rPr sz="1670" b="1" lang="pl-PL">
+                <a:solidFill>
+                  <a:srgbClr val="192F3C"/>
+                </a:solidFill>
+                <a:latin typeface="DejaVu Sans"/>
+              </a:rPr>
+              <a:t>Model</a:t>
+            </a:r>
+          </a:p>
+        </p:txBody>
+      </p:sp>
+      <p:cxnSp>
+        <p:nvCxnSpPr>
+          <p:cNvPr id="53" name="Connector 52"/>
+          <p:cNvCxnSpPr/>
+          <p:nvPr/>
+        </p:nvCxnSpPr>
+        <p:spPr>
+          <a:xfrm>
+            <a:off x="13167360" y="6163056"/>
+            <a:ext cx="310896" cy="0"/>
+          </a:xfrm>
+          <a:prstGeom prst="line">
+            <a:avLst/>
+          </a:prstGeom>
+          <a:ln w="22860">
+            <a:solidFill>
+              <a:srgbClr val="006C86"/>
+            </a:solidFill>
+            <a:tailEnd type="triangle"/>
+          </a:ln>
+        </p:spPr>
+        <p:style>
+          <a:lnRef idx="2">
+            <a:schemeClr val="accent1"/>
+          </a:lnRef>
+          <a:fillRef idx="0">
+            <a:schemeClr val="accent1"/>
+          </a:fillRef>
+          <a:effectRef idx="1">
+            <a:schemeClr val="accent1"/>
+          </a:effectRef>
+          <a:fontRef idx="minor">
+            <a:schemeClr val="tx1"/>
+          </a:fontRef>
+        </p:style>
+      </p:cxnSp>
+      <p:sp>
+        <p:nvSpPr>
+          <p:cNvPr id="54" name="Rectangle 53"/>
+          <p:cNvSpPr/>
+          <p:nvPr/>
+        </p:nvSpPr>
+        <p:spPr>
+          <a:xfrm>
+            <a:off x="13551408" y="5870448"/>
+            <a:ext cx="1078992" cy="585216"/>
+          </a:xfrm>
+          <a:prstGeom prst="rect">
+            <a:avLst/>
+          </a:prstGeom>
+          <a:solidFill>
+            <a:srgbClr val="ECE7F5"/>
+          </a:solidFill>
+          <a:ln>
+            <a:noFill/>
+          </a:ln>
+        </p:spPr>
+        <p:style>
+          <a:lnRef idx="1">
+            <a:schemeClr val="accent1"/>
+          </a:lnRef>
+          <a:fillRef idx="3">
+            <a:schemeClr val="accent1"/>
+          </a:fillRef>
+          <a:effectRef idx="2">
+            <a:schemeClr val="accent1"/>
+          </a:effectRef>
+          <a:fontRef idx="minor">
+            <a:schemeClr val="lt1"/>
+          </a:fontRef>
+        </p:style>
+        <p:txBody>
+          <a:bodyPr rtlCol="0" anchor="ctr"/>
+          <a:lstStyle/>
+          <a:p>
+            <a:pPr algn="ctr"/>
+          </a:p>
+        </p:txBody>
+      </p:sp>
+      <p:sp>
+        <p:nvSpPr>
+          <p:cNvPr id="55" name="TextBox 54"/>
+          <p:cNvSpPr txBox="1"/>
+          <p:nvPr/>
+        </p:nvSpPr>
+        <p:spPr>
+          <a:xfrm>
+            <a:off x="13587984" y="5893308"/>
+            <a:ext cx="1005839" cy="539496"/>
+          </a:xfrm>
+          <a:prstGeom prst="rect">
+            <a:avLst/>
+          </a:prstGeom>
+          <a:noFill/>
+        </p:spPr>
+        <p:txBody>
+          <a:bodyPr wrap="square" lIns="0" rIns="0" tIns="0" bIns="0" anchor="ctr">
+            <a:spAutoFit/>
+          </a:bodyPr>
+          <a:lstStyle/>
+          <a:p>
+            <a:pPr algn="ctr">
+              <a:lnSpc>
+                <a:spcPct val="108000"/>
+              </a:lnSpc>
+              <a:spcBef>
+                <a:spcPts val="0"/>
+              </a:spcBef>
+              <a:spcAft>
+                <a:spcPts val="0"/>
+              </a:spcAft>
+            </a:pPr>
+            <a:r>
+              <a:rPr sz="1570" b="0" lang="pl-PL">
+                <a:solidFill>
+                  <a:srgbClr val="192F3C"/>
+                </a:solidFill>
+                <a:latin typeface="DejaVu Sans"/>
+              </a:rPr>
+              <a:t>Odp. 3</a:t>
+            </a:r>
+          </a:p>
+        </p:txBody>
+      </p:sp>
+      <p:sp>
+        <p:nvSpPr>
+          <p:cNvPr id="56" name="TextBox 55"/>
+          <p:cNvSpPr txBox="1"/>
+          <p:nvPr/>
+        </p:nvSpPr>
+        <p:spPr>
+          <a:xfrm>
+            <a:off x="612648" y="6876288"/>
+            <a:ext cx="13917168" cy="374904"/>
+          </a:xfrm>
+          <a:prstGeom prst="rect">
+            <a:avLst/>
+          </a:prstGeom>
+          <a:noFill/>
+        </p:spPr>
+        <p:txBody>
+          <a:bodyPr wrap="square" lIns="0" rIns="0" tIns="0" bIns="0" anchor="t">
+            <a:spAutoFit/>
+          </a:bodyPr>
+          <a:lstStyle/>
+          <a:p>
+            <a:pPr algn="l">
+              <a:lnSpc>
+                <a:spcPct val="108000"/>
+              </a:lnSpc>
+              <a:spcBef>
+                <a:spcPts val="0"/>
+              </a:spcBef>
+              <a:spcAft>
+                <a:spcPts val="0"/>
+              </a:spcAft>
+            </a:pPr>
+            <a:r>
+              <a:rPr sz="2200" b="1" lang="pl-PL">
+                <a:solidFill>
+                  <a:srgbClr val="006C86"/>
+                </a:solidFill>
+                <a:latin typeface="DejaVu Sans"/>
+              </a:rPr>
+              <a:t>Nowe wywołanie = wybrana historia + nowy prompt → model → odpowiedź</a:t>
+            </a:r>
+          </a:p>
+        </p:txBody>
+      </p:sp>
+      <p:sp>
+        <p:nvSpPr>
+          <p:cNvPr id="57" name="TextBox 56"/>
+          <p:cNvSpPr txBox="1"/>
+          <p:nvPr/>
+        </p:nvSpPr>
+        <p:spPr>
+          <a:xfrm>
+            <a:off x="612648" y="7434072"/>
+            <a:ext cx="13898880" cy="265176"/>
+          </a:xfrm>
+          <a:prstGeom prst="rect">
+            <a:avLst/>
+          </a:prstGeom>
+          <a:noFill/>
+        </p:spPr>
+        <p:txBody>
+          <a:bodyPr wrap="square" lIns="0" rIns="0" tIns="0" bIns="0" anchor="t">
+            <a:spAutoFit/>
+          </a:bodyPr>
+          <a:lstStyle/>
+          <a:p>
+            <a:pPr algn="l">
+              <a:lnSpc>
+                <a:spcPct val="108000"/>
+              </a:lnSpc>
+              <a:spcBef>
+                <a:spcPts val="0"/>
+              </a:spcBef>
+              <a:spcAft>
+                <a:spcPts val="0"/>
+              </a:spcAft>
+            </a:pPr>
+            <a:r>
+              <a:rPr sz="1380" b="0" lang="pl-PL">
+                <a:solidFill>
+                  <a:srgbClr val="536873"/>
+                </a:solidFill>
+                <a:latin typeface="DejaVu Sans"/>
+              </a:rPr>
+              <a:t>Schemat uproszczony: aplikacja może wybierać lub streszczać wcześniejsze wiadomości.</a:t>
+            </a:r>
+          </a:p>
+        </p:txBody>
+      </p:sp>
+      <p:sp>
+        <p:nvSpPr>
+          <p:cNvPr id="58" name="Rectangle 57"/>
+          <p:cNvSpPr/>
+          <p:nvPr/>
+        </p:nvSpPr>
+        <p:spPr>
+          <a:xfrm>
+            <a:off x="612648" y="7808975"/>
+            <a:ext cx="13395960" cy="374904"/>
+          </a:xfrm>
+          <a:prstGeom prst="rect">
+            <a:avLst/>
+          </a:prstGeom>
+          <a:solidFill>
+            <a:srgbClr val="ECE7F5"/>
+          </a:solidFill>
+          <a:ln>
+            <a:noFill/>
+          </a:ln>
+        </p:spPr>
+        <p:style>
+          <a:lnRef idx="1">
+            <a:schemeClr val="accent1"/>
+          </a:lnRef>
+          <a:fillRef idx="3">
+            <a:schemeClr val="accent1"/>
+          </a:fillRef>
+          <a:effectRef idx="2">
+            <a:schemeClr val="accent1"/>
+          </a:effectRef>
+          <a:fontRef idx="minor">
+            <a:schemeClr val="lt1"/>
+          </a:fontRef>
+        </p:style>
+        <p:txBody>
+          <a:bodyPr rtlCol="0" anchor="ctr"/>
+          <a:lstStyle/>
+          <a:p>
+            <a:pPr algn="ctr"/>
+          </a:p>
+        </p:txBody>
+      </p:sp>
+      <p:sp>
+        <p:nvSpPr>
+          <p:cNvPr id="59" name="TextBox 58"/>
+          <p:cNvSpPr txBox="1"/>
+          <p:nvPr/>
+        </p:nvSpPr>
+        <p:spPr>
+          <a:xfrm>
+            <a:off x="749808" y="7872983"/>
+            <a:ext cx="13121640" cy="210312"/>
+          </a:xfrm>
+          <a:prstGeom prst="rect">
+            <a:avLst/>
+          </a:prstGeom>
+          <a:noFill/>
+        </p:spPr>
+        <p:txBody>
+          <a:bodyPr wrap="square" lIns="0" rIns="0" tIns="0" bIns="0" anchor="t">
+            <a:spAutoFit/>
+          </a:bodyPr>
+          <a:lstStyle/>
+          <a:p>
+            <a:pPr algn="l">
+              <a:lnSpc>
+                <a:spcPct val="108000"/>
+              </a:lnSpc>
+              <a:spcBef>
+                <a:spcPts val="0"/>
+              </a:spcBef>
+              <a:spcAft>
+                <a:spcPts val="0"/>
+              </a:spcAft>
+            </a:pPr>
+            <a:r>
+              <a:rPr sz="1250" b="0" lang="pl-PL">
+                <a:solidFill>
+                  <a:srgbClr val="192F3C"/>
+                </a:solidFill>
+                <a:latin typeface="DejaVu Sans"/>
+              </a:rPr>
+              <a:t>Cache przyspiesza przetwarzanie prefiksu; nie jest trwałą pamięcią rozmowy ani uczeniem modelu.</a:t>
+            </a:r>
+          </a:p>
+        </p:txBody>
+      </p:sp>
+    </p:spTree>
+  </p:cSld>
+  <p:clrMapOvr>
+    <a:masterClrMapping/>
+  </p:clrMapOvr>
 </p:sld>
 </file>
 

--- a/docs/ABB_Workflow_Support_Slides.pptx
+++ b/docs/ABB_Workflow_Support_Slides.pptx
@@ -662,7 +662,7 @@
           <a:lstStyle/>
           <a:p>
             <a:r>
-              <a:t>Źródło: dostarczony chatgpt-astra-training.html, moduł „Stochasticity: One Prompt, Several Valid Answers”, slajdy „One Prompt, Several Valid Answers” i „Reduce Unwanted Variability”. Przykłady są ilustracjami, a nie zapisami pomiaru. Jasne instrukcje redukują niejednoznaczność, ale nie gwarantują identycznych ani poprawnych wyników. Powtarzana zgodność nie zastępuje weryfikacji.</a:t>
+              <a:t>Trzy przykładowe, autorskie odpowiedzi na to samo pytanie o dwutygodniową podróż do Tajlandii. Ilustrują różnice struktury, kolejności i stopnia doprecyzowania. Nie są zapisem zmierzonych wywołań modelu ani zweryfikowanym planem podróży. Inspiracja: dostarczony chatgpt-astra-training.html, moduł „Stochasticity: One Prompt, Several Valid Answers”.</a:t>
             </a:r>
           </a:p>
         </p:txBody>
@@ -9897,59 +9897,14 @@
       </p:sp>
       <p:sp>
         <p:nvSpPr>
-          <p:cNvPr id="6" name="TextBox 5"/>
-          <p:cNvSpPr txBox="1"/>
+          <p:cNvPr id="6" name="Rectangle 5"/>
+          <p:cNvSpPr/>
           <p:nvPr/>
         </p:nvSpPr>
         <p:spPr>
           <a:xfrm>
-            <a:off x="612648" y="1901952"/>
-            <a:ext cx="13853160" cy="566928"/>
-          </a:xfrm>
-          <a:prstGeom prst="rect">
-            <a:avLst/>
-          </a:prstGeom>
-          <a:noFill/>
-        </p:spPr>
-        <p:txBody>
-          <a:bodyPr wrap="square" lIns="0" rIns="0" tIns="0" bIns="0" anchor="t">
-            <a:spAutoFit/>
-          </a:bodyPr>
-          <a:lstStyle/>
-          <a:p>
-            <a:pPr algn="l">
-              <a:lnSpc>
-                <a:spcPct val="108000"/>
-              </a:lnSpc>
-              <a:spcBef>
-                <a:spcPts val="0"/>
-              </a:spcBef>
-              <a:spcAft>
-                <a:spcPts val="0"/>
-              </a:spcAft>
-            </a:pPr>
-            <a:r>
-              <a:rPr sz="2025" b="0" lang="pl-PL">
-                <a:solidFill>
-                  <a:srgbClr val="192F3C"/>
-                </a:solidFill>
-                <a:latin typeface="DejaVu Sans"/>
-              </a:rPr>
-              <a:t>Generowanie jest probabilistyczne: mogą zmieniać się słowa, kolejność i wnioski.</a:t>
-            </a:r>
-          </a:p>
-        </p:txBody>
-      </p:sp>
-      <p:sp>
-        <p:nvSpPr>
-          <p:cNvPr id="7" name="Rectangle 6"/>
-          <p:cNvSpPr/>
-          <p:nvPr/>
-        </p:nvSpPr>
-        <p:spPr>
-          <a:xfrm>
-            <a:off x="612648" y="2697480"/>
-            <a:ext cx="14017752" cy="731520"/>
+            <a:off x="612648" y="2075688"/>
+            <a:ext cx="4489704" cy="5687568"/>
           </a:xfrm>
           <a:prstGeom prst="rect">
             <a:avLst/>
@@ -9987,14 +9942,14 @@
       </p:sp>
       <p:sp>
         <p:nvSpPr>
-          <p:cNvPr id="8" name="TextBox 7"/>
+          <p:cNvPr id="7" name="TextBox 6"/>
           <p:cNvSpPr txBox="1"/>
           <p:nvPr/>
         </p:nvSpPr>
         <p:spPr>
           <a:xfrm>
-            <a:off x="832104" y="2880360"/>
-            <a:ext cx="13569696" cy="393192"/>
+            <a:off x="841248" y="2331720"/>
+            <a:ext cx="4032504" cy="402336"/>
           </a:xfrm>
           <a:prstGeom prst="rect">
             <a:avLst/>
@@ -10002,30 +9957,107 @@
           <a:noFill/>
         </p:spPr>
         <p:txBody>
-          <a:bodyPr wrap="square" lIns="0" rIns="0" tIns="0" bIns="0" anchor="t">
+          <a:bodyPr wrap="square" lIns="0" rIns="0" tIns="0" bIns="0">
             <a:spAutoFit/>
           </a:bodyPr>
           <a:lstStyle/>
           <a:p>
-            <a:pPr algn="l">
-              <a:lnSpc>
-                <a:spcPct val="108000"/>
-              </a:lnSpc>
-              <a:spcBef>
-                <a:spcPts val="0"/>
-              </a:spcBef>
-              <a:spcAft>
-                <a:spcPts val="0"/>
+            <a:pPr>
+              <a:lnSpc>
+                <a:spcPct val="115000"/>
+              </a:lnSpc>
+              <a:spcAft>
+                <a:spcPts val="1200"/>
               </a:spcAft>
             </a:pPr>
             <a:r>
-              <a:rPr sz="2050" b="1" lang="pl-PL">
+              <a:rPr sz="2300" b="1" lang="pl-PL">
+                <a:solidFill>
+                  <a:srgbClr val="006C86"/>
+                </a:solidFill>
+                <a:latin typeface="DejaVu Sans"/>
+              </a:rPr>
+              <a:t>Odpowiedź 1</a:t>
+            </a:r>
+          </a:p>
+        </p:txBody>
+      </p:sp>
+      <p:sp>
+        <p:nvSpPr>
+          <p:cNvPr id="8" name="TextBox 7"/>
+          <p:cNvSpPr txBox="1"/>
+          <p:nvPr/>
+        </p:nvSpPr>
+        <p:spPr>
+          <a:xfrm>
+            <a:off x="841248" y="2953512"/>
+            <a:ext cx="4032504" cy="4517136"/>
+          </a:xfrm>
+          <a:prstGeom prst="rect">
+            <a:avLst/>
+          </a:prstGeom>
+          <a:noFill/>
+        </p:spPr>
+        <p:txBody>
+          <a:bodyPr wrap="square" lIns="0" rIns="0" tIns="0" bIns="0">
+            <a:spAutoFit/>
+          </a:bodyPr>
+          <a:lstStyle/>
+          <a:p>
+            <a:pPr>
+              <a:lnSpc>
+                <a:spcPct val="115000"/>
+              </a:lnSpc>
+              <a:spcAft>
+                <a:spcPts val="1200"/>
+              </a:spcAft>
+            </a:pPr>
+            <a:r>
+              <a:rPr sz="1800" b="0" lang="pl-PL">
                 <a:solidFill>
                   <a:srgbClr val="192F3C"/>
                 </a:solidFill>
                 <a:latin typeface="DejaVu Sans"/>
               </a:rPr>
-              <a:t>„Zaplanuj dwa tygodnie w Tajlandii. Co warto zobaczyć?”</a:t>
+              <a:t>Zacznij od czterech dni w Bangkoku. Zobacz Wielki Pałac, świątynię Wat Phra Kaew i Wat Arun. Wieczorem odwiedź Chinatown.</a:t>
+            </a:r>
+          </a:p>
+          <a:p>
+            <a:pPr>
+              <a:lnSpc>
+                <a:spcPct val="115000"/>
+              </a:lnSpc>
+              <a:spcAft>
+                <a:spcPts val="1200"/>
+              </a:spcAft>
+            </a:pPr>
+            <a:r>
+              <a:rPr sz="1800" b="0" lang="pl-PL">
+                <a:solidFill>
+                  <a:srgbClr val="192F3C"/>
+                </a:solidFill>
+                <a:latin typeface="DejaVu Sans"/>
+              </a:rPr>
+              <a:t>Następnie spędź cztery dni w Chiang Mai: poznaj stare miasto, odwiedź Doi Suthep i wybierz się na warsztaty kuchni tajskiej.</a:t>
+            </a:r>
+          </a:p>
+          <a:p>
+            <a:pPr>
+              <a:lnSpc>
+                <a:spcPct val="115000"/>
+              </a:lnSpc>
+              <a:spcAft>
+                <a:spcPts val="1200"/>
+              </a:spcAft>
+            </a:pPr>
+            <a:r>
+              <a:rPr sz="1800" b="0" lang="pl-PL">
+                <a:solidFill>
+                  <a:srgbClr val="192F3C"/>
+                </a:solidFill>
+                <a:latin typeface="DejaVu Sans"/>
+              </a:rPr>
+              <a:t>Ostatnie sześć dni przeznacz na Krabi i pobliskie wyspy. Połącz plażowanie z wycieczką łodzią i zostaw czas na odpoczynek.</a:t>
             </a:r>
           </a:p>
         </p:txBody>
@@ -10038,8 +10070,8 @@
         </p:nvSpPr>
         <p:spPr>
           <a:xfrm>
-            <a:off x="612648" y="3694176"/>
-            <a:ext cx="4489704" cy="1508760"/>
+            <a:off x="5376672" y="2075688"/>
+            <a:ext cx="4489704" cy="5687568"/>
           </a:xfrm>
           <a:prstGeom prst="rect">
             <a:avLst/>
@@ -10083,8 +10115,8 @@
         </p:nvSpPr>
         <p:spPr>
           <a:xfrm>
-            <a:off x="813816" y="3867912"/>
-            <a:ext cx="594360" cy="365760"/>
+            <a:off x="5605272" y="2331720"/>
+            <a:ext cx="4032504" cy="402336"/>
           </a:xfrm>
           <a:prstGeom prst="rect">
             <a:avLst/>
@@ -10092,30 +10124,27 @@
           <a:noFill/>
         </p:spPr>
         <p:txBody>
-          <a:bodyPr wrap="square" lIns="0" rIns="0" tIns="0" bIns="0" anchor="t">
+          <a:bodyPr wrap="square" lIns="0" rIns="0" tIns="0" bIns="0">
             <a:spAutoFit/>
           </a:bodyPr>
           <a:lstStyle/>
           <a:p>
-            <a:pPr algn="l">
-              <a:lnSpc>
-                <a:spcPct val="108000"/>
-              </a:lnSpc>
-              <a:spcBef>
-                <a:spcPts val="0"/>
-              </a:spcBef>
-              <a:spcAft>
-                <a:spcPts val="0"/>
+            <a:pPr>
+              <a:lnSpc>
+                <a:spcPct val="115000"/>
+              </a:lnSpc>
+              <a:spcAft>
+                <a:spcPts val="1200"/>
               </a:spcAft>
             </a:pPr>
             <a:r>
-              <a:rPr sz="2400" b="1" lang="pl-PL">
+              <a:rPr sz="2300" b="1" lang="pl-PL">
                 <a:solidFill>
                   <a:srgbClr val="006C86"/>
                 </a:solidFill>
                 <a:latin typeface="DejaVu Sans"/>
               </a:rPr>
-              <a:t>01</a:t>
+              <a:t>Odpowiedź 2</a:t>
             </a:r>
           </a:p>
         </p:txBody>
@@ -10128,8 +10157,8 @@
         </p:nvSpPr>
         <p:spPr>
           <a:xfrm>
-            <a:off x="1527048" y="3886200"/>
-            <a:ext cx="3346704" cy="365760"/>
+            <a:off x="5605272" y="2953512"/>
+            <a:ext cx="4032504" cy="4517136"/>
           </a:xfrm>
           <a:prstGeom prst="rect">
             <a:avLst/>
@@ -10137,111 +10166,79 @@
           <a:noFill/>
         </p:spPr>
         <p:txBody>
-          <a:bodyPr wrap="square" lIns="0" rIns="0" tIns="0" bIns="0" anchor="t">
+          <a:bodyPr wrap="square" lIns="0" rIns="0" tIns="0" bIns="0">
             <a:spAutoFit/>
           </a:bodyPr>
           <a:lstStyle/>
           <a:p>
-            <a:pPr algn="l">
-              <a:lnSpc>
-                <a:spcPct val="108000"/>
-              </a:lnSpc>
-              <a:spcBef>
-                <a:spcPts val="0"/>
-              </a:spcBef>
-              <a:spcAft>
-                <a:spcPts val="0"/>
+            <a:pPr>
+              <a:lnSpc>
+                <a:spcPct val="115000"/>
+              </a:lnSpc>
+              <a:spcAft>
+                <a:spcPts val="1200"/>
               </a:spcAft>
             </a:pPr>
             <a:r>
-              <a:rPr sz="1900" b="1" lang="pl-PL">
+              <a:rPr sz="1800" b="0" lang="pl-PL">
                 <a:solidFill>
                   <a:srgbClr val="192F3C"/>
                 </a:solidFill>
                 <a:latin typeface="DejaVu Sans"/>
               </a:rPr>
-              <a:t>Plan według miejsc</a:t>
-            </a:r>
-          </a:p>
-        </p:txBody>
-      </p:sp>
-      <p:sp>
-        <p:nvSpPr>
-          <p:cNvPr id="12" name="TextBox 11"/>
-          <p:cNvSpPr txBox="1"/>
+              <a:t>Połącz kulturę, przyrodę i plaże. Najpierw zdecyduj, czy wolisz intensywne zwiedzanie, czy spokojniejszy wypoczynek.</a:t>
+            </a:r>
+          </a:p>
+          <a:p>
+            <a:pPr>
+              <a:lnSpc>
+                <a:spcPct val="115000"/>
+              </a:lnSpc>
+              <a:spcAft>
+                <a:spcPts val="1200"/>
+              </a:spcAft>
+            </a:pPr>
+            <a:r>
+              <a:rPr sz="1800" b="0" lang="pl-PL">
+                <a:solidFill>
+                  <a:srgbClr val="192F3C"/>
+                </a:solidFill>
+                <a:latin typeface="DejaVu Sans"/>
+              </a:rPr>
+              <a:t>Na kulturę wybierz Bangkok i dawną stolicę Ayutthayę. Na przyrodę — Chiang Mai i górskie krajobrazy północnej Tajlandii.</a:t>
+            </a:r>
+          </a:p>
+          <a:p>
+            <a:pPr>
+              <a:lnSpc>
+                <a:spcPct val="115000"/>
+              </a:lnSpc>
+              <a:spcAft>
+                <a:spcPts val="1200"/>
+              </a:spcAft>
+            </a:pPr>
+            <a:r>
+              <a:rPr sz="1800" b="0" lang="pl-PL">
+                <a:solidFill>
+                  <a:srgbClr val="192F3C"/>
+                </a:solidFill>
+                <a:latin typeface="DejaVu Sans"/>
+              </a:rPr>
+              <a:t>Na zakończenie wybierz Krabi. Ogranicz przejazdy, by mieć więcej czasu na miejscu. Jaki masz budżet i kiedy chcesz jechać?</a:t>
+            </a:r>
+          </a:p>
+        </p:txBody>
+      </p:sp>
+      <p:sp>
+        <p:nvSpPr>
+          <p:cNvPr id="12" name="Rectangle 11"/>
+          <p:cNvSpPr/>
           <p:nvPr/>
         </p:nvSpPr>
         <p:spPr>
           <a:xfrm>
-            <a:off x="822960" y="4434840"/>
-            <a:ext cx="4041648" cy="576072"/>
-          </a:xfrm>
-          <a:prstGeom prst="rect">
-            <a:avLst/>
-          </a:prstGeom>
-          <a:noFill/>
-        </p:spPr>
-        <p:txBody>
-          <a:bodyPr wrap="square" lIns="0" rIns="0" tIns="0" bIns="0" anchor="t">
-            <a:spAutoFit/>
-          </a:bodyPr>
-          <a:lstStyle/>
-          <a:p>
-            <a:pPr algn="l">
-              <a:lnSpc>
-                <a:spcPct val="108000"/>
-              </a:lnSpc>
-              <a:spcBef>
-                <a:spcPts val="0"/>
-              </a:spcBef>
-              <a:spcAft>
-                <a:spcPts val="0"/>
-              </a:spcAft>
-            </a:pPr>
-            <a:r>
-              <a:rPr sz="1750" b="0" lang="pl-PL">
-                <a:solidFill>
-                  <a:srgbClr val="192F3C"/>
-                </a:solidFill>
-                <a:latin typeface="DejaVu Sans"/>
-              </a:rPr>
-              <a:t>Bangkok → północ Tajlandii</a:t>
-            </a:r>
-          </a:p>
-          <a:p>
-            <a:pPr algn="l">
-              <a:lnSpc>
-                <a:spcPct val="108000"/>
-              </a:lnSpc>
-              <a:spcBef>
-                <a:spcPts val="0"/>
-              </a:spcBef>
-              <a:spcAft>
-                <a:spcPts val="0"/>
-              </a:spcAft>
-            </a:pPr>
-            <a:r>
-              <a:rPr sz="1750" b="0" lang="pl-PL">
-                <a:solidFill>
-                  <a:srgbClr val="192F3C"/>
-                </a:solidFill>
-                <a:latin typeface="DejaVu Sans"/>
-              </a:rPr>
-              <a:t>→ plaże i wyspy</a:t>
-            </a:r>
-          </a:p>
-        </p:txBody>
-      </p:sp>
-      <p:sp>
-        <p:nvSpPr>
-          <p:cNvPr id="13" name="Rectangle 12"/>
-          <p:cNvSpPr/>
-          <p:nvPr/>
-        </p:nvSpPr>
-        <p:spPr>
-          <a:xfrm>
-            <a:off x="5376672" y="3694176"/>
-            <a:ext cx="4489704" cy="1508760"/>
+            <a:off x="10140696" y="2075688"/>
+            <a:ext cx="4489704" cy="5687568"/>
           </a:xfrm>
           <a:prstGeom prst="rect">
             <a:avLst/>
@@ -10279,14 +10276,14 @@
       </p:sp>
       <p:sp>
         <p:nvSpPr>
-          <p:cNvPr id="14" name="TextBox 13"/>
+          <p:cNvPr id="13" name="TextBox 12"/>
           <p:cNvSpPr txBox="1"/>
           <p:nvPr/>
         </p:nvSpPr>
         <p:spPr>
           <a:xfrm>
-            <a:off x="5577840" y="3867912"/>
-            <a:ext cx="594360" cy="365760"/>
+            <a:off x="10369296" y="2331720"/>
+            <a:ext cx="4032504" cy="402336"/>
           </a:xfrm>
           <a:prstGeom prst="rect">
             <a:avLst/>
@@ -10294,44 +10291,41 @@
           <a:noFill/>
         </p:spPr>
         <p:txBody>
-          <a:bodyPr wrap="square" lIns="0" rIns="0" tIns="0" bIns="0" anchor="t">
+          <a:bodyPr wrap="square" lIns="0" rIns="0" tIns="0" bIns="0">
             <a:spAutoFit/>
           </a:bodyPr>
           <a:lstStyle/>
           <a:p>
-            <a:pPr algn="l">
-              <a:lnSpc>
-                <a:spcPct val="108000"/>
-              </a:lnSpc>
-              <a:spcBef>
-                <a:spcPts val="0"/>
-              </a:spcBef>
-              <a:spcAft>
-                <a:spcPts val="0"/>
+            <a:pPr>
+              <a:lnSpc>
+                <a:spcPct val="115000"/>
+              </a:lnSpc>
+              <a:spcAft>
+                <a:spcPts val="1200"/>
               </a:spcAft>
             </a:pPr>
             <a:r>
-              <a:rPr sz="2400" b="1" lang="pl-PL">
+              <a:rPr sz="2300" b="1" lang="pl-PL">
                 <a:solidFill>
                   <a:srgbClr val="006C86"/>
                 </a:solidFill>
                 <a:latin typeface="DejaVu Sans"/>
               </a:rPr>
-              <a:t>02</a:t>
-            </a:r>
-          </a:p>
-        </p:txBody>
-      </p:sp>
-      <p:sp>
-        <p:nvSpPr>
-          <p:cNvPr id="15" name="TextBox 14"/>
+              <a:t>Odpowiedź 3</a:t>
+            </a:r>
+          </a:p>
+        </p:txBody>
+      </p:sp>
+      <p:sp>
+        <p:nvSpPr>
+          <p:cNvPr id="14" name="TextBox 13"/>
           <p:cNvSpPr txBox="1"/>
           <p:nvPr/>
         </p:nvSpPr>
         <p:spPr>
           <a:xfrm>
-            <a:off x="6291072" y="3886200"/>
-            <a:ext cx="3346704" cy="365760"/>
+            <a:off x="10369296" y="2953512"/>
+            <a:ext cx="4032504" cy="4517136"/>
           </a:xfrm>
           <a:prstGeom prst="rect">
             <a:avLst/>
@@ -10339,749 +10333,103 @@
           <a:noFill/>
         </p:spPr>
         <p:txBody>
-          <a:bodyPr wrap="square" lIns="0" rIns="0" tIns="0" bIns="0" anchor="t">
+          <a:bodyPr wrap="square" lIns="0" rIns="0" tIns="0" bIns="0">
             <a:spAutoFit/>
           </a:bodyPr>
           <a:lstStyle/>
           <a:p>
-            <a:pPr algn="l">
-              <a:lnSpc>
-                <a:spcPct val="108000"/>
-              </a:lnSpc>
-              <a:spcBef>
-                <a:spcPts val="0"/>
-              </a:spcBef>
-              <a:spcAft>
-                <a:spcPts val="0"/>
+            <a:pPr>
+              <a:lnSpc>
+                <a:spcPct val="115000"/>
+              </a:lnSpc>
+              <a:spcAft>
+                <a:spcPts val="1200"/>
               </a:spcAft>
             </a:pPr>
             <a:r>
-              <a:rPr sz="1900" b="1" lang="pl-PL">
+              <a:rPr sz="1800" b="0" lang="pl-PL">
                 <a:solidFill>
                   <a:srgbClr val="192F3C"/>
                 </a:solidFill>
                 <a:latin typeface="DejaVu Sans"/>
               </a:rPr>
-              <a:t>Najpierw doprecyzowanie</a:t>
-            </a:r>
-          </a:p>
-        </p:txBody>
-      </p:sp>
-      <p:sp>
-        <p:nvSpPr>
-          <p:cNvPr id="16" name="TextBox 15"/>
-          <p:cNvSpPr txBox="1"/>
-          <p:nvPr/>
-        </p:nvSpPr>
-        <p:spPr>
-          <a:xfrm>
-            <a:off x="5586984" y="4434840"/>
-            <a:ext cx="4041648" cy="576072"/>
-          </a:xfrm>
-          <a:prstGeom prst="rect">
-            <a:avLst/>
-          </a:prstGeom>
-          <a:noFill/>
-        </p:spPr>
-        <p:txBody>
-          <a:bodyPr wrap="square" lIns="0" rIns="0" tIns="0" bIns="0" anchor="t">
-            <a:spAutoFit/>
-          </a:bodyPr>
-          <a:lstStyle/>
+              <a:t>Dni 1–3: Bangkok — świątynie, rejs po rzece i lokalna kuchnia.</a:t>
+            </a:r>
+          </a:p>
           <a:p>
-            <a:pPr algn="l">
-              <a:lnSpc>
-                <a:spcPct val="108000"/>
-              </a:lnSpc>
-              <a:spcBef>
-                <a:spcPts val="0"/>
-              </a:spcBef>
-              <a:spcAft>
-                <a:spcPts val="0"/>
+            <a:pPr>
+              <a:lnSpc>
+                <a:spcPct val="115000"/>
+              </a:lnSpc>
+              <a:spcAft>
+                <a:spcPts val="1200"/>
               </a:spcAft>
             </a:pPr>
             <a:r>
-              <a:rPr sz="1750" b="0" lang="pl-PL">
+              <a:rPr sz="1800" b="0" lang="pl-PL">
                 <a:solidFill>
                   <a:srgbClr val="192F3C"/>
                 </a:solidFill>
                 <a:latin typeface="DejaVu Sans"/>
               </a:rPr>
-              <a:t>Pytania o zainteresowania,</a:t>
+              <a:t>Dzień 4: wycieczka do Ayutthayi i powrót do Bangkoku.</a:t>
             </a:r>
           </a:p>
           <a:p>
-            <a:pPr algn="l">
-              <a:lnSpc>
-                <a:spcPct val="108000"/>
-              </a:lnSpc>
-              <a:spcBef>
-                <a:spcPts val="0"/>
-              </a:spcBef>
-              <a:spcAft>
-                <a:spcPts val="0"/>
+            <a:pPr>
+              <a:lnSpc>
+                <a:spcPct val="115000"/>
+              </a:lnSpc>
+              <a:spcAft>
+                <a:spcPts val="1200"/>
               </a:spcAft>
             </a:pPr>
             <a:r>
-              <a:rPr sz="1750" b="0" lang="pl-PL">
+              <a:rPr sz="1800" b="0" lang="pl-PL">
                 <a:solidFill>
                   <a:srgbClr val="192F3C"/>
                 </a:solidFill>
                 <a:latin typeface="DejaVu Sans"/>
               </a:rPr>
-              <a:t>budżet i tempo podróży</a:t>
-            </a:r>
-          </a:p>
-        </p:txBody>
-      </p:sp>
-      <p:sp>
-        <p:nvSpPr>
-          <p:cNvPr id="17" name="Rectangle 16"/>
-          <p:cNvSpPr/>
-          <p:nvPr/>
-        </p:nvSpPr>
-        <p:spPr>
-          <a:xfrm>
-            <a:off x="10140696" y="3694176"/>
-            <a:ext cx="4489704" cy="1508760"/>
-          </a:xfrm>
-          <a:prstGeom prst="rect">
-            <a:avLst/>
-          </a:prstGeom>
-          <a:solidFill>
-            <a:srgbClr val="ECF4F6"/>
-          </a:solidFill>
-          <a:ln w="12700">
-            <a:solidFill>
-              <a:srgbClr val="BFD4DE"/>
-            </a:solidFill>
-          </a:ln>
-        </p:spPr>
-        <p:style>
-          <a:lnRef idx="1">
-            <a:schemeClr val="accent1"/>
-          </a:lnRef>
-          <a:fillRef idx="3">
-            <a:schemeClr val="accent1"/>
-          </a:fillRef>
-          <a:effectRef idx="2">
-            <a:schemeClr val="accent1"/>
-          </a:effectRef>
-          <a:fontRef idx="minor">
-            <a:schemeClr val="lt1"/>
-          </a:fontRef>
-        </p:style>
-        <p:txBody>
-          <a:bodyPr rtlCol="0" anchor="ctr"/>
-          <a:lstStyle/>
+              <a:t>Dni 5–8: Chiang Mai — stare miasto, Doi Suthep i jednodniowy wypad w okolice.</a:t>
+            </a:r>
+          </a:p>
           <a:p>
-            <a:pPr algn="ctr"/>
-          </a:p>
-        </p:txBody>
-      </p:sp>
-      <p:sp>
-        <p:nvSpPr>
-          <p:cNvPr id="18" name="TextBox 17"/>
-          <p:cNvSpPr txBox="1"/>
-          <p:nvPr/>
-        </p:nvSpPr>
-        <p:spPr>
-          <a:xfrm>
-            <a:off x="10341864" y="3867912"/>
-            <a:ext cx="594360" cy="365760"/>
-          </a:xfrm>
-          <a:prstGeom prst="rect">
-            <a:avLst/>
-          </a:prstGeom>
-          <a:noFill/>
-        </p:spPr>
-        <p:txBody>
-          <a:bodyPr wrap="square" lIns="0" rIns="0" tIns="0" bIns="0" anchor="t">
-            <a:spAutoFit/>
-          </a:bodyPr>
-          <a:lstStyle/>
+            <a:pPr>
+              <a:lnSpc>
+                <a:spcPct val="115000"/>
+              </a:lnSpc>
+              <a:spcAft>
+                <a:spcPts val="1200"/>
+              </a:spcAft>
+            </a:pPr>
+            <a:r>
+              <a:rPr sz="1800" b="0" lang="pl-PL">
+                <a:solidFill>
+                  <a:srgbClr val="192F3C"/>
+                </a:solidFill>
+                <a:latin typeface="DejaVu Sans"/>
+              </a:rPr>
+              <a:t>Dni 9–13: Krabi — Railay, wycieczka na wyspy i odpoczynek na plaży.</a:t>
+            </a:r>
+          </a:p>
           <a:p>
-            <a:pPr algn="l">
-              <a:lnSpc>
-                <a:spcPct val="108000"/>
-              </a:lnSpc>
-              <a:spcBef>
-                <a:spcPts val="0"/>
-              </a:spcBef>
-              <a:spcAft>
-                <a:spcPts val="0"/>
+            <a:pPr>
+              <a:lnSpc>
+                <a:spcPct val="115000"/>
+              </a:lnSpc>
+              <a:spcAft>
+                <a:spcPts val="1200"/>
               </a:spcAft>
             </a:pPr>
             <a:r>
-              <a:rPr sz="2400" b="1" lang="pl-PL">
-                <a:solidFill>
-                  <a:srgbClr val="006C86"/>
-                </a:solidFill>
-                <a:latin typeface="DejaVu Sans"/>
-              </a:rPr>
-              <a:t>03</a:t>
-            </a:r>
-          </a:p>
-        </p:txBody>
-      </p:sp>
-      <p:sp>
-        <p:nvSpPr>
-          <p:cNvPr id="19" name="TextBox 18"/>
-          <p:cNvSpPr txBox="1"/>
-          <p:nvPr/>
-        </p:nvSpPr>
-        <p:spPr>
-          <a:xfrm>
-            <a:off x="11055096" y="3886200"/>
-            <a:ext cx="3346704" cy="365760"/>
-          </a:xfrm>
-          <a:prstGeom prst="rect">
-            <a:avLst/>
-          </a:prstGeom>
-          <a:noFill/>
-        </p:spPr>
-        <p:txBody>
-          <a:bodyPr wrap="square" lIns="0" rIns="0" tIns="0" bIns="0" anchor="t">
-            <a:spAutoFit/>
-          </a:bodyPr>
-          <a:lstStyle/>
-          <a:p>
-            <a:pPr algn="l">
-              <a:lnSpc>
-                <a:spcPct val="108000"/>
-              </a:lnSpc>
-              <a:spcBef>
-                <a:spcPts val="0"/>
-              </a:spcBef>
-              <a:spcAft>
-                <a:spcPts val="0"/>
-              </a:spcAft>
-            </a:pPr>
-            <a:r>
-              <a:rPr sz="1900" b="1" lang="pl-PL">
+              <a:rPr sz="1800" b="0" lang="pl-PL">
                 <a:solidFill>
                   <a:srgbClr val="192F3C"/>
                 </a:solidFill>
                 <a:latin typeface="DejaVu Sans"/>
               </a:rPr>
-              <a:t>Plan dzień po dniu</a:t>
-            </a:r>
-          </a:p>
-        </p:txBody>
-      </p:sp>
-      <p:sp>
-        <p:nvSpPr>
-          <p:cNvPr id="20" name="TextBox 19"/>
-          <p:cNvSpPr txBox="1"/>
-          <p:nvPr/>
-        </p:nvSpPr>
-        <p:spPr>
-          <a:xfrm>
-            <a:off x="10351008" y="4434840"/>
-            <a:ext cx="4041648" cy="576072"/>
-          </a:xfrm>
-          <a:prstGeom prst="rect">
-            <a:avLst/>
-          </a:prstGeom>
-          <a:noFill/>
-        </p:spPr>
-        <p:txBody>
-          <a:bodyPr wrap="square" lIns="0" rIns="0" tIns="0" bIns="0" anchor="t">
-            <a:spAutoFit/>
-          </a:bodyPr>
-          <a:lstStyle/>
-          <a:p>
-            <a:pPr algn="l">
-              <a:lnSpc>
-                <a:spcPct val="108000"/>
-              </a:lnSpc>
-              <a:spcBef>
-                <a:spcPts val="0"/>
-              </a:spcBef>
-              <a:spcAft>
-                <a:spcPts val="0"/>
-              </a:spcAft>
-            </a:pPr>
-            <a:r>
-              <a:rPr sz="1750" b="0" lang="pl-PL">
-                <a:solidFill>
-                  <a:srgbClr val="192F3C"/>
-                </a:solidFill>
-                <a:latin typeface="DejaVu Sans"/>
-              </a:rPr>
-              <a:t>Bangkok → Chiang Mai → wyspy,</a:t>
-            </a:r>
-          </a:p>
-          <a:p>
-            <a:pPr algn="l">
-              <a:lnSpc>
-                <a:spcPct val="108000"/>
-              </a:lnSpc>
-              <a:spcBef>
-                <a:spcPts val="0"/>
-              </a:spcBef>
-              <a:spcAft>
-                <a:spcPts val="0"/>
-              </a:spcAft>
-            </a:pPr>
-            <a:r>
-              <a:rPr sz="1750" b="0" lang="pl-PL">
-                <a:solidFill>
-                  <a:srgbClr val="192F3C"/>
-                </a:solidFill>
-                <a:latin typeface="DejaVu Sans"/>
-              </a:rPr>
-              <a:t>z podziałem na dni</a:t>
-            </a:r>
-          </a:p>
-        </p:txBody>
-      </p:sp>
-      <p:sp>
-        <p:nvSpPr>
-          <p:cNvPr id="21" name="TextBox 20"/>
-          <p:cNvSpPr txBox="1"/>
-          <p:nvPr/>
-        </p:nvSpPr>
-        <p:spPr>
-          <a:xfrm>
-            <a:off x="612648" y="5431536"/>
-            <a:ext cx="13898880" cy="292608"/>
-          </a:xfrm>
-          <a:prstGeom prst="rect">
-            <a:avLst/>
-          </a:prstGeom>
-          <a:noFill/>
-        </p:spPr>
-        <p:txBody>
-          <a:bodyPr wrap="square" lIns="0" rIns="0" tIns="0" bIns="0" anchor="t">
-            <a:spAutoFit/>
-          </a:bodyPr>
-          <a:lstStyle/>
-          <a:p>
-            <a:pPr algn="l">
-              <a:lnSpc>
-                <a:spcPct val="108000"/>
-              </a:lnSpc>
-              <a:spcBef>
-                <a:spcPts val="0"/>
-              </a:spcBef>
-              <a:spcAft>
-                <a:spcPts val="0"/>
-              </a:spcAft>
-            </a:pPr>
-            <a:r>
-              <a:rPr sz="1400" b="0" lang="pl-PL">
-                <a:solidFill>
-                  <a:srgbClr val="536873"/>
-                </a:solidFill>
-                <a:latin typeface="DejaVu Sans"/>
-              </a:rPr>
-              <a:t>Przykłady poglądowe — poprawność sprawdzamy według wymagań i dowodów.</a:t>
-            </a:r>
-          </a:p>
-        </p:txBody>
-      </p:sp>
-      <p:sp>
-        <p:nvSpPr>
-          <p:cNvPr id="22" name="TextBox 21"/>
-          <p:cNvSpPr txBox="1"/>
-          <p:nvPr/>
-        </p:nvSpPr>
-        <p:spPr>
-          <a:xfrm>
-            <a:off x="612648" y="5952744"/>
-            <a:ext cx="13898880" cy="384048"/>
-          </a:xfrm>
-          <a:prstGeom prst="rect">
-            <a:avLst/>
-          </a:prstGeom>
-          <a:noFill/>
-        </p:spPr>
-        <p:txBody>
-          <a:bodyPr wrap="square" lIns="0" rIns="0" tIns="0" bIns="0" anchor="t">
-            <a:spAutoFit/>
-          </a:bodyPr>
-          <a:lstStyle/>
-          <a:p>
-            <a:pPr algn="l">
-              <a:lnSpc>
-                <a:spcPct val="108000"/>
-              </a:lnSpc>
-              <a:spcBef>
-                <a:spcPts val="0"/>
-              </a:spcBef>
-              <a:spcAft>
-                <a:spcPts val="0"/>
-              </a:spcAft>
-            </a:pPr>
-            <a:r>
-              <a:rPr sz="2300" b="1" lang="pl-PL">
-                <a:solidFill>
-                  <a:srgbClr val="006C86"/>
-                </a:solidFill>
-                <a:latin typeface="DejaVu Sans"/>
-              </a:rPr>
-              <a:t>Jak ograniczyć niepożądaną zmienność?</a:t>
-            </a:r>
-          </a:p>
-        </p:txBody>
-      </p:sp>
-      <p:sp>
-        <p:nvSpPr>
-          <p:cNvPr id="23" name="TextBox 22"/>
-          <p:cNvSpPr txBox="1"/>
-          <p:nvPr/>
-        </p:nvSpPr>
-        <p:spPr>
-          <a:xfrm>
-            <a:off x="612648" y="6574536"/>
-            <a:ext cx="3218688" cy="347472"/>
-          </a:xfrm>
-          <a:prstGeom prst="rect">
-            <a:avLst/>
-          </a:prstGeom>
-          <a:noFill/>
-        </p:spPr>
-        <p:txBody>
-          <a:bodyPr wrap="square" lIns="0" rIns="0" tIns="0" bIns="0" anchor="t">
-            <a:spAutoFit/>
-          </a:bodyPr>
-          <a:lstStyle/>
-          <a:p>
-            <a:pPr algn="l">
-              <a:lnSpc>
-                <a:spcPct val="108000"/>
-              </a:lnSpc>
-              <a:spcBef>
-                <a:spcPts val="0"/>
-              </a:spcBef>
-              <a:spcAft>
-                <a:spcPts val="0"/>
-              </a:spcAft>
-            </a:pPr>
-            <a:r>
-              <a:rPr sz="1739" b="1" lang="pl-PL">
-                <a:solidFill>
-                  <a:srgbClr val="006C86"/>
-                </a:solidFill>
-                <a:latin typeface="DejaVu Sans"/>
-              </a:rPr>
-              <a:t>Jedno zadanie na prompt</a:t>
-            </a:r>
-          </a:p>
-        </p:txBody>
-      </p:sp>
-      <p:sp>
-        <p:nvSpPr>
-          <p:cNvPr id="24" name="TextBox 23"/>
-          <p:cNvSpPr txBox="1"/>
-          <p:nvPr/>
-        </p:nvSpPr>
-        <p:spPr>
-          <a:xfrm>
-            <a:off x="612648" y="7059168"/>
-            <a:ext cx="3200400" cy="630936"/>
-          </a:xfrm>
-          <a:prstGeom prst="rect">
-            <a:avLst/>
-          </a:prstGeom>
-          <a:noFill/>
-        </p:spPr>
-        <p:txBody>
-          <a:bodyPr wrap="square" lIns="0" rIns="0" tIns="0" bIns="0" anchor="t">
-            <a:spAutoFit/>
-          </a:bodyPr>
-          <a:lstStyle/>
-          <a:p>
-            <a:pPr algn="l">
-              <a:lnSpc>
-                <a:spcPct val="108000"/>
-              </a:lnSpc>
-              <a:spcBef>
-                <a:spcPts val="0"/>
-              </a:spcBef>
-              <a:spcAft>
-                <a:spcPts val="0"/>
-              </a:spcAft>
-            </a:pPr>
-            <a:r>
-              <a:rPr sz="1620" b="0" lang="pl-PL">
-                <a:solidFill>
-                  <a:srgbClr val="192F3C"/>
-                </a:solidFill>
-                <a:latin typeface="DejaVu Sans"/>
-              </a:rPr>
-              <a:t>Dziel pracę na małe, jasno określone kroki.</a:t>
-            </a:r>
-          </a:p>
-        </p:txBody>
-      </p:sp>
-      <p:sp>
-        <p:nvSpPr>
-          <p:cNvPr id="25" name="TextBox 24"/>
-          <p:cNvSpPr txBox="1"/>
-          <p:nvPr/>
-        </p:nvSpPr>
-        <p:spPr>
-          <a:xfrm>
-            <a:off x="4187952" y="6574536"/>
-            <a:ext cx="3218688" cy="347472"/>
-          </a:xfrm>
-          <a:prstGeom prst="rect">
-            <a:avLst/>
-          </a:prstGeom>
-          <a:noFill/>
-        </p:spPr>
-        <p:txBody>
-          <a:bodyPr wrap="square" lIns="0" rIns="0" tIns="0" bIns="0" anchor="t">
-            <a:spAutoFit/>
-          </a:bodyPr>
-          <a:lstStyle/>
-          <a:p>
-            <a:pPr algn="l">
-              <a:lnSpc>
-                <a:spcPct val="108000"/>
-              </a:lnSpc>
-              <a:spcBef>
-                <a:spcPts val="0"/>
-              </a:spcBef>
-              <a:spcAft>
-                <a:spcPts val="0"/>
-              </a:spcAft>
-            </a:pPr>
-            <a:r>
-              <a:rPr sz="1739" b="1" lang="pl-PL">
-                <a:solidFill>
-                  <a:srgbClr val="006C86"/>
-                </a:solidFill>
-                <a:latin typeface="DejaVu Sans"/>
-              </a:rPr>
-              <a:t>Precyzyjne kryteria</a:t>
-            </a:r>
-          </a:p>
-        </p:txBody>
-      </p:sp>
-      <p:sp>
-        <p:nvSpPr>
-          <p:cNvPr id="26" name="TextBox 25"/>
-          <p:cNvSpPr txBox="1"/>
-          <p:nvPr/>
-        </p:nvSpPr>
-        <p:spPr>
-          <a:xfrm>
-            <a:off x="4187952" y="7059168"/>
-            <a:ext cx="3200400" cy="630936"/>
-          </a:xfrm>
-          <a:prstGeom prst="rect">
-            <a:avLst/>
-          </a:prstGeom>
-          <a:noFill/>
-        </p:spPr>
-        <p:txBody>
-          <a:bodyPr wrap="square" lIns="0" rIns="0" tIns="0" bIns="0" anchor="t">
-            <a:spAutoFit/>
-          </a:bodyPr>
-          <a:lstStyle/>
-          <a:p>
-            <a:pPr algn="l">
-              <a:lnSpc>
-                <a:spcPct val="108000"/>
-              </a:lnSpc>
-              <a:spcBef>
-                <a:spcPts val="0"/>
-              </a:spcBef>
-              <a:spcAft>
-                <a:spcPts val="0"/>
-              </a:spcAft>
-            </a:pPr>
-            <a:r>
-              <a:rPr sz="1620" b="0" lang="pl-PL">
-                <a:solidFill>
-                  <a:srgbClr val="192F3C"/>
-                </a:solidFill>
-                <a:latin typeface="DejaVu Sans"/>
-              </a:rPr>
-              <a:t>Określ źródła, format i warunki odbioru.</a:t>
-            </a:r>
-          </a:p>
-        </p:txBody>
-      </p:sp>
-      <p:sp>
-        <p:nvSpPr>
-          <p:cNvPr id="27" name="TextBox 26"/>
-          <p:cNvSpPr txBox="1"/>
-          <p:nvPr/>
-        </p:nvSpPr>
-        <p:spPr>
-          <a:xfrm>
-            <a:off x="7772400" y="6574536"/>
-            <a:ext cx="3218688" cy="347472"/>
-          </a:xfrm>
-          <a:prstGeom prst="rect">
-            <a:avLst/>
-          </a:prstGeom>
-          <a:noFill/>
-        </p:spPr>
-        <p:txBody>
-          <a:bodyPr wrap="square" lIns="0" rIns="0" tIns="0" bIns="0" anchor="t">
-            <a:spAutoFit/>
-          </a:bodyPr>
-          <a:lstStyle/>
-          <a:p>
-            <a:pPr algn="l">
-              <a:lnSpc>
-                <a:spcPct val="108000"/>
-              </a:lnSpc>
-              <a:spcBef>
-                <a:spcPts val="0"/>
-              </a:spcBef>
-              <a:spcAft>
-                <a:spcPts val="0"/>
-              </a:spcAft>
-            </a:pPr>
-            <a:r>
-              <a:rPr sz="1739" b="1" lang="pl-PL">
-                <a:solidFill>
-                  <a:srgbClr val="006C86"/>
-                </a:solidFill>
-                <a:latin typeface="DejaVu Sans"/>
-              </a:rPr>
-              <a:t>Kod do stałych reguł</a:t>
-            </a:r>
-          </a:p>
-        </p:txBody>
-      </p:sp>
-      <p:sp>
-        <p:nvSpPr>
-          <p:cNvPr id="28" name="TextBox 27"/>
-          <p:cNvSpPr txBox="1"/>
-          <p:nvPr/>
-        </p:nvSpPr>
-        <p:spPr>
-          <a:xfrm>
-            <a:off x="7772400" y="7059168"/>
-            <a:ext cx="3200400" cy="630936"/>
-          </a:xfrm>
-          <a:prstGeom prst="rect">
-            <a:avLst/>
-          </a:prstGeom>
-          <a:noFill/>
-        </p:spPr>
-        <p:txBody>
-          <a:bodyPr wrap="square" lIns="0" rIns="0" tIns="0" bIns="0" anchor="t">
-            <a:spAutoFit/>
-          </a:bodyPr>
-          <a:lstStyle/>
-          <a:p>
-            <a:pPr algn="l">
-              <a:lnSpc>
-                <a:spcPct val="108000"/>
-              </a:lnSpc>
-              <a:spcBef>
-                <a:spcPts val="0"/>
-              </a:spcBef>
-              <a:spcAft>
-                <a:spcPts val="0"/>
-              </a:spcAft>
-            </a:pPr>
-            <a:r>
-              <a:rPr sz="1620" b="0" lang="pl-PL">
-                <a:solidFill>
-                  <a:srgbClr val="192F3C"/>
-                </a:solidFill>
-                <a:latin typeface="DejaVu Sans"/>
-              </a:rPr>
-              <a:t>Obliczenia i kontrole przenieś do kodu.</a:t>
-            </a:r>
-          </a:p>
-        </p:txBody>
-      </p:sp>
-      <p:sp>
-        <p:nvSpPr>
-          <p:cNvPr id="29" name="TextBox 28"/>
-          <p:cNvSpPr txBox="1"/>
-          <p:nvPr/>
-        </p:nvSpPr>
-        <p:spPr>
-          <a:xfrm>
-            <a:off x="11356848" y="6574536"/>
-            <a:ext cx="3218688" cy="347472"/>
-          </a:xfrm>
-          <a:prstGeom prst="rect">
-            <a:avLst/>
-          </a:prstGeom>
-          <a:noFill/>
-        </p:spPr>
-        <p:txBody>
-          <a:bodyPr wrap="square" lIns="0" rIns="0" tIns="0" bIns="0" anchor="t">
-            <a:spAutoFit/>
-          </a:bodyPr>
-          <a:lstStyle/>
-          <a:p>
-            <a:pPr algn="l">
-              <a:lnSpc>
-                <a:spcPct val="108000"/>
-              </a:lnSpc>
-              <a:spcBef>
-                <a:spcPts val="0"/>
-              </a:spcBef>
-              <a:spcAft>
-                <a:spcPts val="0"/>
-              </a:spcAft>
-            </a:pPr>
-            <a:r>
-              <a:rPr sz="1739" b="1" lang="pl-PL">
-                <a:solidFill>
-                  <a:srgbClr val="006C86"/>
-                </a:solidFill>
-                <a:latin typeface="DejaVu Sans"/>
-              </a:rPr>
-              <a:t>Powtórz i porównaj</a:t>
-            </a:r>
-          </a:p>
-        </p:txBody>
-      </p:sp>
-      <p:sp>
-        <p:nvSpPr>
-          <p:cNvPr id="30" name="TextBox 29"/>
-          <p:cNvSpPr txBox="1"/>
-          <p:nvPr/>
-        </p:nvSpPr>
-        <p:spPr>
-          <a:xfrm>
-            <a:off x="11356848" y="7059168"/>
-            <a:ext cx="3200400" cy="630936"/>
-          </a:xfrm>
-          <a:prstGeom prst="rect">
-            <a:avLst/>
-          </a:prstGeom>
-          <a:noFill/>
-        </p:spPr>
-        <p:txBody>
-          <a:bodyPr wrap="square" lIns="0" rIns="0" tIns="0" bIns="0" anchor="t">
-            <a:spAutoFit/>
-          </a:bodyPr>
-          <a:lstStyle/>
-          <a:p>
-            <a:pPr algn="l">
-              <a:lnSpc>
-                <a:spcPct val="108000"/>
-              </a:lnSpc>
-              <a:spcBef>
-                <a:spcPts val="0"/>
-              </a:spcBef>
-              <a:spcAft>
-                <a:spcPts val="0"/>
-              </a:spcAft>
-            </a:pPr>
-            <a:r>
-              <a:rPr sz="1620" b="0" lang="pl-PL">
-                <a:solidFill>
-                  <a:srgbClr val="192F3C"/>
-                </a:solidFill>
-                <a:latin typeface="DejaVu Sans"/>
-              </a:rPr>
-              <a:t>Sprawdź istotne różnice w źródłach.</a:t>
+              <a:t>Dzień 14: powrót. Rozkład przejazdów i wybór wybrzeża dopasuj do terminu podróży.</a:t>
             </a:r>
           </a:p>
         </p:txBody>
